--- a/site/preza.pptx
+++ b/site/preza.pptx
@@ -4,9 +4,34 @@
   <p:sldMasterIdLst>
     <p:sldMasterId id="2147483648" r:id="rId1"/>
   </p:sldMasterIdLst>
-  <p:sldIdLst/>
+  <p:sldIdLst>
+    <p:sldId id="256" r:id="rId2"/>
+    <p:sldId id="257" r:id="rId3"/>
+    <p:sldId id="258" r:id="rId4"/>
+    <p:sldId id="259" r:id="rId5"/>
+    <p:sldId id="260" r:id="rId6"/>
+    <p:sldId id="261" r:id="rId7"/>
+    <p:sldId id="262" r:id="rId8"/>
+    <p:sldId id="263" r:id="rId9"/>
+    <p:sldId id="264" r:id="rId10"/>
+    <p:sldId id="265" r:id="rId11"/>
+    <p:sldId id="266" r:id="rId12"/>
+    <p:sldId id="267" r:id="rId13"/>
+    <p:sldId id="268" r:id="rId14"/>
+    <p:sldId id="269" r:id="rId15"/>
+    <p:sldId id="270" r:id="rId16"/>
+    <p:sldId id="271" r:id="rId17"/>
+    <p:sldId id="272" r:id="rId18"/>
+    <p:sldId id="273" r:id="rId19"/>
+    <p:sldId id="274" r:id="rId20"/>
+    <p:sldId id="275" r:id="rId21"/>
+    <p:sldId id="276" r:id="rId22"/>
+    <p:sldId id="277" r:id="rId23"/>
+    <p:sldId id="278" r:id="rId24"/>
+    <p:sldId id="279" r:id="rId25"/>
+  </p:sldIdLst>
   <p:notesMasterIdLst>
-    <p:notesMasterId r:id="rId2"/>
+    <p:notesMasterId r:id="rId26"/>
   </p:notesMasterIdLst>
   <p:sldSz cx="12192000" cy="6858000"/>
   <p:notesSz cx="6858000" cy="12192000"/>
@@ -452,6 +477,2118 @@
     </a:lvl9pPr>
   </p:notesStyle>
 </p:notesMaster>
+</file>
+
+<file path=ppt/notesSlides/notesSlide1.xml><?xml version="1.0" encoding="utf-8"?>
+<p:notes xmlns:a="http://schemas.openxmlformats.org/drawingml/2006/main" xmlns:r="http://schemas.openxmlformats.org/officeDocument/2006/relationships" xmlns:p="http://schemas.openxmlformats.org/presentationml/2006/main">
+  <p:cSld>
+    <p:spTree>
+      <p:nvGrpSpPr>
+        <p:cNvPr id="1" name=""/>
+        <p:cNvGrpSpPr/>
+        <p:nvPr/>
+      </p:nvGrpSpPr>
+      <p:grpSpPr>
+        <a:xfrm>
+          <a:off x="0" y="0"/>
+          <a:ext cx="0" cy="0"/>
+          <a:chOff x="0" y="0"/>
+          <a:chExt cx="0" cy="0"/>
+        </a:xfrm>
+      </p:grpSpPr>
+      <p:sp>
+        <p:nvSpPr>
+          <p:cNvPr id="2" name="Slide Image Placeholder 1"/>
+          <p:cNvSpPr>
+            <a:spLocks noGrp="1" noRot="1" noChangeAspect="1"/>
+          </p:cNvSpPr>
+          <p:nvPr>
+            <p:ph type="sldImg"/>
+          </p:nvPr>
+        </p:nvSpPr>
+        <p:spPr/>
+      </p:sp>
+      <p:sp>
+        <p:nvSpPr>
+          <p:cNvPr id="3" name="Notes Placeholder 2"/>
+          <p:cNvSpPr>
+            <a:spLocks noGrp="1"/>
+          </p:cNvSpPr>
+          <p:nvPr>
+            <p:ph type="body" idx="1"/>
+          </p:nvPr>
+        </p:nvSpPr>
+        <p:spPr/>
+        <p:txBody>
+          <a:bodyPr/>
+          <a:lstStyle/>
+          <a:p>
+            <a:r>
+              <a:rPr lang="en-US" dirty="0"/>
+              <a:t/>
+            </a:r>
+            <a:endParaRPr lang="en-US" dirty="0"/>
+          </a:p>
+        </p:txBody>
+      </p:sp>
+      <p:sp>
+        <p:nvSpPr>
+          <p:cNvPr id="4" name="Slide Number Placeholder 3"/>
+          <p:cNvSpPr>
+            <a:spLocks noGrp="1"/>
+          </p:cNvSpPr>
+          <p:nvPr>
+            <p:ph type="sldNum" sz="quarter" idx="10"/>
+          </p:nvPr>
+        </p:nvSpPr>
+        <p:spPr/>
+        <p:txBody>
+          <a:bodyPr/>
+          <a:lstStyle/>
+          <a:p>
+            <a:fld id="{F7021451-1387-4CA6-816F-3879F97B5CBC}" type="slidenum">
+              <a:rPr lang="en-US"/>
+              <a:t>1</a:t>
+            </a:fld>
+            <a:endParaRPr lang="en-US"/>
+          </a:p>
+        </p:txBody>
+      </p:sp>
+    </p:spTree>
+    <p:extLst>
+      <p:ext uri="{BB962C8B-B14F-4D97-AF65-F5344CB8AC3E}">
+        <p14:creationId xmlns:p14="http://schemas.microsoft.com/office/powerpoint/2010/main" val="1024086991"/>
+      </p:ext>
+    </p:extLst>
+  </p:cSld>
+  <p:clrMapOvr>
+    <a:masterClrMapping/>
+  </p:clrMapOvr>
+</p:notes>
+</file>
+
+<file path=ppt/notesSlides/notesSlide10.xml><?xml version="1.0" encoding="utf-8"?>
+<p:notes xmlns:a="http://schemas.openxmlformats.org/drawingml/2006/main" xmlns:r="http://schemas.openxmlformats.org/officeDocument/2006/relationships" xmlns:p="http://schemas.openxmlformats.org/presentationml/2006/main">
+  <p:cSld>
+    <p:spTree>
+      <p:nvGrpSpPr>
+        <p:cNvPr id="1" name=""/>
+        <p:cNvGrpSpPr/>
+        <p:nvPr/>
+      </p:nvGrpSpPr>
+      <p:grpSpPr>
+        <a:xfrm>
+          <a:off x="0" y="0"/>
+          <a:ext cx="0" cy="0"/>
+          <a:chOff x="0" y="0"/>
+          <a:chExt cx="0" cy="0"/>
+        </a:xfrm>
+      </p:grpSpPr>
+      <p:sp>
+        <p:nvSpPr>
+          <p:cNvPr id="2" name="Slide Image Placeholder 1"/>
+          <p:cNvSpPr>
+            <a:spLocks noGrp="1" noRot="1" noChangeAspect="1"/>
+          </p:cNvSpPr>
+          <p:nvPr>
+            <p:ph type="sldImg"/>
+          </p:nvPr>
+        </p:nvSpPr>
+        <p:spPr/>
+      </p:sp>
+      <p:sp>
+        <p:nvSpPr>
+          <p:cNvPr id="3" name="Notes Placeholder 2"/>
+          <p:cNvSpPr>
+            <a:spLocks noGrp="1"/>
+          </p:cNvSpPr>
+          <p:nvPr>
+            <p:ph type="body" idx="1"/>
+          </p:nvPr>
+        </p:nvSpPr>
+        <p:spPr/>
+        <p:txBody>
+          <a:bodyPr/>
+          <a:lstStyle/>
+          <a:p>
+            <a:r>
+              <a:rPr lang="en-US" dirty="0"/>
+              <a:t/>
+            </a:r>
+            <a:endParaRPr lang="en-US" dirty="0"/>
+          </a:p>
+        </p:txBody>
+      </p:sp>
+      <p:sp>
+        <p:nvSpPr>
+          <p:cNvPr id="4" name="Slide Number Placeholder 3"/>
+          <p:cNvSpPr>
+            <a:spLocks noGrp="1"/>
+          </p:cNvSpPr>
+          <p:nvPr>
+            <p:ph type="sldNum" sz="quarter" idx="10"/>
+          </p:nvPr>
+        </p:nvSpPr>
+        <p:spPr/>
+        <p:txBody>
+          <a:bodyPr/>
+          <a:lstStyle/>
+          <a:p>
+            <a:fld id="{F7021451-1387-4CA6-816F-3879F97B5CBC}" type="slidenum">
+              <a:rPr lang="en-US"/>
+              <a:t>10</a:t>
+            </a:fld>
+            <a:endParaRPr lang="en-US"/>
+          </a:p>
+        </p:txBody>
+      </p:sp>
+    </p:spTree>
+    <p:extLst>
+      <p:ext uri="{BB962C8B-B14F-4D97-AF65-F5344CB8AC3E}">
+        <p14:creationId xmlns:p14="http://schemas.microsoft.com/office/powerpoint/2010/main" val="1024086991"/>
+      </p:ext>
+    </p:extLst>
+  </p:cSld>
+  <p:clrMapOvr>
+    <a:masterClrMapping/>
+  </p:clrMapOvr>
+</p:notes>
+</file>
+
+<file path=ppt/notesSlides/notesSlide11.xml><?xml version="1.0" encoding="utf-8"?>
+<p:notes xmlns:a="http://schemas.openxmlformats.org/drawingml/2006/main" xmlns:r="http://schemas.openxmlformats.org/officeDocument/2006/relationships" xmlns:p="http://schemas.openxmlformats.org/presentationml/2006/main">
+  <p:cSld>
+    <p:spTree>
+      <p:nvGrpSpPr>
+        <p:cNvPr id="1" name=""/>
+        <p:cNvGrpSpPr/>
+        <p:nvPr/>
+      </p:nvGrpSpPr>
+      <p:grpSpPr>
+        <a:xfrm>
+          <a:off x="0" y="0"/>
+          <a:ext cx="0" cy="0"/>
+          <a:chOff x="0" y="0"/>
+          <a:chExt cx="0" cy="0"/>
+        </a:xfrm>
+      </p:grpSpPr>
+      <p:sp>
+        <p:nvSpPr>
+          <p:cNvPr id="2" name="Slide Image Placeholder 1"/>
+          <p:cNvSpPr>
+            <a:spLocks noGrp="1" noRot="1" noChangeAspect="1"/>
+          </p:cNvSpPr>
+          <p:nvPr>
+            <p:ph type="sldImg"/>
+          </p:nvPr>
+        </p:nvSpPr>
+        <p:spPr/>
+      </p:sp>
+      <p:sp>
+        <p:nvSpPr>
+          <p:cNvPr id="3" name="Notes Placeholder 2"/>
+          <p:cNvSpPr>
+            <a:spLocks noGrp="1"/>
+          </p:cNvSpPr>
+          <p:nvPr>
+            <p:ph type="body" idx="1"/>
+          </p:nvPr>
+        </p:nvSpPr>
+        <p:spPr/>
+        <p:txBody>
+          <a:bodyPr/>
+          <a:lstStyle/>
+          <a:p>
+            <a:r>
+              <a:rPr lang="en-US" dirty="0"/>
+              <a:t/>
+            </a:r>
+            <a:endParaRPr lang="en-US" dirty="0"/>
+          </a:p>
+        </p:txBody>
+      </p:sp>
+      <p:sp>
+        <p:nvSpPr>
+          <p:cNvPr id="4" name="Slide Number Placeholder 3"/>
+          <p:cNvSpPr>
+            <a:spLocks noGrp="1"/>
+          </p:cNvSpPr>
+          <p:nvPr>
+            <p:ph type="sldNum" sz="quarter" idx="10"/>
+          </p:nvPr>
+        </p:nvSpPr>
+        <p:spPr/>
+        <p:txBody>
+          <a:bodyPr/>
+          <a:lstStyle/>
+          <a:p>
+            <a:fld id="{F7021451-1387-4CA6-816F-3879F97B5CBC}" type="slidenum">
+              <a:rPr lang="en-US"/>
+              <a:t>11</a:t>
+            </a:fld>
+            <a:endParaRPr lang="en-US"/>
+          </a:p>
+        </p:txBody>
+      </p:sp>
+    </p:spTree>
+    <p:extLst>
+      <p:ext uri="{BB962C8B-B14F-4D97-AF65-F5344CB8AC3E}">
+        <p14:creationId xmlns:p14="http://schemas.microsoft.com/office/powerpoint/2010/main" val="1024086991"/>
+      </p:ext>
+    </p:extLst>
+  </p:cSld>
+  <p:clrMapOvr>
+    <a:masterClrMapping/>
+  </p:clrMapOvr>
+</p:notes>
+</file>
+
+<file path=ppt/notesSlides/notesSlide12.xml><?xml version="1.0" encoding="utf-8"?>
+<p:notes xmlns:a="http://schemas.openxmlformats.org/drawingml/2006/main" xmlns:r="http://schemas.openxmlformats.org/officeDocument/2006/relationships" xmlns:p="http://schemas.openxmlformats.org/presentationml/2006/main">
+  <p:cSld>
+    <p:spTree>
+      <p:nvGrpSpPr>
+        <p:cNvPr id="1" name=""/>
+        <p:cNvGrpSpPr/>
+        <p:nvPr/>
+      </p:nvGrpSpPr>
+      <p:grpSpPr>
+        <a:xfrm>
+          <a:off x="0" y="0"/>
+          <a:ext cx="0" cy="0"/>
+          <a:chOff x="0" y="0"/>
+          <a:chExt cx="0" cy="0"/>
+        </a:xfrm>
+      </p:grpSpPr>
+      <p:sp>
+        <p:nvSpPr>
+          <p:cNvPr id="2" name="Slide Image Placeholder 1"/>
+          <p:cNvSpPr>
+            <a:spLocks noGrp="1" noRot="1" noChangeAspect="1"/>
+          </p:cNvSpPr>
+          <p:nvPr>
+            <p:ph type="sldImg"/>
+          </p:nvPr>
+        </p:nvSpPr>
+        <p:spPr/>
+      </p:sp>
+      <p:sp>
+        <p:nvSpPr>
+          <p:cNvPr id="3" name="Notes Placeholder 2"/>
+          <p:cNvSpPr>
+            <a:spLocks noGrp="1"/>
+          </p:cNvSpPr>
+          <p:nvPr>
+            <p:ph type="body" idx="1"/>
+          </p:nvPr>
+        </p:nvSpPr>
+        <p:spPr/>
+        <p:txBody>
+          <a:bodyPr/>
+          <a:lstStyle/>
+          <a:p>
+            <a:r>
+              <a:rPr lang="en-US" dirty="0"/>
+              <a:t/>
+            </a:r>
+            <a:endParaRPr lang="en-US" dirty="0"/>
+          </a:p>
+        </p:txBody>
+      </p:sp>
+      <p:sp>
+        <p:nvSpPr>
+          <p:cNvPr id="4" name="Slide Number Placeholder 3"/>
+          <p:cNvSpPr>
+            <a:spLocks noGrp="1"/>
+          </p:cNvSpPr>
+          <p:nvPr>
+            <p:ph type="sldNum" sz="quarter" idx="10"/>
+          </p:nvPr>
+        </p:nvSpPr>
+        <p:spPr/>
+        <p:txBody>
+          <a:bodyPr/>
+          <a:lstStyle/>
+          <a:p>
+            <a:fld id="{F7021451-1387-4CA6-816F-3879F97B5CBC}" type="slidenum">
+              <a:rPr lang="en-US"/>
+              <a:t>12</a:t>
+            </a:fld>
+            <a:endParaRPr lang="en-US"/>
+          </a:p>
+        </p:txBody>
+      </p:sp>
+    </p:spTree>
+    <p:extLst>
+      <p:ext uri="{BB962C8B-B14F-4D97-AF65-F5344CB8AC3E}">
+        <p14:creationId xmlns:p14="http://schemas.microsoft.com/office/powerpoint/2010/main" val="1024086991"/>
+      </p:ext>
+    </p:extLst>
+  </p:cSld>
+  <p:clrMapOvr>
+    <a:masterClrMapping/>
+  </p:clrMapOvr>
+</p:notes>
+</file>
+
+<file path=ppt/notesSlides/notesSlide13.xml><?xml version="1.0" encoding="utf-8"?>
+<p:notes xmlns:a="http://schemas.openxmlformats.org/drawingml/2006/main" xmlns:r="http://schemas.openxmlformats.org/officeDocument/2006/relationships" xmlns:p="http://schemas.openxmlformats.org/presentationml/2006/main">
+  <p:cSld>
+    <p:spTree>
+      <p:nvGrpSpPr>
+        <p:cNvPr id="1" name=""/>
+        <p:cNvGrpSpPr/>
+        <p:nvPr/>
+      </p:nvGrpSpPr>
+      <p:grpSpPr>
+        <a:xfrm>
+          <a:off x="0" y="0"/>
+          <a:ext cx="0" cy="0"/>
+          <a:chOff x="0" y="0"/>
+          <a:chExt cx="0" cy="0"/>
+        </a:xfrm>
+      </p:grpSpPr>
+      <p:sp>
+        <p:nvSpPr>
+          <p:cNvPr id="2" name="Slide Image Placeholder 1"/>
+          <p:cNvSpPr>
+            <a:spLocks noGrp="1" noRot="1" noChangeAspect="1"/>
+          </p:cNvSpPr>
+          <p:nvPr>
+            <p:ph type="sldImg"/>
+          </p:nvPr>
+        </p:nvSpPr>
+        <p:spPr/>
+      </p:sp>
+      <p:sp>
+        <p:nvSpPr>
+          <p:cNvPr id="3" name="Notes Placeholder 2"/>
+          <p:cNvSpPr>
+            <a:spLocks noGrp="1"/>
+          </p:cNvSpPr>
+          <p:nvPr>
+            <p:ph type="body" idx="1"/>
+          </p:nvPr>
+        </p:nvSpPr>
+        <p:spPr/>
+        <p:txBody>
+          <a:bodyPr/>
+          <a:lstStyle/>
+          <a:p>
+            <a:r>
+              <a:rPr lang="en-US" dirty="0"/>
+              <a:t/>
+            </a:r>
+            <a:endParaRPr lang="en-US" dirty="0"/>
+          </a:p>
+        </p:txBody>
+      </p:sp>
+      <p:sp>
+        <p:nvSpPr>
+          <p:cNvPr id="4" name="Slide Number Placeholder 3"/>
+          <p:cNvSpPr>
+            <a:spLocks noGrp="1"/>
+          </p:cNvSpPr>
+          <p:nvPr>
+            <p:ph type="sldNum" sz="quarter" idx="10"/>
+          </p:nvPr>
+        </p:nvSpPr>
+        <p:spPr/>
+        <p:txBody>
+          <a:bodyPr/>
+          <a:lstStyle/>
+          <a:p>
+            <a:fld id="{F7021451-1387-4CA6-816F-3879F97B5CBC}" type="slidenum">
+              <a:rPr lang="en-US"/>
+              <a:t>13</a:t>
+            </a:fld>
+            <a:endParaRPr lang="en-US"/>
+          </a:p>
+        </p:txBody>
+      </p:sp>
+    </p:spTree>
+    <p:extLst>
+      <p:ext uri="{BB962C8B-B14F-4D97-AF65-F5344CB8AC3E}">
+        <p14:creationId xmlns:p14="http://schemas.microsoft.com/office/powerpoint/2010/main" val="1024086991"/>
+      </p:ext>
+    </p:extLst>
+  </p:cSld>
+  <p:clrMapOvr>
+    <a:masterClrMapping/>
+  </p:clrMapOvr>
+</p:notes>
+</file>
+
+<file path=ppt/notesSlides/notesSlide14.xml><?xml version="1.0" encoding="utf-8"?>
+<p:notes xmlns:a="http://schemas.openxmlformats.org/drawingml/2006/main" xmlns:r="http://schemas.openxmlformats.org/officeDocument/2006/relationships" xmlns:p="http://schemas.openxmlformats.org/presentationml/2006/main">
+  <p:cSld>
+    <p:spTree>
+      <p:nvGrpSpPr>
+        <p:cNvPr id="1" name=""/>
+        <p:cNvGrpSpPr/>
+        <p:nvPr/>
+      </p:nvGrpSpPr>
+      <p:grpSpPr>
+        <a:xfrm>
+          <a:off x="0" y="0"/>
+          <a:ext cx="0" cy="0"/>
+          <a:chOff x="0" y="0"/>
+          <a:chExt cx="0" cy="0"/>
+        </a:xfrm>
+      </p:grpSpPr>
+      <p:sp>
+        <p:nvSpPr>
+          <p:cNvPr id="2" name="Slide Image Placeholder 1"/>
+          <p:cNvSpPr>
+            <a:spLocks noGrp="1" noRot="1" noChangeAspect="1"/>
+          </p:cNvSpPr>
+          <p:nvPr>
+            <p:ph type="sldImg"/>
+          </p:nvPr>
+        </p:nvSpPr>
+        <p:spPr/>
+      </p:sp>
+      <p:sp>
+        <p:nvSpPr>
+          <p:cNvPr id="3" name="Notes Placeholder 2"/>
+          <p:cNvSpPr>
+            <a:spLocks noGrp="1"/>
+          </p:cNvSpPr>
+          <p:nvPr>
+            <p:ph type="body" idx="1"/>
+          </p:nvPr>
+        </p:nvSpPr>
+        <p:spPr/>
+        <p:txBody>
+          <a:bodyPr/>
+          <a:lstStyle/>
+          <a:p>
+            <a:r>
+              <a:rPr lang="en-US" dirty="0"/>
+              <a:t/>
+            </a:r>
+            <a:endParaRPr lang="en-US" dirty="0"/>
+          </a:p>
+        </p:txBody>
+      </p:sp>
+      <p:sp>
+        <p:nvSpPr>
+          <p:cNvPr id="4" name="Slide Number Placeholder 3"/>
+          <p:cNvSpPr>
+            <a:spLocks noGrp="1"/>
+          </p:cNvSpPr>
+          <p:nvPr>
+            <p:ph type="sldNum" sz="quarter" idx="10"/>
+          </p:nvPr>
+        </p:nvSpPr>
+        <p:spPr/>
+        <p:txBody>
+          <a:bodyPr/>
+          <a:lstStyle/>
+          <a:p>
+            <a:fld id="{F7021451-1387-4CA6-816F-3879F97B5CBC}" type="slidenum">
+              <a:rPr lang="en-US"/>
+              <a:t>14</a:t>
+            </a:fld>
+            <a:endParaRPr lang="en-US"/>
+          </a:p>
+        </p:txBody>
+      </p:sp>
+    </p:spTree>
+    <p:extLst>
+      <p:ext uri="{BB962C8B-B14F-4D97-AF65-F5344CB8AC3E}">
+        <p14:creationId xmlns:p14="http://schemas.microsoft.com/office/powerpoint/2010/main" val="1024086991"/>
+      </p:ext>
+    </p:extLst>
+  </p:cSld>
+  <p:clrMapOvr>
+    <a:masterClrMapping/>
+  </p:clrMapOvr>
+</p:notes>
+</file>
+
+<file path=ppt/notesSlides/notesSlide15.xml><?xml version="1.0" encoding="utf-8"?>
+<p:notes xmlns:a="http://schemas.openxmlformats.org/drawingml/2006/main" xmlns:r="http://schemas.openxmlformats.org/officeDocument/2006/relationships" xmlns:p="http://schemas.openxmlformats.org/presentationml/2006/main">
+  <p:cSld>
+    <p:spTree>
+      <p:nvGrpSpPr>
+        <p:cNvPr id="1" name=""/>
+        <p:cNvGrpSpPr/>
+        <p:nvPr/>
+      </p:nvGrpSpPr>
+      <p:grpSpPr>
+        <a:xfrm>
+          <a:off x="0" y="0"/>
+          <a:ext cx="0" cy="0"/>
+          <a:chOff x="0" y="0"/>
+          <a:chExt cx="0" cy="0"/>
+        </a:xfrm>
+      </p:grpSpPr>
+      <p:sp>
+        <p:nvSpPr>
+          <p:cNvPr id="2" name="Slide Image Placeholder 1"/>
+          <p:cNvSpPr>
+            <a:spLocks noGrp="1" noRot="1" noChangeAspect="1"/>
+          </p:cNvSpPr>
+          <p:nvPr>
+            <p:ph type="sldImg"/>
+          </p:nvPr>
+        </p:nvSpPr>
+        <p:spPr/>
+      </p:sp>
+      <p:sp>
+        <p:nvSpPr>
+          <p:cNvPr id="3" name="Notes Placeholder 2"/>
+          <p:cNvSpPr>
+            <a:spLocks noGrp="1"/>
+          </p:cNvSpPr>
+          <p:nvPr>
+            <p:ph type="body" idx="1"/>
+          </p:nvPr>
+        </p:nvSpPr>
+        <p:spPr/>
+        <p:txBody>
+          <a:bodyPr/>
+          <a:lstStyle/>
+          <a:p>
+            <a:r>
+              <a:rPr lang="en-US" dirty="0"/>
+              <a:t/>
+            </a:r>
+            <a:endParaRPr lang="en-US" dirty="0"/>
+          </a:p>
+        </p:txBody>
+      </p:sp>
+      <p:sp>
+        <p:nvSpPr>
+          <p:cNvPr id="4" name="Slide Number Placeholder 3"/>
+          <p:cNvSpPr>
+            <a:spLocks noGrp="1"/>
+          </p:cNvSpPr>
+          <p:nvPr>
+            <p:ph type="sldNum" sz="quarter" idx="10"/>
+          </p:nvPr>
+        </p:nvSpPr>
+        <p:spPr/>
+        <p:txBody>
+          <a:bodyPr/>
+          <a:lstStyle/>
+          <a:p>
+            <a:fld id="{F7021451-1387-4CA6-816F-3879F97B5CBC}" type="slidenum">
+              <a:rPr lang="en-US"/>
+              <a:t>15</a:t>
+            </a:fld>
+            <a:endParaRPr lang="en-US"/>
+          </a:p>
+        </p:txBody>
+      </p:sp>
+    </p:spTree>
+    <p:extLst>
+      <p:ext uri="{BB962C8B-B14F-4D97-AF65-F5344CB8AC3E}">
+        <p14:creationId xmlns:p14="http://schemas.microsoft.com/office/powerpoint/2010/main" val="1024086991"/>
+      </p:ext>
+    </p:extLst>
+  </p:cSld>
+  <p:clrMapOvr>
+    <a:masterClrMapping/>
+  </p:clrMapOvr>
+</p:notes>
+</file>
+
+<file path=ppt/notesSlides/notesSlide16.xml><?xml version="1.0" encoding="utf-8"?>
+<p:notes xmlns:a="http://schemas.openxmlformats.org/drawingml/2006/main" xmlns:r="http://schemas.openxmlformats.org/officeDocument/2006/relationships" xmlns:p="http://schemas.openxmlformats.org/presentationml/2006/main">
+  <p:cSld>
+    <p:spTree>
+      <p:nvGrpSpPr>
+        <p:cNvPr id="1" name=""/>
+        <p:cNvGrpSpPr/>
+        <p:nvPr/>
+      </p:nvGrpSpPr>
+      <p:grpSpPr>
+        <a:xfrm>
+          <a:off x="0" y="0"/>
+          <a:ext cx="0" cy="0"/>
+          <a:chOff x="0" y="0"/>
+          <a:chExt cx="0" cy="0"/>
+        </a:xfrm>
+      </p:grpSpPr>
+      <p:sp>
+        <p:nvSpPr>
+          <p:cNvPr id="2" name="Slide Image Placeholder 1"/>
+          <p:cNvSpPr>
+            <a:spLocks noGrp="1" noRot="1" noChangeAspect="1"/>
+          </p:cNvSpPr>
+          <p:nvPr>
+            <p:ph type="sldImg"/>
+          </p:nvPr>
+        </p:nvSpPr>
+        <p:spPr/>
+      </p:sp>
+      <p:sp>
+        <p:nvSpPr>
+          <p:cNvPr id="3" name="Notes Placeholder 2"/>
+          <p:cNvSpPr>
+            <a:spLocks noGrp="1"/>
+          </p:cNvSpPr>
+          <p:nvPr>
+            <p:ph type="body" idx="1"/>
+          </p:nvPr>
+        </p:nvSpPr>
+        <p:spPr/>
+        <p:txBody>
+          <a:bodyPr/>
+          <a:lstStyle/>
+          <a:p>
+            <a:r>
+              <a:rPr lang="en-US" dirty="0"/>
+              <a:t/>
+            </a:r>
+            <a:endParaRPr lang="en-US" dirty="0"/>
+          </a:p>
+        </p:txBody>
+      </p:sp>
+      <p:sp>
+        <p:nvSpPr>
+          <p:cNvPr id="4" name="Slide Number Placeholder 3"/>
+          <p:cNvSpPr>
+            <a:spLocks noGrp="1"/>
+          </p:cNvSpPr>
+          <p:nvPr>
+            <p:ph type="sldNum" sz="quarter" idx="10"/>
+          </p:nvPr>
+        </p:nvSpPr>
+        <p:spPr/>
+        <p:txBody>
+          <a:bodyPr/>
+          <a:lstStyle/>
+          <a:p>
+            <a:fld id="{F7021451-1387-4CA6-816F-3879F97B5CBC}" type="slidenum">
+              <a:rPr lang="en-US"/>
+              <a:t>16</a:t>
+            </a:fld>
+            <a:endParaRPr lang="en-US"/>
+          </a:p>
+        </p:txBody>
+      </p:sp>
+    </p:spTree>
+    <p:extLst>
+      <p:ext uri="{BB962C8B-B14F-4D97-AF65-F5344CB8AC3E}">
+        <p14:creationId xmlns:p14="http://schemas.microsoft.com/office/powerpoint/2010/main" val="1024086991"/>
+      </p:ext>
+    </p:extLst>
+  </p:cSld>
+  <p:clrMapOvr>
+    <a:masterClrMapping/>
+  </p:clrMapOvr>
+</p:notes>
+</file>
+
+<file path=ppt/notesSlides/notesSlide17.xml><?xml version="1.0" encoding="utf-8"?>
+<p:notes xmlns:a="http://schemas.openxmlformats.org/drawingml/2006/main" xmlns:r="http://schemas.openxmlformats.org/officeDocument/2006/relationships" xmlns:p="http://schemas.openxmlformats.org/presentationml/2006/main">
+  <p:cSld>
+    <p:spTree>
+      <p:nvGrpSpPr>
+        <p:cNvPr id="1" name=""/>
+        <p:cNvGrpSpPr/>
+        <p:nvPr/>
+      </p:nvGrpSpPr>
+      <p:grpSpPr>
+        <a:xfrm>
+          <a:off x="0" y="0"/>
+          <a:ext cx="0" cy="0"/>
+          <a:chOff x="0" y="0"/>
+          <a:chExt cx="0" cy="0"/>
+        </a:xfrm>
+      </p:grpSpPr>
+      <p:sp>
+        <p:nvSpPr>
+          <p:cNvPr id="2" name="Slide Image Placeholder 1"/>
+          <p:cNvSpPr>
+            <a:spLocks noGrp="1" noRot="1" noChangeAspect="1"/>
+          </p:cNvSpPr>
+          <p:nvPr>
+            <p:ph type="sldImg"/>
+          </p:nvPr>
+        </p:nvSpPr>
+        <p:spPr/>
+      </p:sp>
+      <p:sp>
+        <p:nvSpPr>
+          <p:cNvPr id="3" name="Notes Placeholder 2"/>
+          <p:cNvSpPr>
+            <a:spLocks noGrp="1"/>
+          </p:cNvSpPr>
+          <p:nvPr>
+            <p:ph type="body" idx="1"/>
+          </p:nvPr>
+        </p:nvSpPr>
+        <p:spPr/>
+        <p:txBody>
+          <a:bodyPr/>
+          <a:lstStyle/>
+          <a:p>
+            <a:r>
+              <a:rPr lang="en-US" dirty="0"/>
+              <a:t/>
+            </a:r>
+            <a:endParaRPr lang="en-US" dirty="0"/>
+          </a:p>
+        </p:txBody>
+      </p:sp>
+      <p:sp>
+        <p:nvSpPr>
+          <p:cNvPr id="4" name="Slide Number Placeholder 3"/>
+          <p:cNvSpPr>
+            <a:spLocks noGrp="1"/>
+          </p:cNvSpPr>
+          <p:nvPr>
+            <p:ph type="sldNum" sz="quarter" idx="10"/>
+          </p:nvPr>
+        </p:nvSpPr>
+        <p:spPr/>
+        <p:txBody>
+          <a:bodyPr/>
+          <a:lstStyle/>
+          <a:p>
+            <a:fld id="{F7021451-1387-4CA6-816F-3879F97B5CBC}" type="slidenum">
+              <a:rPr lang="en-US"/>
+              <a:t>17</a:t>
+            </a:fld>
+            <a:endParaRPr lang="en-US"/>
+          </a:p>
+        </p:txBody>
+      </p:sp>
+    </p:spTree>
+    <p:extLst>
+      <p:ext uri="{BB962C8B-B14F-4D97-AF65-F5344CB8AC3E}">
+        <p14:creationId xmlns:p14="http://schemas.microsoft.com/office/powerpoint/2010/main" val="1024086991"/>
+      </p:ext>
+    </p:extLst>
+  </p:cSld>
+  <p:clrMapOvr>
+    <a:masterClrMapping/>
+  </p:clrMapOvr>
+</p:notes>
+</file>
+
+<file path=ppt/notesSlides/notesSlide18.xml><?xml version="1.0" encoding="utf-8"?>
+<p:notes xmlns:a="http://schemas.openxmlformats.org/drawingml/2006/main" xmlns:r="http://schemas.openxmlformats.org/officeDocument/2006/relationships" xmlns:p="http://schemas.openxmlformats.org/presentationml/2006/main">
+  <p:cSld>
+    <p:spTree>
+      <p:nvGrpSpPr>
+        <p:cNvPr id="1" name=""/>
+        <p:cNvGrpSpPr/>
+        <p:nvPr/>
+      </p:nvGrpSpPr>
+      <p:grpSpPr>
+        <a:xfrm>
+          <a:off x="0" y="0"/>
+          <a:ext cx="0" cy="0"/>
+          <a:chOff x="0" y="0"/>
+          <a:chExt cx="0" cy="0"/>
+        </a:xfrm>
+      </p:grpSpPr>
+      <p:sp>
+        <p:nvSpPr>
+          <p:cNvPr id="2" name="Slide Image Placeholder 1"/>
+          <p:cNvSpPr>
+            <a:spLocks noGrp="1" noRot="1" noChangeAspect="1"/>
+          </p:cNvSpPr>
+          <p:nvPr>
+            <p:ph type="sldImg"/>
+          </p:nvPr>
+        </p:nvSpPr>
+        <p:spPr/>
+      </p:sp>
+      <p:sp>
+        <p:nvSpPr>
+          <p:cNvPr id="3" name="Notes Placeholder 2"/>
+          <p:cNvSpPr>
+            <a:spLocks noGrp="1"/>
+          </p:cNvSpPr>
+          <p:nvPr>
+            <p:ph type="body" idx="1"/>
+          </p:nvPr>
+        </p:nvSpPr>
+        <p:spPr/>
+        <p:txBody>
+          <a:bodyPr/>
+          <a:lstStyle/>
+          <a:p>
+            <a:r>
+              <a:rPr lang="en-US" dirty="0"/>
+              <a:t/>
+            </a:r>
+            <a:endParaRPr lang="en-US" dirty="0"/>
+          </a:p>
+        </p:txBody>
+      </p:sp>
+      <p:sp>
+        <p:nvSpPr>
+          <p:cNvPr id="4" name="Slide Number Placeholder 3"/>
+          <p:cNvSpPr>
+            <a:spLocks noGrp="1"/>
+          </p:cNvSpPr>
+          <p:nvPr>
+            <p:ph type="sldNum" sz="quarter" idx="10"/>
+          </p:nvPr>
+        </p:nvSpPr>
+        <p:spPr/>
+        <p:txBody>
+          <a:bodyPr/>
+          <a:lstStyle/>
+          <a:p>
+            <a:fld id="{F7021451-1387-4CA6-816F-3879F97B5CBC}" type="slidenum">
+              <a:rPr lang="en-US"/>
+              <a:t>18</a:t>
+            </a:fld>
+            <a:endParaRPr lang="en-US"/>
+          </a:p>
+        </p:txBody>
+      </p:sp>
+    </p:spTree>
+    <p:extLst>
+      <p:ext uri="{BB962C8B-B14F-4D97-AF65-F5344CB8AC3E}">
+        <p14:creationId xmlns:p14="http://schemas.microsoft.com/office/powerpoint/2010/main" val="1024086991"/>
+      </p:ext>
+    </p:extLst>
+  </p:cSld>
+  <p:clrMapOvr>
+    <a:masterClrMapping/>
+  </p:clrMapOvr>
+</p:notes>
+</file>
+
+<file path=ppt/notesSlides/notesSlide19.xml><?xml version="1.0" encoding="utf-8"?>
+<p:notes xmlns:a="http://schemas.openxmlformats.org/drawingml/2006/main" xmlns:r="http://schemas.openxmlformats.org/officeDocument/2006/relationships" xmlns:p="http://schemas.openxmlformats.org/presentationml/2006/main">
+  <p:cSld>
+    <p:spTree>
+      <p:nvGrpSpPr>
+        <p:cNvPr id="1" name=""/>
+        <p:cNvGrpSpPr/>
+        <p:nvPr/>
+      </p:nvGrpSpPr>
+      <p:grpSpPr>
+        <a:xfrm>
+          <a:off x="0" y="0"/>
+          <a:ext cx="0" cy="0"/>
+          <a:chOff x="0" y="0"/>
+          <a:chExt cx="0" cy="0"/>
+        </a:xfrm>
+      </p:grpSpPr>
+      <p:sp>
+        <p:nvSpPr>
+          <p:cNvPr id="2" name="Slide Image Placeholder 1"/>
+          <p:cNvSpPr>
+            <a:spLocks noGrp="1" noRot="1" noChangeAspect="1"/>
+          </p:cNvSpPr>
+          <p:nvPr>
+            <p:ph type="sldImg"/>
+          </p:nvPr>
+        </p:nvSpPr>
+        <p:spPr/>
+      </p:sp>
+      <p:sp>
+        <p:nvSpPr>
+          <p:cNvPr id="3" name="Notes Placeholder 2"/>
+          <p:cNvSpPr>
+            <a:spLocks noGrp="1"/>
+          </p:cNvSpPr>
+          <p:nvPr>
+            <p:ph type="body" idx="1"/>
+          </p:nvPr>
+        </p:nvSpPr>
+        <p:spPr/>
+        <p:txBody>
+          <a:bodyPr/>
+          <a:lstStyle/>
+          <a:p>
+            <a:r>
+              <a:rPr lang="en-US" dirty="0"/>
+              <a:t/>
+            </a:r>
+            <a:endParaRPr lang="en-US" dirty="0"/>
+          </a:p>
+        </p:txBody>
+      </p:sp>
+      <p:sp>
+        <p:nvSpPr>
+          <p:cNvPr id="4" name="Slide Number Placeholder 3"/>
+          <p:cNvSpPr>
+            <a:spLocks noGrp="1"/>
+          </p:cNvSpPr>
+          <p:nvPr>
+            <p:ph type="sldNum" sz="quarter" idx="10"/>
+          </p:nvPr>
+        </p:nvSpPr>
+        <p:spPr/>
+        <p:txBody>
+          <a:bodyPr/>
+          <a:lstStyle/>
+          <a:p>
+            <a:fld id="{F7021451-1387-4CA6-816F-3879F97B5CBC}" type="slidenum">
+              <a:rPr lang="en-US"/>
+              <a:t>19</a:t>
+            </a:fld>
+            <a:endParaRPr lang="en-US"/>
+          </a:p>
+        </p:txBody>
+      </p:sp>
+    </p:spTree>
+    <p:extLst>
+      <p:ext uri="{BB962C8B-B14F-4D97-AF65-F5344CB8AC3E}">
+        <p14:creationId xmlns:p14="http://schemas.microsoft.com/office/powerpoint/2010/main" val="1024086991"/>
+      </p:ext>
+    </p:extLst>
+  </p:cSld>
+  <p:clrMapOvr>
+    <a:masterClrMapping/>
+  </p:clrMapOvr>
+</p:notes>
+</file>
+
+<file path=ppt/notesSlides/notesSlide2.xml><?xml version="1.0" encoding="utf-8"?>
+<p:notes xmlns:a="http://schemas.openxmlformats.org/drawingml/2006/main" xmlns:r="http://schemas.openxmlformats.org/officeDocument/2006/relationships" xmlns:p="http://schemas.openxmlformats.org/presentationml/2006/main">
+  <p:cSld>
+    <p:spTree>
+      <p:nvGrpSpPr>
+        <p:cNvPr id="1" name=""/>
+        <p:cNvGrpSpPr/>
+        <p:nvPr/>
+      </p:nvGrpSpPr>
+      <p:grpSpPr>
+        <a:xfrm>
+          <a:off x="0" y="0"/>
+          <a:ext cx="0" cy="0"/>
+          <a:chOff x="0" y="0"/>
+          <a:chExt cx="0" cy="0"/>
+        </a:xfrm>
+      </p:grpSpPr>
+      <p:sp>
+        <p:nvSpPr>
+          <p:cNvPr id="2" name="Slide Image Placeholder 1"/>
+          <p:cNvSpPr>
+            <a:spLocks noGrp="1" noRot="1" noChangeAspect="1"/>
+          </p:cNvSpPr>
+          <p:nvPr>
+            <p:ph type="sldImg"/>
+          </p:nvPr>
+        </p:nvSpPr>
+        <p:spPr/>
+      </p:sp>
+      <p:sp>
+        <p:nvSpPr>
+          <p:cNvPr id="3" name="Notes Placeholder 2"/>
+          <p:cNvSpPr>
+            <a:spLocks noGrp="1"/>
+          </p:cNvSpPr>
+          <p:nvPr>
+            <p:ph type="body" idx="1"/>
+          </p:nvPr>
+        </p:nvSpPr>
+        <p:spPr/>
+        <p:txBody>
+          <a:bodyPr/>
+          <a:lstStyle/>
+          <a:p>
+            <a:r>
+              <a:rPr lang="en-US" dirty="0"/>
+              <a:t/>
+            </a:r>
+            <a:endParaRPr lang="en-US" dirty="0"/>
+          </a:p>
+        </p:txBody>
+      </p:sp>
+      <p:sp>
+        <p:nvSpPr>
+          <p:cNvPr id="4" name="Slide Number Placeholder 3"/>
+          <p:cNvSpPr>
+            <a:spLocks noGrp="1"/>
+          </p:cNvSpPr>
+          <p:nvPr>
+            <p:ph type="sldNum" sz="quarter" idx="10"/>
+          </p:nvPr>
+        </p:nvSpPr>
+        <p:spPr/>
+        <p:txBody>
+          <a:bodyPr/>
+          <a:lstStyle/>
+          <a:p>
+            <a:fld id="{F7021451-1387-4CA6-816F-3879F97B5CBC}" type="slidenum">
+              <a:rPr lang="en-US"/>
+              <a:t>2</a:t>
+            </a:fld>
+            <a:endParaRPr lang="en-US"/>
+          </a:p>
+        </p:txBody>
+      </p:sp>
+    </p:spTree>
+    <p:extLst>
+      <p:ext uri="{BB962C8B-B14F-4D97-AF65-F5344CB8AC3E}">
+        <p14:creationId xmlns:p14="http://schemas.microsoft.com/office/powerpoint/2010/main" val="1024086991"/>
+      </p:ext>
+    </p:extLst>
+  </p:cSld>
+  <p:clrMapOvr>
+    <a:masterClrMapping/>
+  </p:clrMapOvr>
+</p:notes>
+</file>
+
+<file path=ppt/notesSlides/notesSlide20.xml><?xml version="1.0" encoding="utf-8"?>
+<p:notes xmlns:a="http://schemas.openxmlformats.org/drawingml/2006/main" xmlns:r="http://schemas.openxmlformats.org/officeDocument/2006/relationships" xmlns:p="http://schemas.openxmlformats.org/presentationml/2006/main">
+  <p:cSld>
+    <p:spTree>
+      <p:nvGrpSpPr>
+        <p:cNvPr id="1" name=""/>
+        <p:cNvGrpSpPr/>
+        <p:nvPr/>
+      </p:nvGrpSpPr>
+      <p:grpSpPr>
+        <a:xfrm>
+          <a:off x="0" y="0"/>
+          <a:ext cx="0" cy="0"/>
+          <a:chOff x="0" y="0"/>
+          <a:chExt cx="0" cy="0"/>
+        </a:xfrm>
+      </p:grpSpPr>
+      <p:sp>
+        <p:nvSpPr>
+          <p:cNvPr id="2" name="Slide Image Placeholder 1"/>
+          <p:cNvSpPr>
+            <a:spLocks noGrp="1" noRot="1" noChangeAspect="1"/>
+          </p:cNvSpPr>
+          <p:nvPr>
+            <p:ph type="sldImg"/>
+          </p:nvPr>
+        </p:nvSpPr>
+        <p:spPr/>
+      </p:sp>
+      <p:sp>
+        <p:nvSpPr>
+          <p:cNvPr id="3" name="Notes Placeholder 2"/>
+          <p:cNvSpPr>
+            <a:spLocks noGrp="1"/>
+          </p:cNvSpPr>
+          <p:nvPr>
+            <p:ph type="body" idx="1"/>
+          </p:nvPr>
+        </p:nvSpPr>
+        <p:spPr/>
+        <p:txBody>
+          <a:bodyPr/>
+          <a:lstStyle/>
+          <a:p>
+            <a:r>
+              <a:rPr lang="en-US" dirty="0"/>
+              <a:t/>
+            </a:r>
+            <a:endParaRPr lang="en-US" dirty="0"/>
+          </a:p>
+        </p:txBody>
+      </p:sp>
+      <p:sp>
+        <p:nvSpPr>
+          <p:cNvPr id="4" name="Slide Number Placeholder 3"/>
+          <p:cNvSpPr>
+            <a:spLocks noGrp="1"/>
+          </p:cNvSpPr>
+          <p:nvPr>
+            <p:ph type="sldNum" sz="quarter" idx="10"/>
+          </p:nvPr>
+        </p:nvSpPr>
+        <p:spPr/>
+        <p:txBody>
+          <a:bodyPr/>
+          <a:lstStyle/>
+          <a:p>
+            <a:fld id="{F7021451-1387-4CA6-816F-3879F97B5CBC}" type="slidenum">
+              <a:rPr lang="en-US"/>
+              <a:t>20</a:t>
+            </a:fld>
+            <a:endParaRPr lang="en-US"/>
+          </a:p>
+        </p:txBody>
+      </p:sp>
+    </p:spTree>
+    <p:extLst>
+      <p:ext uri="{BB962C8B-B14F-4D97-AF65-F5344CB8AC3E}">
+        <p14:creationId xmlns:p14="http://schemas.microsoft.com/office/powerpoint/2010/main" val="1024086991"/>
+      </p:ext>
+    </p:extLst>
+  </p:cSld>
+  <p:clrMapOvr>
+    <a:masterClrMapping/>
+  </p:clrMapOvr>
+</p:notes>
+</file>
+
+<file path=ppt/notesSlides/notesSlide21.xml><?xml version="1.0" encoding="utf-8"?>
+<p:notes xmlns:a="http://schemas.openxmlformats.org/drawingml/2006/main" xmlns:r="http://schemas.openxmlformats.org/officeDocument/2006/relationships" xmlns:p="http://schemas.openxmlformats.org/presentationml/2006/main">
+  <p:cSld>
+    <p:spTree>
+      <p:nvGrpSpPr>
+        <p:cNvPr id="1" name=""/>
+        <p:cNvGrpSpPr/>
+        <p:nvPr/>
+      </p:nvGrpSpPr>
+      <p:grpSpPr>
+        <a:xfrm>
+          <a:off x="0" y="0"/>
+          <a:ext cx="0" cy="0"/>
+          <a:chOff x="0" y="0"/>
+          <a:chExt cx="0" cy="0"/>
+        </a:xfrm>
+      </p:grpSpPr>
+      <p:sp>
+        <p:nvSpPr>
+          <p:cNvPr id="2" name="Slide Image Placeholder 1"/>
+          <p:cNvSpPr>
+            <a:spLocks noGrp="1" noRot="1" noChangeAspect="1"/>
+          </p:cNvSpPr>
+          <p:nvPr>
+            <p:ph type="sldImg"/>
+          </p:nvPr>
+        </p:nvSpPr>
+        <p:spPr/>
+      </p:sp>
+      <p:sp>
+        <p:nvSpPr>
+          <p:cNvPr id="3" name="Notes Placeholder 2"/>
+          <p:cNvSpPr>
+            <a:spLocks noGrp="1"/>
+          </p:cNvSpPr>
+          <p:nvPr>
+            <p:ph type="body" idx="1"/>
+          </p:nvPr>
+        </p:nvSpPr>
+        <p:spPr/>
+        <p:txBody>
+          <a:bodyPr/>
+          <a:lstStyle/>
+          <a:p>
+            <a:r>
+              <a:rPr lang="en-US" dirty="0"/>
+              <a:t/>
+            </a:r>
+            <a:endParaRPr lang="en-US" dirty="0"/>
+          </a:p>
+        </p:txBody>
+      </p:sp>
+      <p:sp>
+        <p:nvSpPr>
+          <p:cNvPr id="4" name="Slide Number Placeholder 3"/>
+          <p:cNvSpPr>
+            <a:spLocks noGrp="1"/>
+          </p:cNvSpPr>
+          <p:nvPr>
+            <p:ph type="sldNum" sz="quarter" idx="10"/>
+          </p:nvPr>
+        </p:nvSpPr>
+        <p:spPr/>
+        <p:txBody>
+          <a:bodyPr/>
+          <a:lstStyle/>
+          <a:p>
+            <a:fld id="{F7021451-1387-4CA6-816F-3879F97B5CBC}" type="slidenum">
+              <a:rPr lang="en-US"/>
+              <a:t>21</a:t>
+            </a:fld>
+            <a:endParaRPr lang="en-US"/>
+          </a:p>
+        </p:txBody>
+      </p:sp>
+    </p:spTree>
+    <p:extLst>
+      <p:ext uri="{BB962C8B-B14F-4D97-AF65-F5344CB8AC3E}">
+        <p14:creationId xmlns:p14="http://schemas.microsoft.com/office/powerpoint/2010/main" val="1024086991"/>
+      </p:ext>
+    </p:extLst>
+  </p:cSld>
+  <p:clrMapOvr>
+    <a:masterClrMapping/>
+  </p:clrMapOvr>
+</p:notes>
+</file>
+
+<file path=ppt/notesSlides/notesSlide22.xml><?xml version="1.0" encoding="utf-8"?>
+<p:notes xmlns:a="http://schemas.openxmlformats.org/drawingml/2006/main" xmlns:r="http://schemas.openxmlformats.org/officeDocument/2006/relationships" xmlns:p="http://schemas.openxmlformats.org/presentationml/2006/main">
+  <p:cSld>
+    <p:spTree>
+      <p:nvGrpSpPr>
+        <p:cNvPr id="1" name=""/>
+        <p:cNvGrpSpPr/>
+        <p:nvPr/>
+      </p:nvGrpSpPr>
+      <p:grpSpPr>
+        <a:xfrm>
+          <a:off x="0" y="0"/>
+          <a:ext cx="0" cy="0"/>
+          <a:chOff x="0" y="0"/>
+          <a:chExt cx="0" cy="0"/>
+        </a:xfrm>
+      </p:grpSpPr>
+      <p:sp>
+        <p:nvSpPr>
+          <p:cNvPr id="2" name="Slide Image Placeholder 1"/>
+          <p:cNvSpPr>
+            <a:spLocks noGrp="1" noRot="1" noChangeAspect="1"/>
+          </p:cNvSpPr>
+          <p:nvPr>
+            <p:ph type="sldImg"/>
+          </p:nvPr>
+        </p:nvSpPr>
+        <p:spPr/>
+      </p:sp>
+      <p:sp>
+        <p:nvSpPr>
+          <p:cNvPr id="3" name="Notes Placeholder 2"/>
+          <p:cNvSpPr>
+            <a:spLocks noGrp="1"/>
+          </p:cNvSpPr>
+          <p:nvPr>
+            <p:ph type="body" idx="1"/>
+          </p:nvPr>
+        </p:nvSpPr>
+        <p:spPr/>
+        <p:txBody>
+          <a:bodyPr/>
+          <a:lstStyle/>
+          <a:p>
+            <a:r>
+              <a:rPr lang="en-US" dirty="0"/>
+              <a:t/>
+            </a:r>
+            <a:endParaRPr lang="en-US" dirty="0"/>
+          </a:p>
+        </p:txBody>
+      </p:sp>
+      <p:sp>
+        <p:nvSpPr>
+          <p:cNvPr id="4" name="Slide Number Placeholder 3"/>
+          <p:cNvSpPr>
+            <a:spLocks noGrp="1"/>
+          </p:cNvSpPr>
+          <p:nvPr>
+            <p:ph type="sldNum" sz="quarter" idx="10"/>
+          </p:nvPr>
+        </p:nvSpPr>
+        <p:spPr/>
+        <p:txBody>
+          <a:bodyPr/>
+          <a:lstStyle/>
+          <a:p>
+            <a:fld id="{F7021451-1387-4CA6-816F-3879F97B5CBC}" type="slidenum">
+              <a:rPr lang="en-US"/>
+              <a:t>22</a:t>
+            </a:fld>
+            <a:endParaRPr lang="en-US"/>
+          </a:p>
+        </p:txBody>
+      </p:sp>
+    </p:spTree>
+    <p:extLst>
+      <p:ext uri="{BB962C8B-B14F-4D97-AF65-F5344CB8AC3E}">
+        <p14:creationId xmlns:p14="http://schemas.microsoft.com/office/powerpoint/2010/main" val="1024086991"/>
+      </p:ext>
+    </p:extLst>
+  </p:cSld>
+  <p:clrMapOvr>
+    <a:masterClrMapping/>
+  </p:clrMapOvr>
+</p:notes>
+</file>
+
+<file path=ppt/notesSlides/notesSlide23.xml><?xml version="1.0" encoding="utf-8"?>
+<p:notes xmlns:a="http://schemas.openxmlformats.org/drawingml/2006/main" xmlns:r="http://schemas.openxmlformats.org/officeDocument/2006/relationships" xmlns:p="http://schemas.openxmlformats.org/presentationml/2006/main">
+  <p:cSld>
+    <p:spTree>
+      <p:nvGrpSpPr>
+        <p:cNvPr id="1" name=""/>
+        <p:cNvGrpSpPr/>
+        <p:nvPr/>
+      </p:nvGrpSpPr>
+      <p:grpSpPr>
+        <a:xfrm>
+          <a:off x="0" y="0"/>
+          <a:ext cx="0" cy="0"/>
+          <a:chOff x="0" y="0"/>
+          <a:chExt cx="0" cy="0"/>
+        </a:xfrm>
+      </p:grpSpPr>
+      <p:sp>
+        <p:nvSpPr>
+          <p:cNvPr id="2" name="Slide Image Placeholder 1"/>
+          <p:cNvSpPr>
+            <a:spLocks noGrp="1" noRot="1" noChangeAspect="1"/>
+          </p:cNvSpPr>
+          <p:nvPr>
+            <p:ph type="sldImg"/>
+          </p:nvPr>
+        </p:nvSpPr>
+        <p:spPr/>
+      </p:sp>
+      <p:sp>
+        <p:nvSpPr>
+          <p:cNvPr id="3" name="Notes Placeholder 2"/>
+          <p:cNvSpPr>
+            <a:spLocks noGrp="1"/>
+          </p:cNvSpPr>
+          <p:nvPr>
+            <p:ph type="body" idx="1"/>
+          </p:nvPr>
+        </p:nvSpPr>
+        <p:spPr/>
+        <p:txBody>
+          <a:bodyPr/>
+          <a:lstStyle/>
+          <a:p>
+            <a:r>
+              <a:rPr lang="en-US" dirty="0"/>
+              <a:t/>
+            </a:r>
+            <a:endParaRPr lang="en-US" dirty="0"/>
+          </a:p>
+        </p:txBody>
+      </p:sp>
+      <p:sp>
+        <p:nvSpPr>
+          <p:cNvPr id="4" name="Slide Number Placeholder 3"/>
+          <p:cNvSpPr>
+            <a:spLocks noGrp="1"/>
+          </p:cNvSpPr>
+          <p:nvPr>
+            <p:ph type="sldNum" sz="quarter" idx="10"/>
+          </p:nvPr>
+        </p:nvSpPr>
+        <p:spPr/>
+        <p:txBody>
+          <a:bodyPr/>
+          <a:lstStyle/>
+          <a:p>
+            <a:fld id="{F7021451-1387-4CA6-816F-3879F97B5CBC}" type="slidenum">
+              <a:rPr lang="en-US"/>
+              <a:t>23</a:t>
+            </a:fld>
+            <a:endParaRPr lang="en-US"/>
+          </a:p>
+        </p:txBody>
+      </p:sp>
+    </p:spTree>
+    <p:extLst>
+      <p:ext uri="{BB962C8B-B14F-4D97-AF65-F5344CB8AC3E}">
+        <p14:creationId xmlns:p14="http://schemas.microsoft.com/office/powerpoint/2010/main" val="1024086991"/>
+      </p:ext>
+    </p:extLst>
+  </p:cSld>
+  <p:clrMapOvr>
+    <a:masterClrMapping/>
+  </p:clrMapOvr>
+</p:notes>
+</file>
+
+<file path=ppt/notesSlides/notesSlide24.xml><?xml version="1.0" encoding="utf-8"?>
+<p:notes xmlns:a="http://schemas.openxmlformats.org/drawingml/2006/main" xmlns:r="http://schemas.openxmlformats.org/officeDocument/2006/relationships" xmlns:p="http://schemas.openxmlformats.org/presentationml/2006/main">
+  <p:cSld>
+    <p:spTree>
+      <p:nvGrpSpPr>
+        <p:cNvPr id="1" name=""/>
+        <p:cNvGrpSpPr/>
+        <p:nvPr/>
+      </p:nvGrpSpPr>
+      <p:grpSpPr>
+        <a:xfrm>
+          <a:off x="0" y="0"/>
+          <a:ext cx="0" cy="0"/>
+          <a:chOff x="0" y="0"/>
+          <a:chExt cx="0" cy="0"/>
+        </a:xfrm>
+      </p:grpSpPr>
+      <p:sp>
+        <p:nvSpPr>
+          <p:cNvPr id="2" name="Slide Image Placeholder 1"/>
+          <p:cNvSpPr>
+            <a:spLocks noGrp="1" noRot="1" noChangeAspect="1"/>
+          </p:cNvSpPr>
+          <p:nvPr>
+            <p:ph type="sldImg"/>
+          </p:nvPr>
+        </p:nvSpPr>
+        <p:spPr/>
+      </p:sp>
+      <p:sp>
+        <p:nvSpPr>
+          <p:cNvPr id="3" name="Notes Placeholder 2"/>
+          <p:cNvSpPr>
+            <a:spLocks noGrp="1"/>
+          </p:cNvSpPr>
+          <p:nvPr>
+            <p:ph type="body" idx="1"/>
+          </p:nvPr>
+        </p:nvSpPr>
+        <p:spPr/>
+        <p:txBody>
+          <a:bodyPr/>
+          <a:lstStyle/>
+          <a:p>
+            <a:r>
+              <a:rPr lang="en-US" dirty="0"/>
+              <a:t/>
+            </a:r>
+            <a:endParaRPr lang="en-US" dirty="0"/>
+          </a:p>
+        </p:txBody>
+      </p:sp>
+      <p:sp>
+        <p:nvSpPr>
+          <p:cNvPr id="4" name="Slide Number Placeholder 3"/>
+          <p:cNvSpPr>
+            <a:spLocks noGrp="1"/>
+          </p:cNvSpPr>
+          <p:nvPr>
+            <p:ph type="sldNum" sz="quarter" idx="10"/>
+          </p:nvPr>
+        </p:nvSpPr>
+        <p:spPr/>
+        <p:txBody>
+          <a:bodyPr/>
+          <a:lstStyle/>
+          <a:p>
+            <a:fld id="{F7021451-1387-4CA6-816F-3879F97B5CBC}" type="slidenum">
+              <a:rPr lang="en-US"/>
+              <a:t>24</a:t>
+            </a:fld>
+            <a:endParaRPr lang="en-US"/>
+          </a:p>
+        </p:txBody>
+      </p:sp>
+    </p:spTree>
+    <p:extLst>
+      <p:ext uri="{BB962C8B-B14F-4D97-AF65-F5344CB8AC3E}">
+        <p14:creationId xmlns:p14="http://schemas.microsoft.com/office/powerpoint/2010/main" val="1024086991"/>
+      </p:ext>
+    </p:extLst>
+  </p:cSld>
+  <p:clrMapOvr>
+    <a:masterClrMapping/>
+  </p:clrMapOvr>
+</p:notes>
+</file>
+
+<file path=ppt/notesSlides/notesSlide3.xml><?xml version="1.0" encoding="utf-8"?>
+<p:notes xmlns:a="http://schemas.openxmlformats.org/drawingml/2006/main" xmlns:r="http://schemas.openxmlformats.org/officeDocument/2006/relationships" xmlns:p="http://schemas.openxmlformats.org/presentationml/2006/main">
+  <p:cSld>
+    <p:spTree>
+      <p:nvGrpSpPr>
+        <p:cNvPr id="1" name=""/>
+        <p:cNvGrpSpPr/>
+        <p:nvPr/>
+      </p:nvGrpSpPr>
+      <p:grpSpPr>
+        <a:xfrm>
+          <a:off x="0" y="0"/>
+          <a:ext cx="0" cy="0"/>
+          <a:chOff x="0" y="0"/>
+          <a:chExt cx="0" cy="0"/>
+        </a:xfrm>
+      </p:grpSpPr>
+      <p:sp>
+        <p:nvSpPr>
+          <p:cNvPr id="2" name="Slide Image Placeholder 1"/>
+          <p:cNvSpPr>
+            <a:spLocks noGrp="1" noRot="1" noChangeAspect="1"/>
+          </p:cNvSpPr>
+          <p:nvPr>
+            <p:ph type="sldImg"/>
+          </p:nvPr>
+        </p:nvSpPr>
+        <p:spPr/>
+      </p:sp>
+      <p:sp>
+        <p:nvSpPr>
+          <p:cNvPr id="3" name="Notes Placeholder 2"/>
+          <p:cNvSpPr>
+            <a:spLocks noGrp="1"/>
+          </p:cNvSpPr>
+          <p:nvPr>
+            <p:ph type="body" idx="1"/>
+          </p:nvPr>
+        </p:nvSpPr>
+        <p:spPr/>
+        <p:txBody>
+          <a:bodyPr/>
+          <a:lstStyle/>
+          <a:p>
+            <a:r>
+              <a:rPr lang="en-US" dirty="0"/>
+              <a:t/>
+            </a:r>
+            <a:endParaRPr lang="en-US" dirty="0"/>
+          </a:p>
+        </p:txBody>
+      </p:sp>
+      <p:sp>
+        <p:nvSpPr>
+          <p:cNvPr id="4" name="Slide Number Placeholder 3"/>
+          <p:cNvSpPr>
+            <a:spLocks noGrp="1"/>
+          </p:cNvSpPr>
+          <p:nvPr>
+            <p:ph type="sldNum" sz="quarter" idx="10"/>
+          </p:nvPr>
+        </p:nvSpPr>
+        <p:spPr/>
+        <p:txBody>
+          <a:bodyPr/>
+          <a:lstStyle/>
+          <a:p>
+            <a:fld id="{F7021451-1387-4CA6-816F-3879F97B5CBC}" type="slidenum">
+              <a:rPr lang="en-US"/>
+              <a:t>3</a:t>
+            </a:fld>
+            <a:endParaRPr lang="en-US"/>
+          </a:p>
+        </p:txBody>
+      </p:sp>
+    </p:spTree>
+    <p:extLst>
+      <p:ext uri="{BB962C8B-B14F-4D97-AF65-F5344CB8AC3E}">
+        <p14:creationId xmlns:p14="http://schemas.microsoft.com/office/powerpoint/2010/main" val="1024086991"/>
+      </p:ext>
+    </p:extLst>
+  </p:cSld>
+  <p:clrMapOvr>
+    <a:masterClrMapping/>
+  </p:clrMapOvr>
+</p:notes>
+</file>
+
+<file path=ppt/notesSlides/notesSlide4.xml><?xml version="1.0" encoding="utf-8"?>
+<p:notes xmlns:a="http://schemas.openxmlformats.org/drawingml/2006/main" xmlns:r="http://schemas.openxmlformats.org/officeDocument/2006/relationships" xmlns:p="http://schemas.openxmlformats.org/presentationml/2006/main">
+  <p:cSld>
+    <p:spTree>
+      <p:nvGrpSpPr>
+        <p:cNvPr id="1" name=""/>
+        <p:cNvGrpSpPr/>
+        <p:nvPr/>
+      </p:nvGrpSpPr>
+      <p:grpSpPr>
+        <a:xfrm>
+          <a:off x="0" y="0"/>
+          <a:ext cx="0" cy="0"/>
+          <a:chOff x="0" y="0"/>
+          <a:chExt cx="0" cy="0"/>
+        </a:xfrm>
+      </p:grpSpPr>
+      <p:sp>
+        <p:nvSpPr>
+          <p:cNvPr id="2" name="Slide Image Placeholder 1"/>
+          <p:cNvSpPr>
+            <a:spLocks noGrp="1" noRot="1" noChangeAspect="1"/>
+          </p:cNvSpPr>
+          <p:nvPr>
+            <p:ph type="sldImg"/>
+          </p:nvPr>
+        </p:nvSpPr>
+        <p:spPr/>
+      </p:sp>
+      <p:sp>
+        <p:nvSpPr>
+          <p:cNvPr id="3" name="Notes Placeholder 2"/>
+          <p:cNvSpPr>
+            <a:spLocks noGrp="1"/>
+          </p:cNvSpPr>
+          <p:nvPr>
+            <p:ph type="body" idx="1"/>
+          </p:nvPr>
+        </p:nvSpPr>
+        <p:spPr/>
+        <p:txBody>
+          <a:bodyPr/>
+          <a:lstStyle/>
+          <a:p>
+            <a:r>
+              <a:rPr lang="en-US" dirty="0"/>
+              <a:t/>
+            </a:r>
+            <a:endParaRPr lang="en-US" dirty="0"/>
+          </a:p>
+        </p:txBody>
+      </p:sp>
+      <p:sp>
+        <p:nvSpPr>
+          <p:cNvPr id="4" name="Slide Number Placeholder 3"/>
+          <p:cNvSpPr>
+            <a:spLocks noGrp="1"/>
+          </p:cNvSpPr>
+          <p:nvPr>
+            <p:ph type="sldNum" sz="quarter" idx="10"/>
+          </p:nvPr>
+        </p:nvSpPr>
+        <p:spPr/>
+        <p:txBody>
+          <a:bodyPr/>
+          <a:lstStyle/>
+          <a:p>
+            <a:fld id="{F7021451-1387-4CA6-816F-3879F97B5CBC}" type="slidenum">
+              <a:rPr lang="en-US"/>
+              <a:t>4</a:t>
+            </a:fld>
+            <a:endParaRPr lang="en-US"/>
+          </a:p>
+        </p:txBody>
+      </p:sp>
+    </p:spTree>
+    <p:extLst>
+      <p:ext uri="{BB962C8B-B14F-4D97-AF65-F5344CB8AC3E}">
+        <p14:creationId xmlns:p14="http://schemas.microsoft.com/office/powerpoint/2010/main" val="1024086991"/>
+      </p:ext>
+    </p:extLst>
+  </p:cSld>
+  <p:clrMapOvr>
+    <a:masterClrMapping/>
+  </p:clrMapOvr>
+</p:notes>
+</file>
+
+<file path=ppt/notesSlides/notesSlide5.xml><?xml version="1.0" encoding="utf-8"?>
+<p:notes xmlns:a="http://schemas.openxmlformats.org/drawingml/2006/main" xmlns:r="http://schemas.openxmlformats.org/officeDocument/2006/relationships" xmlns:p="http://schemas.openxmlformats.org/presentationml/2006/main">
+  <p:cSld>
+    <p:spTree>
+      <p:nvGrpSpPr>
+        <p:cNvPr id="1" name=""/>
+        <p:cNvGrpSpPr/>
+        <p:nvPr/>
+      </p:nvGrpSpPr>
+      <p:grpSpPr>
+        <a:xfrm>
+          <a:off x="0" y="0"/>
+          <a:ext cx="0" cy="0"/>
+          <a:chOff x="0" y="0"/>
+          <a:chExt cx="0" cy="0"/>
+        </a:xfrm>
+      </p:grpSpPr>
+      <p:sp>
+        <p:nvSpPr>
+          <p:cNvPr id="2" name="Slide Image Placeholder 1"/>
+          <p:cNvSpPr>
+            <a:spLocks noGrp="1" noRot="1" noChangeAspect="1"/>
+          </p:cNvSpPr>
+          <p:nvPr>
+            <p:ph type="sldImg"/>
+          </p:nvPr>
+        </p:nvSpPr>
+        <p:spPr/>
+      </p:sp>
+      <p:sp>
+        <p:nvSpPr>
+          <p:cNvPr id="3" name="Notes Placeholder 2"/>
+          <p:cNvSpPr>
+            <a:spLocks noGrp="1"/>
+          </p:cNvSpPr>
+          <p:nvPr>
+            <p:ph type="body" idx="1"/>
+          </p:nvPr>
+        </p:nvSpPr>
+        <p:spPr/>
+        <p:txBody>
+          <a:bodyPr/>
+          <a:lstStyle/>
+          <a:p>
+            <a:r>
+              <a:rPr lang="en-US" dirty="0"/>
+              <a:t/>
+            </a:r>
+            <a:endParaRPr lang="en-US" dirty="0"/>
+          </a:p>
+        </p:txBody>
+      </p:sp>
+      <p:sp>
+        <p:nvSpPr>
+          <p:cNvPr id="4" name="Slide Number Placeholder 3"/>
+          <p:cNvSpPr>
+            <a:spLocks noGrp="1"/>
+          </p:cNvSpPr>
+          <p:nvPr>
+            <p:ph type="sldNum" sz="quarter" idx="10"/>
+          </p:nvPr>
+        </p:nvSpPr>
+        <p:spPr/>
+        <p:txBody>
+          <a:bodyPr/>
+          <a:lstStyle/>
+          <a:p>
+            <a:fld id="{F7021451-1387-4CA6-816F-3879F97B5CBC}" type="slidenum">
+              <a:rPr lang="en-US"/>
+              <a:t>5</a:t>
+            </a:fld>
+            <a:endParaRPr lang="en-US"/>
+          </a:p>
+        </p:txBody>
+      </p:sp>
+    </p:spTree>
+    <p:extLst>
+      <p:ext uri="{BB962C8B-B14F-4D97-AF65-F5344CB8AC3E}">
+        <p14:creationId xmlns:p14="http://schemas.microsoft.com/office/powerpoint/2010/main" val="1024086991"/>
+      </p:ext>
+    </p:extLst>
+  </p:cSld>
+  <p:clrMapOvr>
+    <a:masterClrMapping/>
+  </p:clrMapOvr>
+</p:notes>
+</file>
+
+<file path=ppt/notesSlides/notesSlide6.xml><?xml version="1.0" encoding="utf-8"?>
+<p:notes xmlns:a="http://schemas.openxmlformats.org/drawingml/2006/main" xmlns:r="http://schemas.openxmlformats.org/officeDocument/2006/relationships" xmlns:p="http://schemas.openxmlformats.org/presentationml/2006/main">
+  <p:cSld>
+    <p:spTree>
+      <p:nvGrpSpPr>
+        <p:cNvPr id="1" name=""/>
+        <p:cNvGrpSpPr/>
+        <p:nvPr/>
+      </p:nvGrpSpPr>
+      <p:grpSpPr>
+        <a:xfrm>
+          <a:off x="0" y="0"/>
+          <a:ext cx="0" cy="0"/>
+          <a:chOff x="0" y="0"/>
+          <a:chExt cx="0" cy="0"/>
+        </a:xfrm>
+      </p:grpSpPr>
+      <p:sp>
+        <p:nvSpPr>
+          <p:cNvPr id="2" name="Slide Image Placeholder 1"/>
+          <p:cNvSpPr>
+            <a:spLocks noGrp="1" noRot="1" noChangeAspect="1"/>
+          </p:cNvSpPr>
+          <p:nvPr>
+            <p:ph type="sldImg"/>
+          </p:nvPr>
+        </p:nvSpPr>
+        <p:spPr/>
+      </p:sp>
+      <p:sp>
+        <p:nvSpPr>
+          <p:cNvPr id="3" name="Notes Placeholder 2"/>
+          <p:cNvSpPr>
+            <a:spLocks noGrp="1"/>
+          </p:cNvSpPr>
+          <p:nvPr>
+            <p:ph type="body" idx="1"/>
+          </p:nvPr>
+        </p:nvSpPr>
+        <p:spPr/>
+        <p:txBody>
+          <a:bodyPr/>
+          <a:lstStyle/>
+          <a:p>
+            <a:r>
+              <a:rPr lang="en-US" dirty="0"/>
+              <a:t/>
+            </a:r>
+            <a:endParaRPr lang="en-US" dirty="0"/>
+          </a:p>
+        </p:txBody>
+      </p:sp>
+      <p:sp>
+        <p:nvSpPr>
+          <p:cNvPr id="4" name="Slide Number Placeholder 3"/>
+          <p:cNvSpPr>
+            <a:spLocks noGrp="1"/>
+          </p:cNvSpPr>
+          <p:nvPr>
+            <p:ph type="sldNum" sz="quarter" idx="10"/>
+          </p:nvPr>
+        </p:nvSpPr>
+        <p:spPr/>
+        <p:txBody>
+          <a:bodyPr/>
+          <a:lstStyle/>
+          <a:p>
+            <a:fld id="{F7021451-1387-4CA6-816F-3879F97B5CBC}" type="slidenum">
+              <a:rPr lang="en-US"/>
+              <a:t>6</a:t>
+            </a:fld>
+            <a:endParaRPr lang="en-US"/>
+          </a:p>
+        </p:txBody>
+      </p:sp>
+    </p:spTree>
+    <p:extLst>
+      <p:ext uri="{BB962C8B-B14F-4D97-AF65-F5344CB8AC3E}">
+        <p14:creationId xmlns:p14="http://schemas.microsoft.com/office/powerpoint/2010/main" val="1024086991"/>
+      </p:ext>
+    </p:extLst>
+  </p:cSld>
+  <p:clrMapOvr>
+    <a:masterClrMapping/>
+  </p:clrMapOvr>
+</p:notes>
+</file>
+
+<file path=ppt/notesSlides/notesSlide7.xml><?xml version="1.0" encoding="utf-8"?>
+<p:notes xmlns:a="http://schemas.openxmlformats.org/drawingml/2006/main" xmlns:r="http://schemas.openxmlformats.org/officeDocument/2006/relationships" xmlns:p="http://schemas.openxmlformats.org/presentationml/2006/main">
+  <p:cSld>
+    <p:spTree>
+      <p:nvGrpSpPr>
+        <p:cNvPr id="1" name=""/>
+        <p:cNvGrpSpPr/>
+        <p:nvPr/>
+      </p:nvGrpSpPr>
+      <p:grpSpPr>
+        <a:xfrm>
+          <a:off x="0" y="0"/>
+          <a:ext cx="0" cy="0"/>
+          <a:chOff x="0" y="0"/>
+          <a:chExt cx="0" cy="0"/>
+        </a:xfrm>
+      </p:grpSpPr>
+      <p:sp>
+        <p:nvSpPr>
+          <p:cNvPr id="2" name="Slide Image Placeholder 1"/>
+          <p:cNvSpPr>
+            <a:spLocks noGrp="1" noRot="1" noChangeAspect="1"/>
+          </p:cNvSpPr>
+          <p:nvPr>
+            <p:ph type="sldImg"/>
+          </p:nvPr>
+        </p:nvSpPr>
+        <p:spPr/>
+      </p:sp>
+      <p:sp>
+        <p:nvSpPr>
+          <p:cNvPr id="3" name="Notes Placeholder 2"/>
+          <p:cNvSpPr>
+            <a:spLocks noGrp="1"/>
+          </p:cNvSpPr>
+          <p:nvPr>
+            <p:ph type="body" idx="1"/>
+          </p:nvPr>
+        </p:nvSpPr>
+        <p:spPr/>
+        <p:txBody>
+          <a:bodyPr/>
+          <a:lstStyle/>
+          <a:p>
+            <a:r>
+              <a:rPr lang="en-US" dirty="0"/>
+              <a:t/>
+            </a:r>
+            <a:endParaRPr lang="en-US" dirty="0"/>
+          </a:p>
+        </p:txBody>
+      </p:sp>
+      <p:sp>
+        <p:nvSpPr>
+          <p:cNvPr id="4" name="Slide Number Placeholder 3"/>
+          <p:cNvSpPr>
+            <a:spLocks noGrp="1"/>
+          </p:cNvSpPr>
+          <p:nvPr>
+            <p:ph type="sldNum" sz="quarter" idx="10"/>
+          </p:nvPr>
+        </p:nvSpPr>
+        <p:spPr/>
+        <p:txBody>
+          <a:bodyPr/>
+          <a:lstStyle/>
+          <a:p>
+            <a:fld id="{F7021451-1387-4CA6-816F-3879F97B5CBC}" type="slidenum">
+              <a:rPr lang="en-US"/>
+              <a:t>7</a:t>
+            </a:fld>
+            <a:endParaRPr lang="en-US"/>
+          </a:p>
+        </p:txBody>
+      </p:sp>
+    </p:spTree>
+    <p:extLst>
+      <p:ext uri="{BB962C8B-B14F-4D97-AF65-F5344CB8AC3E}">
+        <p14:creationId xmlns:p14="http://schemas.microsoft.com/office/powerpoint/2010/main" val="1024086991"/>
+      </p:ext>
+    </p:extLst>
+  </p:cSld>
+  <p:clrMapOvr>
+    <a:masterClrMapping/>
+  </p:clrMapOvr>
+</p:notes>
+</file>
+
+<file path=ppt/notesSlides/notesSlide8.xml><?xml version="1.0" encoding="utf-8"?>
+<p:notes xmlns:a="http://schemas.openxmlformats.org/drawingml/2006/main" xmlns:r="http://schemas.openxmlformats.org/officeDocument/2006/relationships" xmlns:p="http://schemas.openxmlformats.org/presentationml/2006/main">
+  <p:cSld>
+    <p:spTree>
+      <p:nvGrpSpPr>
+        <p:cNvPr id="1" name=""/>
+        <p:cNvGrpSpPr/>
+        <p:nvPr/>
+      </p:nvGrpSpPr>
+      <p:grpSpPr>
+        <a:xfrm>
+          <a:off x="0" y="0"/>
+          <a:ext cx="0" cy="0"/>
+          <a:chOff x="0" y="0"/>
+          <a:chExt cx="0" cy="0"/>
+        </a:xfrm>
+      </p:grpSpPr>
+      <p:sp>
+        <p:nvSpPr>
+          <p:cNvPr id="2" name="Slide Image Placeholder 1"/>
+          <p:cNvSpPr>
+            <a:spLocks noGrp="1" noRot="1" noChangeAspect="1"/>
+          </p:cNvSpPr>
+          <p:nvPr>
+            <p:ph type="sldImg"/>
+          </p:nvPr>
+        </p:nvSpPr>
+        <p:spPr/>
+      </p:sp>
+      <p:sp>
+        <p:nvSpPr>
+          <p:cNvPr id="3" name="Notes Placeholder 2"/>
+          <p:cNvSpPr>
+            <a:spLocks noGrp="1"/>
+          </p:cNvSpPr>
+          <p:nvPr>
+            <p:ph type="body" idx="1"/>
+          </p:nvPr>
+        </p:nvSpPr>
+        <p:spPr/>
+        <p:txBody>
+          <a:bodyPr/>
+          <a:lstStyle/>
+          <a:p>
+            <a:r>
+              <a:rPr lang="en-US" dirty="0"/>
+              <a:t/>
+            </a:r>
+            <a:endParaRPr lang="en-US" dirty="0"/>
+          </a:p>
+        </p:txBody>
+      </p:sp>
+      <p:sp>
+        <p:nvSpPr>
+          <p:cNvPr id="4" name="Slide Number Placeholder 3"/>
+          <p:cNvSpPr>
+            <a:spLocks noGrp="1"/>
+          </p:cNvSpPr>
+          <p:nvPr>
+            <p:ph type="sldNum" sz="quarter" idx="10"/>
+          </p:nvPr>
+        </p:nvSpPr>
+        <p:spPr/>
+        <p:txBody>
+          <a:bodyPr/>
+          <a:lstStyle/>
+          <a:p>
+            <a:fld id="{F7021451-1387-4CA6-816F-3879F97B5CBC}" type="slidenum">
+              <a:rPr lang="en-US"/>
+              <a:t>8</a:t>
+            </a:fld>
+            <a:endParaRPr lang="en-US"/>
+          </a:p>
+        </p:txBody>
+      </p:sp>
+    </p:spTree>
+    <p:extLst>
+      <p:ext uri="{BB962C8B-B14F-4D97-AF65-F5344CB8AC3E}">
+        <p14:creationId xmlns:p14="http://schemas.microsoft.com/office/powerpoint/2010/main" val="1024086991"/>
+      </p:ext>
+    </p:extLst>
+  </p:cSld>
+  <p:clrMapOvr>
+    <a:masterClrMapping/>
+  </p:clrMapOvr>
+</p:notes>
+</file>
+
+<file path=ppt/notesSlides/notesSlide9.xml><?xml version="1.0" encoding="utf-8"?>
+<p:notes xmlns:a="http://schemas.openxmlformats.org/drawingml/2006/main" xmlns:r="http://schemas.openxmlformats.org/officeDocument/2006/relationships" xmlns:p="http://schemas.openxmlformats.org/presentationml/2006/main">
+  <p:cSld>
+    <p:spTree>
+      <p:nvGrpSpPr>
+        <p:cNvPr id="1" name=""/>
+        <p:cNvGrpSpPr/>
+        <p:nvPr/>
+      </p:nvGrpSpPr>
+      <p:grpSpPr>
+        <a:xfrm>
+          <a:off x="0" y="0"/>
+          <a:ext cx="0" cy="0"/>
+          <a:chOff x="0" y="0"/>
+          <a:chExt cx="0" cy="0"/>
+        </a:xfrm>
+      </p:grpSpPr>
+      <p:sp>
+        <p:nvSpPr>
+          <p:cNvPr id="2" name="Slide Image Placeholder 1"/>
+          <p:cNvSpPr>
+            <a:spLocks noGrp="1" noRot="1" noChangeAspect="1"/>
+          </p:cNvSpPr>
+          <p:nvPr>
+            <p:ph type="sldImg"/>
+          </p:nvPr>
+        </p:nvSpPr>
+        <p:spPr/>
+      </p:sp>
+      <p:sp>
+        <p:nvSpPr>
+          <p:cNvPr id="3" name="Notes Placeholder 2"/>
+          <p:cNvSpPr>
+            <a:spLocks noGrp="1"/>
+          </p:cNvSpPr>
+          <p:nvPr>
+            <p:ph type="body" idx="1"/>
+          </p:nvPr>
+        </p:nvSpPr>
+        <p:spPr/>
+        <p:txBody>
+          <a:bodyPr/>
+          <a:lstStyle/>
+          <a:p>
+            <a:r>
+              <a:rPr lang="en-US" dirty="0"/>
+              <a:t/>
+            </a:r>
+            <a:endParaRPr lang="en-US" dirty="0"/>
+          </a:p>
+        </p:txBody>
+      </p:sp>
+      <p:sp>
+        <p:nvSpPr>
+          <p:cNvPr id="4" name="Slide Number Placeholder 3"/>
+          <p:cNvSpPr>
+            <a:spLocks noGrp="1"/>
+          </p:cNvSpPr>
+          <p:nvPr>
+            <p:ph type="sldNum" sz="quarter" idx="10"/>
+          </p:nvPr>
+        </p:nvSpPr>
+        <p:spPr/>
+        <p:txBody>
+          <a:bodyPr/>
+          <a:lstStyle/>
+          <a:p>
+            <a:fld id="{F7021451-1387-4CA6-816F-3879F97B5CBC}" type="slidenum">
+              <a:rPr lang="en-US"/>
+              <a:t>9</a:t>
+            </a:fld>
+            <a:endParaRPr lang="en-US"/>
+          </a:p>
+        </p:txBody>
+      </p:sp>
+    </p:spTree>
+    <p:extLst>
+      <p:ext uri="{BB962C8B-B14F-4D97-AF65-F5344CB8AC3E}">
+        <p14:creationId xmlns:p14="http://schemas.microsoft.com/office/powerpoint/2010/main" val="1024086991"/>
+      </p:ext>
+    </p:extLst>
+  </p:cSld>
+  <p:clrMapOvr>
+    <a:masterClrMapping/>
+  </p:clrMapOvr>
+</p:notes>
 </file>
 
 <file path=ppt/slideLayouts/slideLayout1.xml><?xml version="1.0" encoding="utf-8"?>
@@ -761,6 +2898,3204 @@
 </p:sldMaster>
 </file>
 
+<file path=ppt/slides/slide1.xml><?xml version="1.0" encoding="utf-8"?>
+<p:sld xmlns:a="http://schemas.openxmlformats.org/drawingml/2006/main" xmlns:r="http://schemas.openxmlformats.org/officeDocument/2006/relationships" xmlns:p="http://schemas.openxmlformats.org/presentationml/2006/main">
+  <p:cSld name="Slide 1">
+    <p:bg>
+      <p:bgPr>
+        <a:solidFill>
+          <a:srgbClr val="0B3D91"/>
+        </a:solidFill>
+      </p:bgPr>
+    </p:bg>
+    <p:spTree>
+      <p:nvGrpSpPr>
+        <p:cNvPr id="1" name=""/>
+        <p:cNvGrpSpPr/>
+        <p:nvPr/>
+      </p:nvGrpSpPr>
+      <p:grpSpPr>
+        <a:xfrm>
+          <a:off x="0" y="0"/>
+          <a:ext cx="0" cy="0"/>
+          <a:chOff x="0" y="0"/>
+          <a:chExt cx="0" cy="0"/>
+        </a:xfrm>
+      </p:grpSpPr>
+      <p:sp>
+        <p:nvSpPr>
+          <p:cNvPr id="2" name="Text 0"/>
+          <p:cNvSpPr/>
+          <p:nvPr/>
+        </p:nvSpPr>
+        <p:spPr>
+          <a:xfrm>
+            <a:off x="548640" y="1051560"/>
+            <a:ext cx="8138160" cy="1097280"/>
+          </a:xfrm>
+          <a:prstGeom prst="rect">
+            <a:avLst/>
+          </a:prstGeom>
+          <a:noFill/>
+          <a:ln/>
+        </p:spPr>
+        <p:txBody>
+          <a:bodyPr wrap="square" rtlCol="0" anchor="ctr"/>
+          <a:lstStyle/>
+          <a:p>
+            <a:pPr algn="ctr" indent="0" marL="0">
+              <a:buNone/>
+            </a:pPr>
+            <a:r>
+              <a:rPr lang="en-US" sz="2800" b="1" dirty="0">
+                <a:solidFill>
+                  <a:srgbClr val="FFFFFF"/>
+                </a:solidFill>
+                <a:latin typeface="Aptos" pitchFamily="34" charset="0"/>
+                <a:ea typeface="Aptos" pitchFamily="34" charset="-122"/>
+                <a:cs typeface="Aptos" pitchFamily="34" charset="-120"/>
+              </a:rPr>
+              <a:t>Визуализация и исследование данных — на примере «Война и мир»</a:t>
+            </a:r>
+            <a:endParaRPr lang="en-US" sz="2800" dirty="0"/>
+          </a:p>
+        </p:txBody>
+      </p:sp>
+      <p:sp>
+        <p:nvSpPr>
+          <p:cNvPr id="3" name="Text 1"/>
+          <p:cNvSpPr/>
+          <p:nvPr/>
+        </p:nvSpPr>
+        <p:spPr>
+          <a:xfrm>
+            <a:off x="914400" y="2377440"/>
+            <a:ext cx="7315200" cy="640080"/>
+          </a:xfrm>
+          <a:prstGeom prst="rect">
+            <a:avLst/>
+          </a:prstGeom>
+          <a:noFill/>
+          <a:ln/>
+        </p:spPr>
+        <p:txBody>
+          <a:bodyPr wrap="square" rtlCol="0" anchor="ctr"/>
+          <a:lstStyle/>
+          <a:p>
+            <a:pPr algn="ctr" indent="0" marL="0">
+              <a:buNone/>
+            </a:pPr>
+            <a:r>
+              <a:rPr lang="en-US" sz="1100" dirty="0">
+                <a:solidFill>
+                  <a:srgbClr val="DDE7FF"/>
+                </a:solidFill>
+              </a:rPr>
+              <a:t>Министерство образования Иркутской области · Сиб. отделение РАН · Региональная конференция «Наука. Технологии. Интеллект»</a:t>
+            </a:r>
+            <a:endParaRPr lang="en-US" sz="1100" dirty="0"/>
+          </a:p>
+        </p:txBody>
+      </p:sp>
+    </p:spTree>
+  </p:cSld>
+  <p:clrMapOvr>
+    <a:masterClrMapping/>
+  </p:clrMapOvr>
+</p:sld>
+</file>
+
+<file path=ppt/slides/slide10.xml><?xml version="1.0" encoding="utf-8"?>
+<p:sld xmlns:a="http://schemas.openxmlformats.org/drawingml/2006/main" xmlns:r="http://schemas.openxmlformats.org/officeDocument/2006/relationships" xmlns:p="http://schemas.openxmlformats.org/presentationml/2006/main">
+  <p:cSld name="Slide 10">
+    <p:spTree>
+      <p:nvGrpSpPr>
+        <p:cNvPr id="1" name=""/>
+        <p:cNvGrpSpPr/>
+        <p:nvPr/>
+      </p:nvGrpSpPr>
+      <p:grpSpPr>
+        <a:xfrm>
+          <a:off x="0" y="0"/>
+          <a:ext cx="0" cy="0"/>
+          <a:chOff x="0" y="0"/>
+          <a:chExt cx="0" cy="0"/>
+        </a:xfrm>
+      </p:grpSpPr>
+      <p:sp>
+        <p:nvSpPr>
+          <p:cNvPr id="2" name="Text 0"/>
+          <p:cNvSpPr/>
+          <p:nvPr/>
+        </p:nvSpPr>
+        <p:spPr>
+          <a:xfrm>
+            <a:off x="502920" y="320040"/>
+            <a:ext cx="7772400" cy="411480"/>
+          </a:xfrm>
+          <a:prstGeom prst="rect">
+            <a:avLst/>
+          </a:prstGeom>
+          <a:noFill/>
+          <a:ln/>
+        </p:spPr>
+        <p:txBody>
+          <a:bodyPr wrap="square" rtlCol="0" anchor="ctr"/>
+          <a:lstStyle/>
+          <a:p>
+            <a:pPr indent="0" marL="0">
+              <a:buNone/>
+            </a:pPr>
+            <a:r>
+              <a:rPr lang="en-US" sz="2200" b="1" dirty="0">
+                <a:solidFill>
+                  <a:srgbClr val="1C2833"/>
+                </a:solidFill>
+              </a:rPr>
+              <a:t>Top tokens — топ слов</a:t>
+            </a:r>
+            <a:endParaRPr lang="en-US" sz="2200" dirty="0"/>
+          </a:p>
+        </p:txBody>
+      </p:sp>
+      <p:pic>
+        <p:nvPicPr>
+          <p:cNvPr id="3" name="Image 0" descr="/home/az/Code/bukivedenie/site/presentation/top-tokens-02.png">    </p:cNvPr>
+          <p:cNvPicPr>
+            <a:picLocks noChangeAspect="1"/>
+          </p:cNvPicPr>
+          <p:nvPr/>
+        </p:nvPicPr>
+        <p:blipFill>
+          <a:blip r:embed="rId1"/>
+          <a:stretch>
+            <a:fillRect/>
+          </a:stretch>
+        </p:blipFill>
+        <p:spPr>
+          <a:xfrm>
+            <a:off x="502920" y="868680"/>
+            <a:ext cx="8138160" cy="4251960"/>
+          </a:xfrm>
+          <a:prstGeom prst="rect">
+            <a:avLst/>
+          </a:prstGeom>
+        </p:spPr>
+      </p:pic>
+      <p:sp>
+        <p:nvSpPr>
+          <p:cNvPr id="4" name="Text 1"/>
+          <p:cNvSpPr/>
+          <p:nvPr/>
+        </p:nvSpPr>
+        <p:spPr>
+          <a:xfrm>
+            <a:off x="502920" y="5257800"/>
+            <a:ext cx="8138160" cy="502920"/>
+          </a:xfrm>
+          <a:prstGeom prst="rect">
+            <a:avLst/>
+          </a:prstGeom>
+          <a:noFill/>
+          <a:ln/>
+        </p:spPr>
+        <p:txBody>
+          <a:bodyPr wrap="square" rtlCol="0" anchor="ctr"/>
+          <a:lstStyle/>
+          <a:p>
+            <a:pPr indent="0" marL="0">
+              <a:buNone/>
+            </a:pPr>
+            <a:r>
+              <a:rPr lang="en-US" sz="1100" dirty="0">
+                <a:solidFill>
+                  <a:srgbClr val="566573"/>
+                </a:solidFill>
+              </a:rPr>
+              <a:t>Барчарт с самыми частотными словами. Он нужен для быстрой проверки нормализации и лемматизации.</a:t>
+            </a:r>
+            <a:endParaRPr lang="en-US" sz="1100" dirty="0"/>
+          </a:p>
+        </p:txBody>
+      </p:sp>
+    </p:spTree>
+  </p:cSld>
+  <p:clrMapOvr>
+    <a:masterClrMapping/>
+  </p:clrMapOvr>
+</p:sld>
+</file>
+
+<file path=ppt/slides/slide11.xml><?xml version="1.0" encoding="utf-8"?>
+<p:sld xmlns:a="http://schemas.openxmlformats.org/drawingml/2006/main" xmlns:r="http://schemas.openxmlformats.org/officeDocument/2006/relationships" xmlns:p="http://schemas.openxmlformats.org/presentationml/2006/main">
+  <p:cSld name="Slide 11">
+    <p:spTree>
+      <p:nvGrpSpPr>
+        <p:cNvPr id="1" name=""/>
+        <p:cNvGrpSpPr/>
+        <p:nvPr/>
+      </p:nvGrpSpPr>
+      <p:grpSpPr>
+        <a:xfrm>
+          <a:off x="0" y="0"/>
+          <a:ext cx="0" cy="0"/>
+          <a:chOff x="0" y="0"/>
+          <a:chExt cx="0" cy="0"/>
+        </a:xfrm>
+      </p:grpSpPr>
+      <p:sp>
+        <p:nvSpPr>
+          <p:cNvPr id="2" name="Text 0"/>
+          <p:cNvSpPr/>
+          <p:nvPr/>
+        </p:nvSpPr>
+        <p:spPr>
+          <a:xfrm>
+            <a:off x="502920" y="320040"/>
+            <a:ext cx="7772400" cy="411480"/>
+          </a:xfrm>
+          <a:prstGeom prst="rect">
+            <a:avLst/>
+          </a:prstGeom>
+          <a:noFill/>
+          <a:ln/>
+        </p:spPr>
+        <p:txBody>
+          <a:bodyPr wrap="square" rtlCol="0" anchor="ctr"/>
+          <a:lstStyle/>
+          <a:p>
+            <a:pPr indent="0" marL="0">
+              <a:buNone/>
+            </a:pPr>
+            <a:r>
+              <a:rPr lang="en-US" sz="2200" b="1" dirty="0">
+                <a:solidFill>
+                  <a:srgbClr val="1C2833"/>
+                </a:solidFill>
+              </a:rPr>
+              <a:t>Ритм по главам</a:t>
+            </a:r>
+            <a:endParaRPr lang="en-US" sz="2200" dirty="0"/>
+          </a:p>
+        </p:txBody>
+      </p:sp>
+      <p:pic>
+        <p:nvPicPr>
+          <p:cNvPr id="3" name="Image 0" descr="/home/az/Code/bukivedenie/site/presentation/--03.png">    </p:cNvPr>
+          <p:cNvPicPr>
+            <a:picLocks noChangeAspect="1"/>
+          </p:cNvPicPr>
+          <p:nvPr/>
+        </p:nvPicPr>
+        <p:blipFill>
+          <a:blip r:embed="rId1"/>
+          <a:stretch>
+            <a:fillRect/>
+          </a:stretch>
+        </p:blipFill>
+        <p:spPr>
+          <a:xfrm>
+            <a:off x="502920" y="868680"/>
+            <a:ext cx="8138160" cy="4251960"/>
+          </a:xfrm>
+          <a:prstGeom prst="rect">
+            <a:avLst/>
+          </a:prstGeom>
+        </p:spPr>
+      </p:pic>
+      <p:sp>
+        <p:nvSpPr>
+          <p:cNvPr id="4" name="Text 1"/>
+          <p:cNvSpPr/>
+          <p:nvPr/>
+        </p:nvSpPr>
+        <p:spPr>
+          <a:xfrm>
+            <a:off x="502920" y="5257800"/>
+            <a:ext cx="8138160" cy="502920"/>
+          </a:xfrm>
+          <a:prstGeom prst="rect">
+            <a:avLst/>
+          </a:prstGeom>
+          <a:noFill/>
+          <a:ln/>
+        </p:spPr>
+        <p:txBody>
+          <a:bodyPr wrap="square" rtlCol="0" anchor="ctr"/>
+          <a:lstStyle/>
+          <a:p>
+            <a:pPr indent="0" marL="0">
+              <a:buNone/>
+            </a:pPr>
+            <a:r>
+              <a:rPr lang="en-US" sz="1100" dirty="0">
+                <a:solidFill>
+                  <a:srgbClr val="566573"/>
+                </a:solidFill>
+              </a:rPr>
+              <a:t>Диаграмма показывает плотность текстовой активности по главам и помогает находить пики динамики.</a:t>
+            </a:r>
+            <a:endParaRPr lang="en-US" sz="1100" dirty="0"/>
+          </a:p>
+        </p:txBody>
+      </p:sp>
+    </p:spTree>
+  </p:cSld>
+  <p:clrMapOvr>
+    <a:masterClrMapping/>
+  </p:clrMapOvr>
+</p:sld>
+</file>
+
+<file path=ppt/slides/slide12.xml><?xml version="1.0" encoding="utf-8"?>
+<p:sld xmlns:a="http://schemas.openxmlformats.org/drawingml/2006/main" xmlns:r="http://schemas.openxmlformats.org/officeDocument/2006/relationships" xmlns:p="http://schemas.openxmlformats.org/presentationml/2006/main">
+  <p:cSld name="Slide 12">
+    <p:spTree>
+      <p:nvGrpSpPr>
+        <p:cNvPr id="1" name=""/>
+        <p:cNvGrpSpPr/>
+        <p:nvPr/>
+      </p:nvGrpSpPr>
+      <p:grpSpPr>
+        <a:xfrm>
+          <a:off x="0" y="0"/>
+          <a:ext cx="0" cy="0"/>
+          <a:chOff x="0" y="0"/>
+          <a:chExt cx="0" cy="0"/>
+        </a:xfrm>
+      </p:grpSpPr>
+      <p:sp>
+        <p:nvSpPr>
+          <p:cNvPr id="2" name="Text 0"/>
+          <p:cNvSpPr/>
+          <p:nvPr/>
+        </p:nvSpPr>
+        <p:spPr>
+          <a:xfrm>
+            <a:off x="502920" y="320040"/>
+            <a:ext cx="7772400" cy="411480"/>
+          </a:xfrm>
+          <a:prstGeom prst="rect">
+            <a:avLst/>
+          </a:prstGeom>
+          <a:noFill/>
+          <a:ln/>
+        </p:spPr>
+        <p:txBody>
+          <a:bodyPr wrap="square" rtlCol="0" anchor="ctr"/>
+          <a:lstStyle/>
+          <a:p>
+            <a:pPr indent="0" marL="0">
+              <a:buNone/>
+            </a:pPr>
+            <a:r>
+              <a:rPr lang="en-US" sz="2200" b="1" dirty="0">
+                <a:solidFill>
+                  <a:srgbClr val="1C2833"/>
+                </a:solidFill>
+              </a:rPr>
+              <a:t>Тональность по главам</a:t>
+            </a:r>
+            <a:endParaRPr lang="en-US" sz="2200" dirty="0"/>
+          </a:p>
+        </p:txBody>
+      </p:sp>
+      <p:pic>
+        <p:nvPicPr>
+          <p:cNvPr id="3" name="Image 0" descr="/home/az/Code/bukivedenie/site/presentation/--04.png">    </p:cNvPr>
+          <p:cNvPicPr>
+            <a:picLocks noChangeAspect="1"/>
+          </p:cNvPicPr>
+          <p:nvPr/>
+        </p:nvPicPr>
+        <p:blipFill>
+          <a:blip r:embed="rId1"/>
+          <a:stretch>
+            <a:fillRect/>
+          </a:stretch>
+        </p:blipFill>
+        <p:spPr>
+          <a:xfrm>
+            <a:off x="502920" y="868680"/>
+            <a:ext cx="8138160" cy="4251960"/>
+          </a:xfrm>
+          <a:prstGeom prst="rect">
+            <a:avLst/>
+          </a:prstGeom>
+        </p:spPr>
+      </p:pic>
+      <p:sp>
+        <p:nvSpPr>
+          <p:cNvPr id="4" name="Text 1"/>
+          <p:cNvSpPr/>
+          <p:nvPr/>
+        </p:nvSpPr>
+        <p:spPr>
+          <a:xfrm>
+            <a:off x="502920" y="5257800"/>
+            <a:ext cx="8138160" cy="502920"/>
+          </a:xfrm>
+          <a:prstGeom prst="rect">
+            <a:avLst/>
+          </a:prstGeom>
+          <a:noFill/>
+          <a:ln/>
+        </p:spPr>
+        <p:txBody>
+          <a:bodyPr wrap="square" rtlCol="0" anchor="ctr"/>
+          <a:lstStyle/>
+          <a:p>
+            <a:pPr indent="0" marL="0">
+              <a:buNone/>
+            </a:pPr>
+            <a:r>
+              <a:rPr lang="en-US" sz="1100" dirty="0">
+                <a:solidFill>
+                  <a:srgbClr val="566573"/>
+                </a:solidFill>
+              </a:rPr>
+              <a:t>Линейный график показывает изменение тональности по главам. Это приближенная оценка, но она помогает увидеть эмоциональные сдвиги.</a:t>
+            </a:r>
+            <a:endParaRPr lang="en-US" sz="1100" dirty="0"/>
+          </a:p>
+        </p:txBody>
+      </p:sp>
+    </p:spTree>
+  </p:cSld>
+  <p:clrMapOvr>
+    <a:masterClrMapping/>
+  </p:clrMapOvr>
+</p:sld>
+</file>
+
+<file path=ppt/slides/slide13.xml><?xml version="1.0" encoding="utf-8"?>
+<p:sld xmlns:a="http://schemas.openxmlformats.org/drawingml/2006/main" xmlns:r="http://schemas.openxmlformats.org/officeDocument/2006/relationships" xmlns:p="http://schemas.openxmlformats.org/presentationml/2006/main">
+  <p:cSld name="Slide 13">
+    <p:spTree>
+      <p:nvGrpSpPr>
+        <p:cNvPr id="1" name=""/>
+        <p:cNvGrpSpPr/>
+        <p:nvPr/>
+      </p:nvGrpSpPr>
+      <p:grpSpPr>
+        <a:xfrm>
+          <a:off x="0" y="0"/>
+          <a:ext cx="0" cy="0"/>
+          <a:chOff x="0" y="0"/>
+          <a:chExt cx="0" cy="0"/>
+        </a:xfrm>
+      </p:grpSpPr>
+      <p:sp>
+        <p:nvSpPr>
+          <p:cNvPr id="2" name="Text 0"/>
+          <p:cNvSpPr/>
+          <p:nvPr/>
+        </p:nvSpPr>
+        <p:spPr>
+          <a:xfrm>
+            <a:off x="502920" y="320040"/>
+            <a:ext cx="7772400" cy="411480"/>
+          </a:xfrm>
+          <a:prstGeom prst="rect">
+            <a:avLst/>
+          </a:prstGeom>
+          <a:noFill/>
+          <a:ln/>
+        </p:spPr>
+        <p:txBody>
+          <a:bodyPr wrap="square" rtlCol="0" anchor="ctr"/>
+          <a:lstStyle/>
+          <a:p>
+            <a:pPr indent="0" marL="0">
+              <a:buNone/>
+            </a:pPr>
+            <a:r>
+              <a:rPr lang="en-US" sz="2200" b="1" dirty="0">
+                <a:solidFill>
+                  <a:srgbClr val="1C2833"/>
+                </a:solidFill>
+              </a:rPr>
+              <a:t>Сеть персонажей</a:t>
+            </a:r>
+            <a:endParaRPr lang="en-US" sz="2200" dirty="0"/>
+          </a:p>
+        </p:txBody>
+      </p:sp>
+      <p:pic>
+        <p:nvPicPr>
+          <p:cNvPr id="3" name="Image 0" descr="/home/az/Code/bukivedenie/site/presentation/--05.png">    </p:cNvPr>
+          <p:cNvPicPr>
+            <a:picLocks noChangeAspect="1"/>
+          </p:cNvPicPr>
+          <p:nvPr/>
+        </p:nvPicPr>
+        <p:blipFill>
+          <a:blip r:embed="rId1"/>
+          <a:stretch>
+            <a:fillRect/>
+          </a:stretch>
+        </p:blipFill>
+        <p:spPr>
+          <a:xfrm>
+            <a:off x="502920" y="868680"/>
+            <a:ext cx="8138160" cy="4251960"/>
+          </a:xfrm>
+          <a:prstGeom prst="rect">
+            <a:avLst/>
+          </a:prstGeom>
+        </p:spPr>
+      </p:pic>
+      <p:sp>
+        <p:nvSpPr>
+          <p:cNvPr id="4" name="Text 1"/>
+          <p:cNvSpPr/>
+          <p:nvPr/>
+        </p:nvSpPr>
+        <p:spPr>
+          <a:xfrm>
+            <a:off x="502920" y="5257800"/>
+            <a:ext cx="8138160" cy="502920"/>
+          </a:xfrm>
+          <a:prstGeom prst="rect">
+            <a:avLst/>
+          </a:prstGeom>
+          <a:noFill/>
+          <a:ln/>
+        </p:spPr>
+        <p:txBody>
+          <a:bodyPr wrap="square" rtlCol="0" anchor="ctr"/>
+          <a:lstStyle/>
+          <a:p>
+            <a:pPr indent="0" marL="0">
+              <a:buNone/>
+            </a:pPr>
+            <a:r>
+              <a:rPr lang="en-US" sz="1100" dirty="0">
+                <a:solidFill>
+                  <a:srgbClr val="566573"/>
+                </a:solidFill>
+              </a:rPr>
+              <a:t>Граф ко-встречаемости показывает, какие персонажи чаще появляются вместе. По нему видно центральных и второстепенных героев.</a:t>
+            </a:r>
+            <a:endParaRPr lang="en-US" sz="1100" dirty="0"/>
+          </a:p>
+        </p:txBody>
+      </p:sp>
+    </p:spTree>
+  </p:cSld>
+  <p:clrMapOvr>
+    <a:masterClrMapping/>
+  </p:clrMapOvr>
+</p:sld>
+</file>
+
+<file path=ppt/slides/slide14.xml><?xml version="1.0" encoding="utf-8"?>
+<p:sld xmlns:a="http://schemas.openxmlformats.org/drawingml/2006/main" xmlns:r="http://schemas.openxmlformats.org/officeDocument/2006/relationships" xmlns:p="http://schemas.openxmlformats.org/presentationml/2006/main">
+  <p:cSld name="Slide 14">
+    <p:spTree>
+      <p:nvGrpSpPr>
+        <p:cNvPr id="1" name=""/>
+        <p:cNvGrpSpPr/>
+        <p:nvPr/>
+      </p:nvGrpSpPr>
+      <p:grpSpPr>
+        <a:xfrm>
+          <a:off x="0" y="0"/>
+          <a:ext cx="0" cy="0"/>
+          <a:chOff x="0" y="0"/>
+          <a:chExt cx="0" cy="0"/>
+        </a:xfrm>
+      </p:grpSpPr>
+      <p:sp>
+        <p:nvSpPr>
+          <p:cNvPr id="2" name="Text 0"/>
+          <p:cNvSpPr/>
+          <p:nvPr/>
+        </p:nvSpPr>
+        <p:spPr>
+          <a:xfrm>
+            <a:off x="502920" y="320040"/>
+            <a:ext cx="7772400" cy="411480"/>
+          </a:xfrm>
+          <a:prstGeom prst="rect">
+            <a:avLst/>
+          </a:prstGeom>
+          <a:noFill/>
+          <a:ln/>
+        </p:spPr>
+        <p:txBody>
+          <a:bodyPr wrap="square" rtlCol="0" anchor="ctr"/>
+          <a:lstStyle/>
+          <a:p>
+            <a:pPr indent="0" marL="0">
+              <a:buNone/>
+            </a:pPr>
+            <a:r>
+              <a:rPr lang="en-US" sz="2200" b="1" dirty="0">
+                <a:solidFill>
+                  <a:srgbClr val="1C2833"/>
+                </a:solidFill>
+              </a:rPr>
+              <a:t>Список персонажей</a:t>
+            </a:r>
+            <a:endParaRPr lang="en-US" sz="2200" dirty="0"/>
+          </a:p>
+        </p:txBody>
+      </p:sp>
+      <p:pic>
+        <p:nvPicPr>
+          <p:cNvPr id="3" name="Image 0" descr="/home/az/Code/bukivedenie/site/presentation/article-06.png">    </p:cNvPr>
+          <p:cNvPicPr>
+            <a:picLocks noChangeAspect="1"/>
+          </p:cNvPicPr>
+          <p:nvPr/>
+        </p:nvPicPr>
+        <p:blipFill>
+          <a:blip r:embed="rId1"/>
+          <a:stretch>
+            <a:fillRect/>
+          </a:stretch>
+        </p:blipFill>
+        <p:spPr>
+          <a:xfrm>
+            <a:off x="502920" y="868680"/>
+            <a:ext cx="8138160" cy="4251960"/>
+          </a:xfrm>
+          <a:prstGeom prst="rect">
+            <a:avLst/>
+          </a:prstGeom>
+        </p:spPr>
+      </p:pic>
+      <p:sp>
+        <p:nvSpPr>
+          <p:cNvPr id="4" name="Text 1"/>
+          <p:cNvSpPr/>
+          <p:nvPr/>
+        </p:nvSpPr>
+        <p:spPr>
+          <a:xfrm>
+            <a:off x="502920" y="5257800"/>
+            <a:ext cx="8138160" cy="502920"/>
+          </a:xfrm>
+          <a:prstGeom prst="rect">
+            <a:avLst/>
+          </a:prstGeom>
+          <a:noFill/>
+          <a:ln/>
+        </p:spPr>
+        <p:txBody>
+          <a:bodyPr wrap="square" rtlCol="0" anchor="ctr"/>
+          <a:lstStyle/>
+          <a:p>
+            <a:pPr indent="0" marL="0">
+              <a:buNone/>
+            </a:pPr>
+            <a:r>
+              <a:rPr lang="en-US" sz="1100" dirty="0">
+                <a:solidFill>
+                  <a:srgbClr val="566573"/>
+                </a:solidFill>
+              </a:rPr>
+              <a:t>Таблица показывает найденных персонажей и частоту их упоминаний. Часть расхождений связана с эвристическим выделением имен.</a:t>
+            </a:r>
+            <a:endParaRPr lang="en-US" sz="1100" dirty="0"/>
+          </a:p>
+        </p:txBody>
+      </p:sp>
+    </p:spTree>
+  </p:cSld>
+  <p:clrMapOvr>
+    <a:masterClrMapping/>
+  </p:clrMapOvr>
+</p:sld>
+</file>
+
+<file path=ppt/slides/slide15.xml><?xml version="1.0" encoding="utf-8"?>
+<p:sld xmlns:a="http://schemas.openxmlformats.org/drawingml/2006/main" xmlns:r="http://schemas.openxmlformats.org/officeDocument/2006/relationships" xmlns:p="http://schemas.openxmlformats.org/presentationml/2006/main">
+  <p:cSld name="Slide 15">
+    <p:spTree>
+      <p:nvGrpSpPr>
+        <p:cNvPr id="1" name=""/>
+        <p:cNvGrpSpPr/>
+        <p:nvPr/>
+      </p:nvGrpSpPr>
+      <p:grpSpPr>
+        <a:xfrm>
+          <a:off x="0" y="0"/>
+          <a:ext cx="0" cy="0"/>
+          <a:chOff x="0" y="0"/>
+          <a:chExt cx="0" cy="0"/>
+        </a:xfrm>
+      </p:grpSpPr>
+      <p:sp>
+        <p:nvSpPr>
+          <p:cNvPr id="2" name="Text 0"/>
+          <p:cNvSpPr/>
+          <p:nvPr/>
+        </p:nvSpPr>
+        <p:spPr>
+          <a:xfrm>
+            <a:off x="502920" y="320040"/>
+            <a:ext cx="7772400" cy="411480"/>
+          </a:xfrm>
+          <a:prstGeom prst="rect">
+            <a:avLst/>
+          </a:prstGeom>
+          <a:noFill/>
+          <a:ln/>
+        </p:spPr>
+        <p:txBody>
+          <a:bodyPr wrap="square" rtlCol="0" anchor="ctr"/>
+          <a:lstStyle/>
+          <a:p>
+            <a:pPr indent="0" marL="0">
+              <a:buNone/>
+            </a:pPr>
+            <a:r>
+              <a:rPr lang="en-US" sz="2200" b="1" dirty="0">
+                <a:solidFill>
+                  <a:srgbClr val="1C2833"/>
+                </a:solidFill>
+              </a:rPr>
+              <a:t>Hapax legomena</a:t>
+            </a:r>
+            <a:endParaRPr lang="en-US" sz="2200" dirty="0"/>
+          </a:p>
+        </p:txBody>
+      </p:sp>
+      <p:pic>
+        <p:nvPicPr>
+          <p:cNvPr id="3" name="Image 0" descr="/home/az/Code/bukivedenie/site/presentation/hapax-07.png">    </p:cNvPr>
+          <p:cNvPicPr>
+            <a:picLocks noChangeAspect="1"/>
+          </p:cNvPicPr>
+          <p:nvPr/>
+        </p:nvPicPr>
+        <p:blipFill>
+          <a:blip r:embed="rId1"/>
+          <a:stretch>
+            <a:fillRect/>
+          </a:stretch>
+        </p:blipFill>
+        <p:spPr>
+          <a:xfrm>
+            <a:off x="502920" y="868680"/>
+            <a:ext cx="8138160" cy="4251960"/>
+          </a:xfrm>
+          <a:prstGeom prst="rect">
+            <a:avLst/>
+          </a:prstGeom>
+        </p:spPr>
+      </p:pic>
+      <p:sp>
+        <p:nvSpPr>
+          <p:cNvPr id="4" name="Text 1"/>
+          <p:cNvSpPr/>
+          <p:nvPr/>
+        </p:nvSpPr>
+        <p:spPr>
+          <a:xfrm>
+            <a:off x="502920" y="5257800"/>
+            <a:ext cx="8138160" cy="502920"/>
+          </a:xfrm>
+          <a:prstGeom prst="rect">
+            <a:avLst/>
+          </a:prstGeom>
+          <a:noFill/>
+          <a:ln/>
+        </p:spPr>
+        <p:txBody>
+          <a:bodyPr wrap="square" rtlCol="0" anchor="ctr"/>
+          <a:lstStyle/>
+          <a:p>
+            <a:pPr indent="0" marL="0">
+              <a:buNone/>
+            </a:pPr>
+            <a:r>
+              <a:rPr lang="en-US" sz="1100" dirty="0">
+                <a:solidFill>
+                  <a:srgbClr val="566573"/>
+                </a:solidFill>
+              </a:rPr>
+              <a:t>Это слова, которые встретились только один раз. Они полезны для изучения редкой лексики и возможных артефактов разметки.</a:t>
+            </a:r>
+            <a:endParaRPr lang="en-US" sz="1100" dirty="0"/>
+          </a:p>
+        </p:txBody>
+      </p:sp>
+    </p:spTree>
+  </p:cSld>
+  <p:clrMapOvr>
+    <a:masterClrMapping/>
+  </p:clrMapOvr>
+</p:sld>
+</file>
+
+<file path=ppt/slides/slide16.xml><?xml version="1.0" encoding="utf-8"?>
+<p:sld xmlns:a="http://schemas.openxmlformats.org/drawingml/2006/main" xmlns:r="http://schemas.openxmlformats.org/officeDocument/2006/relationships" xmlns:p="http://schemas.openxmlformats.org/presentationml/2006/main">
+  <p:cSld name="Slide 16">
+    <p:spTree>
+      <p:nvGrpSpPr>
+        <p:cNvPr id="1" name=""/>
+        <p:cNvGrpSpPr/>
+        <p:nvPr/>
+      </p:nvGrpSpPr>
+      <p:grpSpPr>
+        <a:xfrm>
+          <a:off x="0" y="0"/>
+          <a:ext cx="0" cy="0"/>
+          <a:chOff x="0" y="0"/>
+          <a:chExt cx="0" cy="0"/>
+        </a:xfrm>
+      </p:grpSpPr>
+      <p:sp>
+        <p:nvSpPr>
+          <p:cNvPr id="2" name="Text 0"/>
+          <p:cNvSpPr/>
+          <p:nvPr/>
+        </p:nvSpPr>
+        <p:spPr>
+          <a:xfrm>
+            <a:off x="502920" y="320040"/>
+            <a:ext cx="7772400" cy="411480"/>
+          </a:xfrm>
+          <a:prstGeom prst="rect">
+            <a:avLst/>
+          </a:prstGeom>
+          <a:noFill/>
+          <a:ln/>
+        </p:spPr>
+        <p:txBody>
+          <a:bodyPr wrap="square" rtlCol="0" anchor="ctr"/>
+          <a:lstStyle/>
+          <a:p>
+            <a:pPr indent="0" marL="0">
+              <a:buNone/>
+            </a:pPr>
+            <a:r>
+              <a:rPr lang="en-US" sz="2200" b="1" dirty="0">
+                <a:solidFill>
+                  <a:srgbClr val="1C2833"/>
+                </a:solidFill>
+              </a:rPr>
+              <a:t>Метаданные прогона</a:t>
+            </a:r>
+            <a:endParaRPr lang="en-US" sz="2200" dirty="0"/>
+          </a:p>
+        </p:txBody>
+      </p:sp>
+      <p:pic>
+        <p:nvPicPr>
+          <p:cNvPr id="3" name="Image 0" descr="/home/az/Code/bukivedenie/site/presentation/--08.png">    </p:cNvPr>
+          <p:cNvPicPr>
+            <a:picLocks noChangeAspect="1"/>
+          </p:cNvPicPr>
+          <p:nvPr/>
+        </p:nvPicPr>
+        <p:blipFill>
+          <a:blip r:embed="rId1"/>
+          <a:stretch>
+            <a:fillRect/>
+          </a:stretch>
+        </p:blipFill>
+        <p:spPr>
+          <a:xfrm>
+            <a:off x="502920" y="868680"/>
+            <a:ext cx="8138160" cy="4251960"/>
+          </a:xfrm>
+          <a:prstGeom prst="rect">
+            <a:avLst/>
+          </a:prstGeom>
+        </p:spPr>
+      </p:pic>
+      <p:sp>
+        <p:nvSpPr>
+          <p:cNvPr id="4" name="Text 1"/>
+          <p:cNvSpPr/>
+          <p:nvPr/>
+        </p:nvSpPr>
+        <p:spPr>
+          <a:xfrm>
+            <a:off x="502920" y="5257800"/>
+            <a:ext cx="8138160" cy="502920"/>
+          </a:xfrm>
+          <a:prstGeom prst="rect">
+            <a:avLst/>
+          </a:prstGeom>
+          <a:noFill/>
+          <a:ln/>
+        </p:spPr>
+        <p:txBody>
+          <a:bodyPr wrap="square" rtlCol="0" anchor="ctr"/>
+          <a:lstStyle/>
+          <a:p>
+            <a:pPr indent="0" marL="0">
+              <a:buNone/>
+            </a:pPr>
+            <a:r>
+              <a:rPr lang="en-US" sz="1100" dirty="0">
+                <a:solidFill>
+                  <a:srgbClr val="566573"/>
+                </a:solidFill>
+              </a:rPr>
+              <a:t>Файл run_metadata.json фиксирует параметры и время прогона. Это важно для воспроизводимости результатов.</a:t>
+            </a:r>
+            <a:endParaRPr lang="en-US" sz="1100" dirty="0"/>
+          </a:p>
+        </p:txBody>
+      </p:sp>
+    </p:spTree>
+  </p:cSld>
+  <p:clrMapOvr>
+    <a:masterClrMapping/>
+  </p:clrMapOvr>
+</p:sld>
+</file>
+
+<file path=ppt/slides/slide17.xml><?xml version="1.0" encoding="utf-8"?>
+<p:sld xmlns:a="http://schemas.openxmlformats.org/drawingml/2006/main" xmlns:r="http://schemas.openxmlformats.org/officeDocument/2006/relationships" xmlns:p="http://schemas.openxmlformats.org/presentationml/2006/main">
+  <p:cSld name="Slide 17">
+    <p:spTree>
+      <p:nvGrpSpPr>
+        <p:cNvPr id="1" name=""/>
+        <p:cNvGrpSpPr/>
+        <p:nvPr/>
+      </p:nvGrpSpPr>
+      <p:grpSpPr>
+        <a:xfrm>
+          <a:off x="0" y="0"/>
+          <a:ext cx="0" cy="0"/>
+          <a:chOff x="0" y="0"/>
+          <a:chExt cx="0" cy="0"/>
+        </a:xfrm>
+      </p:grpSpPr>
+      <p:sp>
+        <p:nvSpPr>
+          <p:cNvPr id="2" name="Text 0"/>
+          <p:cNvSpPr/>
+          <p:nvPr/>
+        </p:nvSpPr>
+        <p:spPr>
+          <a:xfrm>
+            <a:off x="502920" y="320040"/>
+            <a:ext cx="7772400" cy="411480"/>
+          </a:xfrm>
+          <a:prstGeom prst="rect">
+            <a:avLst/>
+          </a:prstGeom>
+          <a:noFill/>
+          <a:ln/>
+        </p:spPr>
+        <p:txBody>
+          <a:bodyPr wrap="square" rtlCol="0" anchor="ctr"/>
+          <a:lstStyle/>
+          <a:p>
+            <a:pPr indent="0" marL="0">
+              <a:buNone/>
+            </a:pPr>
+            <a:r>
+              <a:rPr lang="en-US" sz="2200" b="1" dirty="0">
+                <a:solidFill>
+                  <a:srgbClr val="1C2833"/>
+                </a:solidFill>
+              </a:rPr>
+              <a:t>Пунктуация и структура</a:t>
+            </a:r>
+            <a:endParaRPr lang="en-US" sz="2200" dirty="0"/>
+          </a:p>
+        </p:txBody>
+      </p:sp>
+      <p:pic>
+        <p:nvPicPr>
+          <p:cNvPr id="3" name="Image 0" descr="/home/az/Code/bukivedenie/site/presentation/article-09.png">    </p:cNvPr>
+          <p:cNvPicPr>
+            <a:picLocks noChangeAspect="1"/>
+          </p:cNvPicPr>
+          <p:nvPr/>
+        </p:nvPicPr>
+        <p:blipFill>
+          <a:blip r:embed="rId1"/>
+          <a:stretch>
+            <a:fillRect/>
+          </a:stretch>
+        </p:blipFill>
+        <p:spPr>
+          <a:xfrm>
+            <a:off x="502920" y="868680"/>
+            <a:ext cx="8138160" cy="4251960"/>
+          </a:xfrm>
+          <a:prstGeom prst="rect">
+            <a:avLst/>
+          </a:prstGeom>
+        </p:spPr>
+      </p:pic>
+      <p:sp>
+        <p:nvSpPr>
+          <p:cNvPr id="4" name="Text 1"/>
+          <p:cNvSpPr/>
+          <p:nvPr/>
+        </p:nvSpPr>
+        <p:spPr>
+          <a:xfrm>
+            <a:off x="502920" y="5257800"/>
+            <a:ext cx="8138160" cy="502920"/>
+          </a:xfrm>
+          <a:prstGeom prst="rect">
+            <a:avLst/>
+          </a:prstGeom>
+          <a:noFill/>
+          <a:ln/>
+        </p:spPr>
+        <p:txBody>
+          <a:bodyPr wrap="square" rtlCol="0" anchor="ctr"/>
+          <a:lstStyle/>
+          <a:p>
+            <a:pPr indent="0" marL="0">
+              <a:buNone/>
+            </a:pPr>
+            <a:r>
+              <a:rPr lang="en-US" sz="1100" dirty="0">
+                <a:solidFill>
+                  <a:srgbClr val="566573"/>
+                </a:solidFill>
+              </a:rPr>
+              <a:t>Частоты пунктуации по главам помогают увидеть диалоги, паузы и смену ритма повествования.</a:t>
+            </a:r>
+            <a:endParaRPr lang="en-US" sz="1100" dirty="0"/>
+          </a:p>
+        </p:txBody>
+      </p:sp>
+    </p:spTree>
+  </p:cSld>
+  <p:clrMapOvr>
+    <a:masterClrMapping/>
+  </p:clrMapOvr>
+</p:sld>
+</file>
+
+<file path=ppt/slides/slide18.xml><?xml version="1.0" encoding="utf-8"?>
+<p:sld xmlns:a="http://schemas.openxmlformats.org/drawingml/2006/main" xmlns:r="http://schemas.openxmlformats.org/officeDocument/2006/relationships" xmlns:p="http://schemas.openxmlformats.org/presentationml/2006/main">
+  <p:cSld name="Slide 18">
+    <p:spTree>
+      <p:nvGrpSpPr>
+        <p:cNvPr id="1" name=""/>
+        <p:cNvGrpSpPr/>
+        <p:nvPr/>
+      </p:nvGrpSpPr>
+      <p:grpSpPr>
+        <a:xfrm>
+          <a:off x="0" y="0"/>
+          <a:ext cx="0" cy="0"/>
+          <a:chOff x="0" y="0"/>
+          <a:chExt cx="0" cy="0"/>
+        </a:xfrm>
+      </p:grpSpPr>
+      <p:sp>
+        <p:nvSpPr>
+          <p:cNvPr id="2" name="Text 0"/>
+          <p:cNvSpPr/>
+          <p:nvPr/>
+        </p:nvSpPr>
+        <p:spPr>
+          <a:xfrm>
+            <a:off x="502920" y="320040"/>
+            <a:ext cx="7772400" cy="411480"/>
+          </a:xfrm>
+          <a:prstGeom prst="rect">
+            <a:avLst/>
+          </a:prstGeom>
+          <a:noFill/>
+          <a:ln/>
+        </p:spPr>
+        <p:txBody>
+          <a:bodyPr wrap="square" rtlCol="0" anchor="ctr"/>
+          <a:lstStyle/>
+          <a:p>
+            <a:pPr indent="0" marL="0">
+              <a:buNone/>
+            </a:pPr>
+            <a:r>
+              <a:rPr lang="en-US" sz="2200" b="1" dirty="0">
+                <a:solidFill>
+                  <a:srgbClr val="1C2833"/>
+                </a:solidFill>
+              </a:rPr>
+              <a:t>Стиль: radar</a:t>
+            </a:r>
+            <a:endParaRPr lang="en-US" sz="2200" dirty="0"/>
+          </a:p>
+        </p:txBody>
+      </p:sp>
+      <p:pic>
+        <p:nvPicPr>
+          <p:cNvPr id="3" name="Image 0" descr="/home/az/Code/bukivedenie/site/presentation/-radar-10.png">    </p:cNvPr>
+          <p:cNvPicPr>
+            <a:picLocks noChangeAspect="1"/>
+          </p:cNvPicPr>
+          <p:nvPr/>
+        </p:nvPicPr>
+        <p:blipFill>
+          <a:blip r:embed="rId1"/>
+          <a:stretch>
+            <a:fillRect/>
+          </a:stretch>
+        </p:blipFill>
+        <p:spPr>
+          <a:xfrm>
+            <a:off x="502920" y="868680"/>
+            <a:ext cx="8138160" cy="4251960"/>
+          </a:xfrm>
+          <a:prstGeom prst="rect">
+            <a:avLst/>
+          </a:prstGeom>
+        </p:spPr>
+      </p:pic>
+      <p:sp>
+        <p:nvSpPr>
+          <p:cNvPr id="4" name="Text 1"/>
+          <p:cNvSpPr/>
+          <p:nvPr/>
+        </p:nvSpPr>
+        <p:spPr>
+          <a:xfrm>
+            <a:off x="502920" y="5257800"/>
+            <a:ext cx="8138160" cy="502920"/>
+          </a:xfrm>
+          <a:prstGeom prst="rect">
+            <a:avLst/>
+          </a:prstGeom>
+          <a:noFill/>
+          <a:ln/>
+        </p:spPr>
+        <p:txBody>
+          <a:bodyPr wrap="square" rtlCol="0" anchor="ctr"/>
+          <a:lstStyle/>
+          <a:p>
+            <a:pPr indent="0" marL="0">
+              <a:buNone/>
+            </a:pPr>
+            <a:r>
+              <a:rPr lang="en-US" sz="1100" dirty="0">
+                <a:solidFill>
+                  <a:srgbClr val="566573"/>
+                </a:solidFill>
+              </a:rPr>
+              <a:t>Радар-диаграмма сводит несколько метрик главы в один образ: лексическую плотность, длину предложений и другие признаки стиля.</a:t>
+            </a:r>
+            <a:endParaRPr lang="en-US" sz="1100" dirty="0"/>
+          </a:p>
+        </p:txBody>
+      </p:sp>
+    </p:spTree>
+  </p:cSld>
+  <p:clrMapOvr>
+    <a:masterClrMapping/>
+  </p:clrMapOvr>
+</p:sld>
+</file>
+
+<file path=ppt/slides/slide19.xml><?xml version="1.0" encoding="utf-8"?>
+<p:sld xmlns:a="http://schemas.openxmlformats.org/drawingml/2006/main" xmlns:r="http://schemas.openxmlformats.org/officeDocument/2006/relationships" xmlns:p="http://schemas.openxmlformats.org/presentationml/2006/main">
+  <p:cSld name="Slide 19">
+    <p:spTree>
+      <p:nvGrpSpPr>
+        <p:cNvPr id="1" name=""/>
+        <p:cNvGrpSpPr/>
+        <p:nvPr/>
+      </p:nvGrpSpPr>
+      <p:grpSpPr>
+        <a:xfrm>
+          <a:off x="0" y="0"/>
+          <a:ext cx="0" cy="0"/>
+          <a:chOff x="0" y="0"/>
+          <a:chExt cx="0" cy="0"/>
+        </a:xfrm>
+      </p:grpSpPr>
+      <p:sp>
+        <p:nvSpPr>
+          <p:cNvPr id="2" name="Text 0"/>
+          <p:cNvSpPr/>
+          <p:nvPr/>
+        </p:nvSpPr>
+        <p:spPr>
+          <a:xfrm>
+            <a:off x="502920" y="320040"/>
+            <a:ext cx="7772400" cy="411480"/>
+          </a:xfrm>
+          <a:prstGeom prst="rect">
+            <a:avLst/>
+          </a:prstGeom>
+          <a:noFill/>
+          <a:ln/>
+        </p:spPr>
+        <p:txBody>
+          <a:bodyPr wrap="square" rtlCol="0" anchor="ctr"/>
+          <a:lstStyle/>
+          <a:p>
+            <a:pPr indent="0" marL="0">
+              <a:buNone/>
+            </a:pPr>
+            <a:r>
+              <a:rPr lang="en-US" sz="2200" b="1" dirty="0">
+                <a:solidFill>
+                  <a:srgbClr val="1C2833"/>
+                </a:solidFill>
+              </a:rPr>
+              <a:t>Главы: words × sentences</a:t>
+            </a:r>
+            <a:endParaRPr lang="en-US" sz="2200" dirty="0"/>
+          </a:p>
+        </p:txBody>
+      </p:sp>
+      <p:pic>
+        <p:nvPicPr>
+          <p:cNvPr id="3" name="Image 0" descr="/home/az/Code/bukivedenie/site/presentation/-words-sentences-11.png">    </p:cNvPr>
+          <p:cNvPicPr>
+            <a:picLocks noChangeAspect="1"/>
+          </p:cNvPicPr>
+          <p:nvPr/>
+        </p:nvPicPr>
+        <p:blipFill>
+          <a:blip r:embed="rId1"/>
+          <a:stretch>
+            <a:fillRect/>
+          </a:stretch>
+        </p:blipFill>
+        <p:spPr>
+          <a:xfrm>
+            <a:off x="502920" y="868680"/>
+            <a:ext cx="8138160" cy="4251960"/>
+          </a:xfrm>
+          <a:prstGeom prst="rect">
+            <a:avLst/>
+          </a:prstGeom>
+        </p:spPr>
+      </p:pic>
+      <p:sp>
+        <p:nvSpPr>
+          <p:cNvPr id="4" name="Text 1"/>
+          <p:cNvSpPr/>
+          <p:nvPr/>
+        </p:nvSpPr>
+        <p:spPr>
+          <a:xfrm>
+            <a:off x="502920" y="5257800"/>
+            <a:ext cx="8138160" cy="502920"/>
+          </a:xfrm>
+          <a:prstGeom prst="rect">
+            <a:avLst/>
+          </a:prstGeom>
+          <a:noFill/>
+          <a:ln/>
+        </p:spPr>
+        <p:txBody>
+          <a:bodyPr wrap="square" rtlCol="0" anchor="ctr"/>
+          <a:lstStyle/>
+          <a:p>
+            <a:pPr indent="0" marL="0">
+              <a:buNone/>
+            </a:pPr>
+            <a:r>
+              <a:rPr lang="en-US" sz="1100" dirty="0">
+                <a:solidFill>
+                  <a:srgbClr val="566573"/>
+                </a:solidFill>
+              </a:rPr>
+              <a:t>Диаграмма показывает соотношение слов и предложений в главах и позволяет быстро заметить аномалии.</a:t>
+            </a:r>
+            <a:endParaRPr lang="en-US" sz="1100" dirty="0"/>
+          </a:p>
+        </p:txBody>
+      </p:sp>
+    </p:spTree>
+  </p:cSld>
+  <p:clrMapOvr>
+    <a:masterClrMapping/>
+  </p:clrMapOvr>
+</p:sld>
+</file>
+
+<file path=ppt/slides/slide2.xml><?xml version="1.0" encoding="utf-8"?>
+<p:sld xmlns:a="http://schemas.openxmlformats.org/drawingml/2006/main" xmlns:r="http://schemas.openxmlformats.org/officeDocument/2006/relationships" xmlns:p="http://schemas.openxmlformats.org/presentationml/2006/main">
+  <p:cSld name="Slide 2">
+    <p:bg>
+      <p:bgPr>
+        <a:solidFill>
+          <a:srgbClr val="0B3D91"/>
+        </a:solidFill>
+      </p:bgPr>
+    </p:bg>
+    <p:spTree>
+      <p:nvGrpSpPr>
+        <p:cNvPr id="1" name=""/>
+        <p:cNvGrpSpPr/>
+        <p:nvPr/>
+      </p:nvGrpSpPr>
+      <p:grpSpPr>
+        <a:xfrm>
+          <a:off x="0" y="0"/>
+          <a:ext cx="0" cy="0"/>
+          <a:chOff x="0" y="0"/>
+          <a:chExt cx="0" cy="0"/>
+        </a:xfrm>
+      </p:grpSpPr>
+      <p:sp>
+        <p:nvSpPr>
+          <p:cNvPr id="2" name="Text 0"/>
+          <p:cNvSpPr/>
+          <p:nvPr/>
+        </p:nvSpPr>
+        <p:spPr>
+          <a:xfrm>
+            <a:off x="548640" y="1051560"/>
+            <a:ext cx="8138160" cy="1097280"/>
+          </a:xfrm>
+          <a:prstGeom prst="rect">
+            <a:avLst/>
+          </a:prstGeom>
+          <a:noFill/>
+          <a:ln/>
+        </p:spPr>
+        <p:txBody>
+          <a:bodyPr wrap="square" rtlCol="0" anchor="ctr"/>
+          <a:lstStyle/>
+          <a:p>
+            <a:pPr algn="ctr" indent="0" marL="0">
+              <a:buNone/>
+            </a:pPr>
+            <a:r>
+              <a:rPr lang="en-US" sz="2800" b="1" dirty="0">
+                <a:solidFill>
+                  <a:srgbClr val="FFFFFF"/>
+                </a:solidFill>
+                <a:latin typeface="Aptos" pitchFamily="34" charset="0"/>
+                <a:ea typeface="Aptos" pitchFamily="34" charset="-122"/>
+                <a:cs typeface="Aptos" pitchFamily="34" charset="-120"/>
+              </a:rPr>
+              <a:t>Визуализация и исследование данныхпри анализе классической литературына примере романа  “Война и мир”</a:t>
+            </a:r>
+            <a:endParaRPr lang="en-US" sz="2800" dirty="0"/>
+          </a:p>
+        </p:txBody>
+      </p:sp>
+      <p:sp>
+        <p:nvSpPr>
+          <p:cNvPr id="3" name="Text 1"/>
+          <p:cNvSpPr/>
+          <p:nvPr/>
+        </p:nvSpPr>
+        <p:spPr>
+          <a:xfrm>
+            <a:off x="914400" y="2377440"/>
+            <a:ext cx="7315200" cy="640080"/>
+          </a:xfrm>
+          <a:prstGeom prst="rect">
+            <a:avLst/>
+          </a:prstGeom>
+          <a:noFill/>
+          <a:ln/>
+        </p:spPr>
+        <p:txBody>
+          <a:bodyPr wrap="square" rtlCol="0" anchor="ctr"/>
+          <a:lstStyle/>
+          <a:p>
+            <a:pPr algn="ctr" indent="0" marL="0">
+              <a:buNone/>
+            </a:pPr>
+            <a:r>
+              <a:rPr lang="en-US" sz="1100" dirty="0">
+                <a:solidFill>
+                  <a:srgbClr val="DDE7FF"/>
+                </a:solidFill>
+              </a:rPr>
+              <a:t>Министерство образования Иркутской областиМинистерство по молодежной политике Иркутской областиСибирское отделение Российской академии наукРегиональная конференция проектно-исследовательских работ«Наука. Технологии. Интеллект»Для учащихся 8-11 классовобщеобразовательных учреждений Иркутской области</a:t>
+            </a:r>
+            <a:endParaRPr lang="en-US" sz="1100" dirty="0"/>
+          </a:p>
+        </p:txBody>
+      </p:sp>
+    </p:spTree>
+  </p:cSld>
+  <p:clrMapOvr>
+    <a:masterClrMapping/>
+  </p:clrMapOvr>
+</p:sld>
+</file>
+
+<file path=ppt/slides/slide20.xml><?xml version="1.0" encoding="utf-8"?>
+<p:sld xmlns:a="http://schemas.openxmlformats.org/drawingml/2006/main" xmlns:r="http://schemas.openxmlformats.org/officeDocument/2006/relationships" xmlns:p="http://schemas.openxmlformats.org/presentationml/2006/main">
+  <p:cSld name="Slide 20">
+    <p:spTree>
+      <p:nvGrpSpPr>
+        <p:cNvPr id="1" name=""/>
+        <p:cNvGrpSpPr/>
+        <p:nvPr/>
+      </p:nvGrpSpPr>
+      <p:grpSpPr>
+        <a:xfrm>
+          <a:off x="0" y="0"/>
+          <a:ext cx="0" cy="0"/>
+          <a:chOff x="0" y="0"/>
+          <a:chExt cx="0" cy="0"/>
+        </a:xfrm>
+      </p:grpSpPr>
+      <p:sp>
+        <p:nvSpPr>
+          <p:cNvPr id="2" name="Text 0"/>
+          <p:cNvSpPr/>
+          <p:nvPr/>
+        </p:nvSpPr>
+        <p:spPr>
+          <a:xfrm>
+            <a:off x="502920" y="320040"/>
+            <a:ext cx="7772400" cy="411480"/>
+          </a:xfrm>
+          <a:prstGeom prst="rect">
+            <a:avLst/>
+          </a:prstGeom>
+          <a:noFill/>
+          <a:ln/>
+        </p:spPr>
+        <p:txBody>
+          <a:bodyPr wrap="square" rtlCol="0" anchor="ctr"/>
+          <a:lstStyle/>
+          <a:p>
+            <a:pPr indent="0" marL="0">
+              <a:buNone/>
+            </a:pPr>
+            <a:r>
+              <a:rPr lang="en-US" sz="2200" b="1" dirty="0">
+                <a:solidFill>
+                  <a:srgbClr val="1C2833"/>
+                </a:solidFill>
+              </a:rPr>
+              <a:t>Персонажи × главы</a:t>
+            </a:r>
+            <a:endParaRPr lang="en-US" sz="2200" dirty="0"/>
+          </a:p>
+        </p:txBody>
+      </p:sp>
+      <p:pic>
+        <p:nvPicPr>
+          <p:cNvPr id="3" name="Image 0" descr="/home/az/Code/bukivedenie/site/presentation/--12.png">    </p:cNvPr>
+          <p:cNvPicPr>
+            <a:picLocks noChangeAspect="1"/>
+          </p:cNvPicPr>
+          <p:nvPr/>
+        </p:nvPicPr>
+        <p:blipFill>
+          <a:blip r:embed="rId1"/>
+          <a:stretch>
+            <a:fillRect/>
+          </a:stretch>
+        </p:blipFill>
+        <p:spPr>
+          <a:xfrm>
+            <a:off x="502920" y="868680"/>
+            <a:ext cx="8138160" cy="4251960"/>
+          </a:xfrm>
+          <a:prstGeom prst="rect">
+            <a:avLst/>
+          </a:prstGeom>
+        </p:spPr>
+      </p:pic>
+      <p:sp>
+        <p:nvSpPr>
+          <p:cNvPr id="4" name="Text 1"/>
+          <p:cNvSpPr/>
+          <p:nvPr/>
+        </p:nvSpPr>
+        <p:spPr>
+          <a:xfrm>
+            <a:off x="502920" y="5257800"/>
+            <a:ext cx="8138160" cy="502920"/>
+          </a:xfrm>
+          <a:prstGeom prst="rect">
+            <a:avLst/>
+          </a:prstGeom>
+          <a:noFill/>
+          <a:ln/>
+        </p:spPr>
+        <p:txBody>
+          <a:bodyPr wrap="square" rtlCol="0" anchor="ctr"/>
+          <a:lstStyle/>
+          <a:p>
+            <a:pPr indent="0" marL="0">
+              <a:buNone/>
+            </a:pPr>
+            <a:r>
+              <a:rPr lang="en-US" sz="1100" dirty="0">
+                <a:solidFill>
+                  <a:srgbClr val="566573"/>
+                </a:solidFill>
+              </a:rPr>
+              <a:t>Тепловая карта показывает, где и в каких главах появляются персонажи. Это удобно для отслеживания сюжетных арок.</a:t>
+            </a:r>
+            <a:endParaRPr lang="en-US" sz="1100" dirty="0"/>
+          </a:p>
+        </p:txBody>
+      </p:sp>
+    </p:spTree>
+  </p:cSld>
+  <p:clrMapOvr>
+    <a:masterClrMapping/>
+  </p:clrMapOvr>
+</p:sld>
+</file>
+
+<file path=ppt/slides/slide21.xml><?xml version="1.0" encoding="utf-8"?>
+<p:sld xmlns:a="http://schemas.openxmlformats.org/drawingml/2006/main" xmlns:r="http://schemas.openxmlformats.org/officeDocument/2006/relationships" xmlns:p="http://schemas.openxmlformats.org/presentationml/2006/main">
+  <p:cSld name="Slide 21">
+    <p:spTree>
+      <p:nvGrpSpPr>
+        <p:cNvPr id="1" name=""/>
+        <p:cNvGrpSpPr/>
+        <p:nvPr/>
+      </p:nvGrpSpPr>
+      <p:grpSpPr>
+        <a:xfrm>
+          <a:off x="0" y="0"/>
+          <a:ext cx="0" cy="0"/>
+          <a:chOff x="0" y="0"/>
+          <a:chExt cx="0" cy="0"/>
+        </a:xfrm>
+      </p:grpSpPr>
+      <p:sp>
+        <p:nvSpPr>
+          <p:cNvPr id="2" name="Text 0"/>
+          <p:cNvSpPr/>
+          <p:nvPr/>
+        </p:nvSpPr>
+        <p:spPr>
+          <a:xfrm>
+            <a:off x="502920" y="320040"/>
+            <a:ext cx="7772400" cy="411480"/>
+          </a:xfrm>
+          <a:prstGeom prst="rect">
+            <a:avLst/>
+          </a:prstGeom>
+          <a:noFill/>
+          <a:ln/>
+        </p:spPr>
+        <p:txBody>
+          <a:bodyPr wrap="square" rtlCol="0" anchor="ctr"/>
+          <a:lstStyle/>
+          <a:p>
+            <a:pPr indent="0" marL="0">
+              <a:buNone/>
+            </a:pPr>
+            <a:r>
+              <a:rPr lang="en-US" sz="2200" b="1" dirty="0">
+                <a:solidFill>
+                  <a:srgbClr val="1C2833"/>
+                </a:solidFill>
+              </a:rPr>
+              <a:t>Токены × главы</a:t>
+            </a:r>
+            <a:endParaRPr lang="en-US" sz="2200" dirty="0"/>
+          </a:p>
+        </p:txBody>
+      </p:sp>
+      <p:pic>
+        <p:nvPicPr>
+          <p:cNvPr id="3" name="Image 0" descr="/home/az/Code/bukivedenie/site/presentation/--13.png">    </p:cNvPr>
+          <p:cNvPicPr>
+            <a:picLocks noChangeAspect="1"/>
+          </p:cNvPicPr>
+          <p:nvPr/>
+        </p:nvPicPr>
+        <p:blipFill>
+          <a:blip r:embed="rId1"/>
+          <a:stretch>
+            <a:fillRect/>
+          </a:stretch>
+        </p:blipFill>
+        <p:spPr>
+          <a:xfrm>
+            <a:off x="502920" y="868680"/>
+            <a:ext cx="8138160" cy="4251960"/>
+          </a:xfrm>
+          <a:prstGeom prst="rect">
+            <a:avLst/>
+          </a:prstGeom>
+        </p:spPr>
+      </p:pic>
+      <p:sp>
+        <p:nvSpPr>
+          <p:cNvPr id="4" name="Text 1"/>
+          <p:cNvSpPr/>
+          <p:nvPr/>
+        </p:nvSpPr>
+        <p:spPr>
+          <a:xfrm>
+            <a:off x="502920" y="5257800"/>
+            <a:ext cx="8138160" cy="502920"/>
+          </a:xfrm>
+          <a:prstGeom prst="rect">
+            <a:avLst/>
+          </a:prstGeom>
+          <a:noFill/>
+          <a:ln/>
+        </p:spPr>
+        <p:txBody>
+          <a:bodyPr wrap="square" rtlCol="0" anchor="ctr"/>
+          <a:lstStyle/>
+          <a:p>
+            <a:pPr indent="0" marL="0">
+              <a:buNone/>
+            </a:pPr>
+            <a:r>
+              <a:rPr lang="en-US" sz="1100" dirty="0">
+                <a:solidFill>
+                  <a:srgbClr val="566573"/>
+                </a:solidFill>
+              </a:rPr>
+              <a:t>Тепловая карта показывает распределение частот ключевых токенов по главам и помогает увидеть тематические акценты.</a:t>
+            </a:r>
+            <a:endParaRPr lang="en-US" sz="1100" dirty="0"/>
+          </a:p>
+        </p:txBody>
+      </p:sp>
+    </p:spTree>
+  </p:cSld>
+  <p:clrMapOvr>
+    <a:masterClrMapping/>
+  </p:clrMapOvr>
+</p:sld>
+</file>
+
+<file path=ppt/slides/slide22.xml><?xml version="1.0" encoding="utf-8"?>
+<p:sld xmlns:a="http://schemas.openxmlformats.org/drawingml/2006/main" xmlns:r="http://schemas.openxmlformats.org/officeDocument/2006/relationships" xmlns:p="http://schemas.openxmlformats.org/presentationml/2006/main">
+  <p:cSld name="Slide 22">
+    <p:spTree>
+      <p:nvGrpSpPr>
+        <p:cNvPr id="1" name=""/>
+        <p:cNvGrpSpPr/>
+        <p:nvPr/>
+      </p:nvGrpSpPr>
+      <p:grpSpPr>
+        <a:xfrm>
+          <a:off x="0" y="0"/>
+          <a:ext cx="0" cy="0"/>
+          <a:chOff x="0" y="0"/>
+          <a:chExt cx="0" cy="0"/>
+        </a:xfrm>
+      </p:grpSpPr>
+      <p:sp>
+        <p:nvSpPr>
+          <p:cNvPr id="2" name="Text 0"/>
+          <p:cNvSpPr/>
+          <p:nvPr/>
+        </p:nvSpPr>
+        <p:spPr>
+          <a:xfrm>
+            <a:off x="502920" y="320040"/>
+            <a:ext cx="7772400" cy="411480"/>
+          </a:xfrm>
+          <a:prstGeom prst="rect">
+            <a:avLst/>
+          </a:prstGeom>
+          <a:noFill/>
+          <a:ln/>
+        </p:spPr>
+        <p:txBody>
+          <a:bodyPr wrap="square" rtlCol="0" anchor="ctr"/>
+          <a:lstStyle/>
+          <a:p>
+            <a:pPr indent="0" marL="0">
+              <a:buNone/>
+            </a:pPr>
+            <a:r>
+              <a:rPr lang="en-US" sz="2200" b="1" dirty="0">
+                <a:solidFill>
+                  <a:srgbClr val="1C2833"/>
+                </a:solidFill>
+              </a:rPr>
+              <a:t>Zipf: rank × frequency</a:t>
+            </a:r>
+            <a:endParaRPr lang="en-US" sz="2200" dirty="0"/>
+          </a:p>
+        </p:txBody>
+      </p:sp>
+      <p:pic>
+        <p:nvPicPr>
+          <p:cNvPr id="3" name="Image 0" descr="/home/az/Code/bukivedenie/site/presentation/zipf-rank-frequency-14.png">    </p:cNvPr>
+          <p:cNvPicPr>
+            <a:picLocks noChangeAspect="1"/>
+          </p:cNvPicPr>
+          <p:nvPr/>
+        </p:nvPicPr>
+        <p:blipFill>
+          <a:blip r:embed="rId1"/>
+          <a:stretch>
+            <a:fillRect/>
+          </a:stretch>
+        </p:blipFill>
+        <p:spPr>
+          <a:xfrm>
+            <a:off x="502920" y="868680"/>
+            <a:ext cx="8138160" cy="4251960"/>
+          </a:xfrm>
+          <a:prstGeom prst="rect">
+            <a:avLst/>
+          </a:prstGeom>
+        </p:spPr>
+      </p:pic>
+      <p:sp>
+        <p:nvSpPr>
+          <p:cNvPr id="4" name="Text 1"/>
+          <p:cNvSpPr/>
+          <p:nvPr/>
+        </p:nvSpPr>
+        <p:spPr>
+          <a:xfrm>
+            <a:off x="502920" y="5257800"/>
+            <a:ext cx="8138160" cy="502920"/>
+          </a:xfrm>
+          <a:prstGeom prst="rect">
+            <a:avLst/>
+          </a:prstGeom>
+          <a:noFill/>
+          <a:ln/>
+        </p:spPr>
+        <p:txBody>
+          <a:bodyPr wrap="square" rtlCol="0" anchor="ctr"/>
+          <a:lstStyle/>
+          <a:p>
+            <a:pPr indent="0" marL="0">
+              <a:buNone/>
+            </a:pPr>
+            <a:r>
+              <a:rPr lang="en-US" sz="1100" dirty="0">
+                <a:solidFill>
+                  <a:srgbClr val="566573"/>
+                </a:solidFill>
+              </a:rPr>
+              <a:t>Граф ранга и частоты токенов показывает закон Ципфа и помогает проверить качество токенизации.</a:t>
+            </a:r>
+            <a:endParaRPr lang="en-US" sz="1100" dirty="0"/>
+          </a:p>
+        </p:txBody>
+      </p:sp>
+    </p:spTree>
+  </p:cSld>
+  <p:clrMapOvr>
+    <a:masterClrMapping/>
+  </p:clrMapOvr>
+</p:sld>
+</file>
+
+<file path=ppt/slides/slide23.xml><?xml version="1.0" encoding="utf-8"?>
+<p:sld xmlns:a="http://schemas.openxmlformats.org/drawingml/2006/main" xmlns:r="http://schemas.openxmlformats.org/officeDocument/2006/relationships" xmlns:p="http://schemas.openxmlformats.org/presentationml/2006/main">
+  <p:cSld name="Slide 23">
+    <p:spTree>
+      <p:nvGrpSpPr>
+        <p:cNvPr id="1" name=""/>
+        <p:cNvGrpSpPr/>
+        <p:nvPr/>
+      </p:nvGrpSpPr>
+      <p:grpSpPr>
+        <a:xfrm>
+          <a:off x="0" y="0"/>
+          <a:ext cx="0" cy="0"/>
+          <a:chOff x="0" y="0"/>
+          <a:chExt cx="0" cy="0"/>
+        </a:xfrm>
+      </p:grpSpPr>
+      <p:sp>
+        <p:nvSpPr>
+          <p:cNvPr id="2" name="Text 0"/>
+          <p:cNvSpPr/>
+          <p:nvPr/>
+        </p:nvSpPr>
+        <p:spPr>
+          <a:xfrm>
+            <a:off x="502920" y="320040"/>
+            <a:ext cx="7772400" cy="411480"/>
+          </a:xfrm>
+          <a:prstGeom prst="rect">
+            <a:avLst/>
+          </a:prstGeom>
+          <a:noFill/>
+          <a:ln/>
+        </p:spPr>
+        <p:txBody>
+          <a:bodyPr wrap="square" rtlCol="0" anchor="ctr"/>
+          <a:lstStyle/>
+          <a:p>
+            <a:pPr indent="0" marL="0">
+              <a:buNone/>
+            </a:pPr>
+            <a:r>
+              <a:rPr lang="en-US" sz="2200" b="1" dirty="0">
+                <a:solidFill>
+                  <a:srgbClr val="1C2833"/>
+                </a:solidFill>
+              </a:rPr>
+              <a:t>Реализация и выводы</a:t>
+            </a:r>
+            <a:endParaRPr lang="en-US" sz="2200" dirty="0"/>
+          </a:p>
+        </p:txBody>
+      </p:sp>
+      <p:sp>
+        <p:nvSpPr>
+          <p:cNvPr id="3" name="Text 1"/>
+          <p:cNvSpPr/>
+          <p:nvPr/>
+        </p:nvSpPr>
+        <p:spPr>
+          <a:xfrm>
+            <a:off x="502920" y="3657600"/>
+            <a:ext cx="3886200" cy="2514600"/>
+          </a:xfrm>
+          <a:prstGeom prst="rect">
+            <a:avLst/>
+          </a:prstGeom>
+          <a:noFill/>
+          <a:ln/>
+        </p:spPr>
+        <p:txBody>
+          <a:bodyPr wrap="square" rtlCol="0" anchor="ctr"/>
+          <a:lstStyle/>
+          <a:p>
+            <a:pPr indent="0" marL="0">
+              <a:buNone/>
+            </a:pPr>
+            <a:r>
+              <a:rPr lang="en-US" sz="1100" dirty="0">
+                <a:solidFill>
+                  <a:srgbClr val="1C2833"/>
+                </a:solidFill>
+              </a:rPr>
+              <a:t>Проект показывает полный конвейер: от текста до визуализаций и статической витрины. Все артефакты хранятся в outputs/&amp;lt;book_id&amp;gt;/ и экспортируются в site/public/data/.</a:t>
+            </a:r>
+            <a:endParaRPr lang="en-US" sz="1100" dirty="0"/>
+          </a:p>
+          <a:p>
+            <a:pPr indent="0" marL="0">
+              <a:buNone/>
+            </a:pPr>
+            <a:endParaRPr lang="en-US" sz="1100" dirty="0"/>
+          </a:p>
+          <a:p>
+            <a:pPr indent="0" marL="0">
+              <a:buNone/>
+            </a:pPr>
+            <a:r>
+              <a:rPr lang="en-US" sz="1100" dirty="0">
+                <a:solidFill>
+                  <a:srgbClr val="1C2833"/>
+                </a:solidFill>
+              </a:rPr>
+              <a:t>Следующие шаги — улучшение выделения именованных сущностей, проверка персонажей, сравнение изданий и масштабирование на корпус.</a:t>
+            </a:r>
+            <a:endParaRPr lang="en-US" sz="1100" dirty="0"/>
+          </a:p>
+        </p:txBody>
+      </p:sp>
+    </p:spTree>
+  </p:cSld>
+  <p:clrMapOvr>
+    <a:masterClrMapping/>
+  </p:clrMapOvr>
+</p:sld>
+</file>
+
+<file path=ppt/slides/slide24.xml><?xml version="1.0" encoding="utf-8"?>
+<p:sld xmlns:a="http://schemas.openxmlformats.org/drawingml/2006/main" xmlns:r="http://schemas.openxmlformats.org/officeDocument/2006/relationships" xmlns:p="http://schemas.openxmlformats.org/presentationml/2006/main">
+  <p:cSld name="Slide 24">
+    <p:bg>
+      <p:bgPr>
+        <a:solidFill>
+          <a:srgbClr val="F6F8FC"/>
+        </a:solidFill>
+      </p:bgPr>
+    </p:bg>
+    <p:spTree>
+      <p:nvGrpSpPr>
+        <p:cNvPr id="1" name=""/>
+        <p:cNvGrpSpPr/>
+        <p:nvPr/>
+      </p:nvGrpSpPr>
+      <p:grpSpPr>
+        <a:xfrm>
+          <a:off x="0" y="0"/>
+          <a:ext cx="0" cy="0"/>
+          <a:chOff x="0" y="0"/>
+          <a:chExt cx="0" cy="0"/>
+        </a:xfrm>
+      </p:grpSpPr>
+      <p:sp>
+        <p:nvSpPr>
+          <p:cNvPr id="2" name="Text 0"/>
+          <p:cNvSpPr/>
+          <p:nvPr/>
+        </p:nvSpPr>
+        <p:spPr>
+          <a:xfrm>
+            <a:off x="914400" y="1371600"/>
+            <a:ext cx="6949440" cy="548640"/>
+          </a:xfrm>
+          <a:prstGeom prst="rect">
+            <a:avLst/>
+          </a:prstGeom>
+          <a:noFill/>
+          <a:ln/>
+        </p:spPr>
+        <p:txBody>
+          <a:bodyPr wrap="square" rtlCol="0" anchor="ctr"/>
+          <a:lstStyle/>
+          <a:p>
+            <a:pPr algn="ctr" indent="0" marL="0">
+              <a:buNone/>
+            </a:pPr>
+            <a:r>
+              <a:rPr lang="en-US" sz="2600" b="1" dirty="0">
+                <a:solidFill>
+                  <a:srgbClr val="0F2742"/>
+                </a:solidFill>
+              </a:rPr>
+              <a:t>Спасибо за внимание</a:t>
+            </a:r>
+            <a:endParaRPr lang="en-US" sz="2600" dirty="0"/>
+          </a:p>
+        </p:txBody>
+      </p:sp>
+      <p:sp>
+        <p:nvSpPr>
+          <p:cNvPr id="3" name="Text 1"/>
+          <p:cNvSpPr/>
+          <p:nvPr/>
+        </p:nvSpPr>
+        <p:spPr>
+          <a:xfrm>
+            <a:off x="914400" y="2057400"/>
+            <a:ext cx="6949440" cy="640080"/>
+          </a:xfrm>
+          <a:prstGeom prst="rect">
+            <a:avLst/>
+          </a:prstGeom>
+          <a:noFill/>
+          <a:ln/>
+        </p:spPr>
+        <p:txBody>
+          <a:bodyPr wrap="square" rtlCol="0" anchor="ctr"/>
+          <a:lstStyle/>
+          <a:p>
+            <a:pPr algn="ctr" indent="0" marL="0">
+              <a:buNone/>
+            </a:pPr>
+            <a:r>
+              <a:rPr lang="en-US" sz="1200" dirty="0">
+                <a:solidFill>
+                  <a:srgbClr val="52606D"/>
+                </a:solidFill>
+              </a:rPr>
+              <a:t>Вопросы, замечания и дополнительные материалы доступны в репозитории.</a:t>
+            </a:r>
+            <a:endParaRPr lang="en-US" sz="1200" dirty="0"/>
+          </a:p>
+        </p:txBody>
+      </p:sp>
+    </p:spTree>
+  </p:cSld>
+  <p:clrMapOvr>
+    <a:masterClrMapping/>
+  </p:clrMapOvr>
+</p:sld>
+</file>
+
+<file path=ppt/slides/slide3.xml><?xml version="1.0" encoding="utf-8"?>
+<p:sld xmlns:a="http://schemas.openxmlformats.org/drawingml/2006/main" xmlns:r="http://schemas.openxmlformats.org/officeDocument/2006/relationships" xmlns:p="http://schemas.openxmlformats.org/presentationml/2006/main">
+  <p:cSld name="Slide 3">
+    <p:spTree>
+      <p:nvGrpSpPr>
+        <p:cNvPr id="1" name=""/>
+        <p:cNvGrpSpPr/>
+        <p:nvPr/>
+      </p:nvGrpSpPr>
+      <p:grpSpPr>
+        <a:xfrm>
+          <a:off x="0" y="0"/>
+          <a:ext cx="0" cy="0"/>
+          <a:chOff x="0" y="0"/>
+          <a:chExt cx="0" cy="0"/>
+        </a:xfrm>
+      </p:grpSpPr>
+      <p:sp>
+        <p:nvSpPr>
+          <p:cNvPr id="2" name="Text 0"/>
+          <p:cNvSpPr/>
+          <p:nvPr/>
+        </p:nvSpPr>
+        <p:spPr>
+          <a:xfrm>
+            <a:off x="502920" y="320040"/>
+            <a:ext cx="7772400" cy="411480"/>
+          </a:xfrm>
+          <a:prstGeom prst="rect">
+            <a:avLst/>
+          </a:prstGeom>
+          <a:noFill/>
+          <a:ln/>
+        </p:spPr>
+        <p:txBody>
+          <a:bodyPr wrap="square" rtlCol="0" anchor="ctr"/>
+          <a:lstStyle/>
+          <a:p>
+            <a:pPr indent="0" marL="0">
+              <a:buNone/>
+            </a:pPr>
+            <a:r>
+              <a:rPr lang="en-US" sz="2200" b="1" dirty="0">
+                <a:solidFill>
+                  <a:srgbClr val="1C2833"/>
+                </a:solidFill>
+              </a:rPr>
+              <a:t>Введение</a:t>
+            </a:r>
+            <a:endParaRPr lang="en-US" sz="2200" dirty="0"/>
+          </a:p>
+        </p:txBody>
+      </p:sp>
+      <p:sp>
+        <p:nvSpPr>
+          <p:cNvPr id="3" name="Text 1"/>
+          <p:cNvSpPr/>
+          <p:nvPr/>
+        </p:nvSpPr>
+        <p:spPr>
+          <a:xfrm>
+            <a:off x="502920" y="3657600"/>
+            <a:ext cx="3886200" cy="2514600"/>
+          </a:xfrm>
+          <a:prstGeom prst="rect">
+            <a:avLst/>
+          </a:prstGeom>
+          <a:noFill/>
+          <a:ln/>
+        </p:spPr>
+        <p:txBody>
+          <a:bodyPr wrap="square" rtlCol="0" anchor="ctr"/>
+          <a:lstStyle/>
+          <a:p>
+            <a:pPr indent="0" marL="0">
+              <a:buNone/>
+            </a:pPr>
+            <a:r>
+              <a:rPr lang="en-US" sz="1100" dirty="0">
+                <a:solidFill>
+                  <a:srgbClr val="1C2833"/>
+                </a:solidFill>
+              </a:rPr>
+              <a:t>Цель: создать открытый и воспроизводимый способ анализа текста и построения визуализаций для крупного литературного произведения.</a:t>
+            </a:r>
+            <a:endParaRPr lang="en-US" sz="1100" dirty="0"/>
+          </a:p>
+          <a:p>
+            <a:pPr indent="0" marL="0">
+              <a:buNone/>
+            </a:pPr>
+            <a:endParaRPr lang="en-US" sz="1100" dirty="0"/>
+          </a:p>
+          <a:p>
+            <a:pPr indent="0" marL="0">
+              <a:buNone/>
+            </a:pPr>
+            <a:r>
+              <a:rPr lang="en-US" sz="1100" dirty="0">
+                <a:solidFill>
+                  <a:srgbClr val="1C2833"/>
+                </a:solidFill>
+              </a:rPr>
+              <a:t>Задачи:</a:t>
+            </a:r>
+            <a:endParaRPr lang="en-US" sz="1100" dirty="0"/>
+          </a:p>
+          <a:p>
+            <a:pPr indent="0" marL="0">
+              <a:buNone/>
+            </a:pPr>
+            <a:endParaRPr lang="en-US" sz="1100" dirty="0"/>
+          </a:p>
+          <a:p>
+            <a:pPr indent="0" marL="0">
+              <a:buNone/>
+            </a:pPr>
+            <a:r>
+              <a:rPr lang="en-US" sz="1100" dirty="0">
+                <a:solidFill>
+                  <a:srgbClr val="1C2833"/>
+                </a:solidFill>
+              </a:rPr>
+              <a:t>• разработать понятный формат визуализаций;</a:t>
+            </a:r>
+            <a:endParaRPr lang="en-US" sz="1100" dirty="0"/>
+          </a:p>
+          <a:p>
+            <a:pPr indent="0" marL="0">
+              <a:buNone/>
+            </a:pPr>
+            <a:endParaRPr lang="en-US" sz="1100" dirty="0"/>
+          </a:p>
+          <a:p>
+            <a:pPr indent="0" marL="0">
+              <a:buNone/>
+            </a:pPr>
+            <a:r>
+              <a:rPr lang="en-US" sz="1100" dirty="0">
+                <a:solidFill>
+                  <a:srgbClr val="1C2833"/>
+                </a:solidFill>
+              </a:rPr>
+              <a:t>• автоматизировать сбор и подготовку данных из текста;</a:t>
+            </a:r>
+            <a:endParaRPr lang="en-US" sz="1100" dirty="0"/>
+          </a:p>
+          <a:p>
+            <a:pPr indent="0" marL="0">
+              <a:buNone/>
+            </a:pPr>
+            <a:endParaRPr lang="en-US" sz="1100" dirty="0"/>
+          </a:p>
+          <a:p>
+            <a:pPr indent="0" marL="0">
+              <a:buNone/>
+            </a:pPr>
+            <a:r>
+              <a:rPr lang="en-US" sz="1100" dirty="0">
+                <a:solidFill>
+                  <a:srgbClr val="1C2833"/>
+                </a:solidFill>
+              </a:rPr>
+              <a:t>• построить наглядные визуализации;</a:t>
+            </a:r>
+            <a:endParaRPr lang="en-US" sz="1100" dirty="0"/>
+          </a:p>
+          <a:p>
+            <a:pPr indent="0" marL="0">
+              <a:buNone/>
+            </a:pPr>
+            <a:endParaRPr lang="en-US" sz="1100" dirty="0"/>
+          </a:p>
+          <a:p>
+            <a:pPr indent="0" marL="0">
+              <a:buNone/>
+            </a:pPr>
+            <a:r>
+              <a:rPr lang="en-US" sz="1100" dirty="0">
+                <a:solidFill>
+                  <a:srgbClr val="1C2833"/>
+                </a:solidFill>
+              </a:rPr>
+              <a:t>• опубликовать результат в открытом доступе.</a:t>
+            </a:r>
+            <a:endParaRPr lang="en-US" sz="1100" dirty="0"/>
+          </a:p>
+        </p:txBody>
+      </p:sp>
+    </p:spTree>
+  </p:cSld>
+  <p:clrMapOvr>
+    <a:masterClrMapping/>
+  </p:clrMapOvr>
+</p:sld>
+</file>
+
+<file path=ppt/slides/slide4.xml><?xml version="1.0" encoding="utf-8"?>
+<p:sld xmlns:a="http://schemas.openxmlformats.org/drawingml/2006/main" xmlns:r="http://schemas.openxmlformats.org/officeDocument/2006/relationships" xmlns:p="http://schemas.openxmlformats.org/presentationml/2006/main">
+  <p:cSld name="Slide 4">
+    <p:spTree>
+      <p:nvGrpSpPr>
+        <p:cNvPr id="1" name=""/>
+        <p:cNvGrpSpPr/>
+        <p:nvPr/>
+      </p:nvGrpSpPr>
+      <p:grpSpPr>
+        <a:xfrm>
+          <a:off x="0" y="0"/>
+          <a:ext cx="0" cy="0"/>
+          <a:chOff x="0" y="0"/>
+          <a:chExt cx="0" cy="0"/>
+        </a:xfrm>
+      </p:grpSpPr>
+      <p:sp>
+        <p:nvSpPr>
+          <p:cNvPr id="2" name="Text 0"/>
+          <p:cNvSpPr/>
+          <p:nvPr/>
+        </p:nvSpPr>
+        <p:spPr>
+          <a:xfrm>
+            <a:off x="502920" y="320040"/>
+            <a:ext cx="7772400" cy="411480"/>
+          </a:xfrm>
+          <a:prstGeom prst="rect">
+            <a:avLst/>
+          </a:prstGeom>
+          <a:noFill/>
+          <a:ln/>
+        </p:spPr>
+        <p:txBody>
+          <a:bodyPr wrap="square" rtlCol="0" anchor="ctr"/>
+          <a:lstStyle/>
+          <a:p>
+            <a:pPr indent="0" marL="0">
+              <a:buNone/>
+            </a:pPr>
+            <a:r>
+              <a:rPr lang="en-US" sz="2200" b="1" dirty="0">
+                <a:solidFill>
+                  <a:srgbClr val="1C2833"/>
+                </a:solidFill>
+              </a:rPr>
+              <a:t>Система разработки на телефоне</a:t>
+            </a:r>
+            <a:endParaRPr lang="en-US" sz="2200" dirty="0"/>
+          </a:p>
+        </p:txBody>
+      </p:sp>
+      <p:sp>
+        <p:nvSpPr>
+          <p:cNvPr id="3" name="Text 1"/>
+          <p:cNvSpPr/>
+          <p:nvPr/>
+        </p:nvSpPr>
+        <p:spPr>
+          <a:xfrm>
+            <a:off x="502920" y="3657600"/>
+            <a:ext cx="3886200" cy="2514600"/>
+          </a:xfrm>
+          <a:prstGeom prst="rect">
+            <a:avLst/>
+          </a:prstGeom>
+          <a:noFill/>
+          <a:ln/>
+        </p:spPr>
+        <p:txBody>
+          <a:bodyPr wrap="square" rtlCol="0" anchor="ctr"/>
+          <a:lstStyle/>
+          <a:p>
+            <a:pPr indent="0" marL="0">
+              <a:buNone/>
+            </a:pPr>
+            <a:r>
+              <a:rPr lang="en-US" sz="1100" dirty="0">
+                <a:solidFill>
+                  <a:srgbClr val="1C2833"/>
+                </a:solidFill>
+              </a:rPr>
+              <a:t>Инструменты:</a:t>
+            </a:r>
+            <a:endParaRPr lang="en-US" sz="1100" dirty="0"/>
+          </a:p>
+          <a:p>
+            <a:pPr indent="0" marL="0">
+              <a:buNone/>
+            </a:pPr>
+            <a:endParaRPr lang="en-US" sz="1100" dirty="0"/>
+          </a:p>
+          <a:p>
+            <a:pPr indent="0" marL="0">
+              <a:buNone/>
+            </a:pPr>
+            <a:r>
+              <a:rPr lang="en-US" sz="1100" dirty="0">
+                <a:solidFill>
+                  <a:srgbClr val="1C2833"/>
+                </a:solidFill>
+              </a:rPr>
+              <a:t>• Markor — черновики и заметки.</a:t>
+            </a:r>
+            <a:endParaRPr lang="en-US" sz="1100" dirty="0"/>
+          </a:p>
+          <a:p>
+            <a:pPr indent="0" marL="0">
+              <a:buNone/>
+            </a:pPr>
+            <a:endParaRPr lang="en-US" sz="1100" dirty="0"/>
+          </a:p>
+          <a:p>
+            <a:pPr indent="0" marL="0">
+              <a:buNone/>
+            </a:pPr>
+            <a:r>
+              <a:rPr lang="en-US" sz="1100" dirty="0">
+                <a:solidFill>
+                  <a:srgbClr val="1C2833"/>
+                </a:solidFill>
+              </a:rPr>
+              <a:t>• Termux — рабочая среда на Android.</a:t>
+            </a:r>
+            <a:endParaRPr lang="en-US" sz="1100" dirty="0"/>
+          </a:p>
+          <a:p>
+            <a:pPr indent="0" marL="0">
+              <a:buNone/>
+            </a:pPr>
+            <a:endParaRPr lang="en-US" sz="1100" dirty="0"/>
+          </a:p>
+          <a:p>
+            <a:pPr indent="0" marL="0">
+              <a:buNone/>
+            </a:pPr>
+            <a:r>
+              <a:rPr lang="en-US" sz="1100" dirty="0">
+                <a:solidFill>
+                  <a:srgbClr val="1C2833"/>
+                </a:solidFill>
+              </a:rPr>
+              <a:t>• GitHub — хранение и публикация проекта.</a:t>
+            </a:r>
+            <a:endParaRPr lang="en-US" sz="1100" dirty="0"/>
+          </a:p>
+          <a:p>
+            <a:pPr indent="0" marL="0">
+              <a:buNone/>
+            </a:pPr>
+            <a:endParaRPr lang="en-US" sz="1100" dirty="0"/>
+          </a:p>
+          <a:p>
+            <a:pPr indent="0" marL="0">
+              <a:buNone/>
+            </a:pPr>
+            <a:r>
+              <a:rPr lang="en-US" sz="1100" dirty="0">
+                <a:solidFill>
+                  <a:srgbClr val="1C2833"/>
+                </a:solidFill>
+              </a:rPr>
+              <a:t>• PI — помощник при написании кода.</a:t>
+            </a:r>
+            <a:endParaRPr lang="en-US" sz="1100" dirty="0"/>
+          </a:p>
+          <a:p>
+            <a:pPr indent="0" marL="0">
+              <a:buNone/>
+            </a:pPr>
+            <a:endParaRPr lang="en-US" sz="1100" dirty="0"/>
+          </a:p>
+          <a:p>
+            <a:pPr indent="0" marL="0">
+              <a:buNone/>
+            </a:pPr>
+            <a:r>
+              <a:rPr lang="en-US" sz="1100" dirty="0">
+                <a:solidFill>
+                  <a:srgbClr val="1C2833"/>
+                </a:solidFill>
+              </a:rPr>
+              <a:t>• Python — обработка текста и данных.</a:t>
+            </a:r>
+            <a:endParaRPr lang="en-US" sz="1100" dirty="0"/>
+          </a:p>
+          <a:p>
+            <a:pPr indent="0" marL="0">
+              <a:buNone/>
+            </a:pPr>
+            <a:endParaRPr lang="en-US" sz="1100" dirty="0"/>
+          </a:p>
+          <a:p>
+            <a:pPr indent="0" marL="0">
+              <a:buNone/>
+            </a:pPr>
+            <a:r>
+              <a:rPr lang="en-US" sz="1100" dirty="0">
+                <a:solidFill>
+                  <a:srgbClr val="1C2833"/>
+                </a:solidFill>
+              </a:rPr>
+              <a:t>• JS — веб-витрина визуализаций.</a:t>
+            </a:r>
+            <a:endParaRPr lang="en-US" sz="1100" dirty="0"/>
+          </a:p>
+        </p:txBody>
+      </p:sp>
+    </p:spTree>
+  </p:cSld>
+  <p:clrMapOvr>
+    <a:masterClrMapping/>
+  </p:clrMapOvr>
+</p:sld>
+</file>
+
+<file path=ppt/slides/slide5.xml><?xml version="1.0" encoding="utf-8"?>
+<p:sld xmlns:a="http://schemas.openxmlformats.org/drawingml/2006/main" xmlns:r="http://schemas.openxmlformats.org/officeDocument/2006/relationships" xmlns:p="http://schemas.openxmlformats.org/presentationml/2006/main">
+  <p:cSld name="Slide 5">
+    <p:spTree>
+      <p:nvGrpSpPr>
+        <p:cNvPr id="1" name=""/>
+        <p:cNvGrpSpPr/>
+        <p:nvPr/>
+      </p:nvGrpSpPr>
+      <p:grpSpPr>
+        <a:xfrm>
+          <a:off x="0" y="0"/>
+          <a:ext cx="0" cy="0"/>
+          <a:chOff x="0" y="0"/>
+          <a:chExt cx="0" cy="0"/>
+        </a:xfrm>
+      </p:grpSpPr>
+      <p:sp>
+        <p:nvSpPr>
+          <p:cNvPr id="2" name="Text 0"/>
+          <p:cNvSpPr/>
+          <p:nvPr/>
+        </p:nvSpPr>
+        <p:spPr>
+          <a:xfrm>
+            <a:off x="502920" y="320040"/>
+            <a:ext cx="7772400" cy="411480"/>
+          </a:xfrm>
+          <a:prstGeom prst="rect">
+            <a:avLst/>
+          </a:prstGeom>
+          <a:noFill/>
+          <a:ln/>
+        </p:spPr>
+        <p:txBody>
+          <a:bodyPr wrap="square" rtlCol="0" anchor="ctr"/>
+          <a:lstStyle/>
+          <a:p>
+            <a:pPr indent="0" marL="0">
+              <a:buNone/>
+            </a:pPr>
+            <a:r>
+              <a:rPr lang="en-US" sz="2200" b="1" dirty="0">
+                <a:solidFill>
+                  <a:srgbClr val="1C2833"/>
+                </a:solidFill>
+              </a:rPr>
+              <a:t>Сбор данных</a:t>
+            </a:r>
+            <a:endParaRPr lang="en-US" sz="2200" dirty="0"/>
+          </a:p>
+        </p:txBody>
+      </p:sp>
+      <p:sp>
+        <p:nvSpPr>
+          <p:cNvPr id="3" name="Text 1"/>
+          <p:cNvSpPr/>
+          <p:nvPr/>
+        </p:nvSpPr>
+        <p:spPr>
+          <a:xfrm>
+            <a:off x="502920" y="3657600"/>
+            <a:ext cx="3886200" cy="2514600"/>
+          </a:xfrm>
+          <a:prstGeom prst="rect">
+            <a:avLst/>
+          </a:prstGeom>
+          <a:noFill/>
+          <a:ln/>
+        </p:spPr>
+        <p:txBody>
+          <a:bodyPr wrap="square" rtlCol="0" anchor="ctr"/>
+          <a:lstStyle/>
+          <a:p>
+            <a:pPr indent="0" marL="0">
+              <a:buNone/>
+            </a:pPr>
+            <a:r>
+              <a:rPr lang="en-US" sz="1100" dirty="0">
+                <a:solidFill>
+                  <a:srgbClr val="1C2833"/>
+                </a:solidFill>
+              </a:rPr>
+              <a:t>Пайплайн:</a:t>
+            </a:r>
+            <a:endParaRPr lang="en-US" sz="1100" dirty="0"/>
+          </a:p>
+          <a:p>
+            <a:pPr indent="0" marL="0">
+              <a:buNone/>
+            </a:pPr>
+            <a:endParaRPr lang="en-US" sz="1100" dirty="0"/>
+          </a:p>
+          <a:p>
+            <a:pPr indent="0" marL="0">
+              <a:buNone/>
+            </a:pPr>
+            <a:r>
+              <a:rPr lang="en-US" sz="1100" dirty="0">
+                <a:solidFill>
+                  <a:srgbClr val="1C2833"/>
+                </a:solidFill>
+              </a:rPr>
+              <a:t>• нормализация текста (UTF-8, единые кавычки и тире);</a:t>
+            </a:r>
+            <a:endParaRPr lang="en-US" sz="1100" dirty="0"/>
+          </a:p>
+          <a:p>
+            <a:pPr indent="0" marL="0">
+              <a:buNone/>
+            </a:pPr>
+            <a:endParaRPr lang="en-US" sz="1100" dirty="0"/>
+          </a:p>
+          <a:p>
+            <a:pPr indent="0" marL="0">
+              <a:buNone/>
+            </a:pPr>
+            <a:r>
+              <a:rPr lang="en-US" sz="1100" dirty="0">
+                <a:solidFill>
+                  <a:srgbClr val="1C2833"/>
+                </a:solidFill>
+              </a:rPr>
+              <a:t>• разбиение на токены;</a:t>
+            </a:r>
+            <a:endParaRPr lang="en-US" sz="1100" dirty="0"/>
+          </a:p>
+          <a:p>
+            <a:pPr indent="0" marL="0">
+              <a:buNone/>
+            </a:pPr>
+            <a:endParaRPr lang="en-US" sz="1100" dirty="0"/>
+          </a:p>
+          <a:p>
+            <a:pPr indent="0" marL="0">
+              <a:buNone/>
+            </a:pPr>
+            <a:r>
+              <a:rPr lang="en-US" sz="1100" dirty="0">
+                <a:solidFill>
+                  <a:srgbClr val="1C2833"/>
+                </a:solidFill>
+              </a:rPr>
+              <a:t>• разбиение на предложения, абзацы, главы и диалоги;</a:t>
+            </a:r>
+            <a:endParaRPr lang="en-US" sz="1100" dirty="0"/>
+          </a:p>
+          <a:p>
+            <a:pPr indent="0" marL="0">
+              <a:buNone/>
+            </a:pPr>
+            <a:endParaRPr lang="en-US" sz="1100" dirty="0"/>
+          </a:p>
+          <a:p>
+            <a:pPr indent="0" marL="0">
+              <a:buNone/>
+            </a:pPr>
+            <a:r>
+              <a:rPr lang="en-US" sz="1100" dirty="0">
+                <a:solidFill>
+                  <a:srgbClr val="1C2833"/>
+                </a:solidFill>
+              </a:rPr>
+              <a:t>• лемматизация слов;</a:t>
+            </a:r>
+            <a:endParaRPr lang="en-US" sz="1100" dirty="0"/>
+          </a:p>
+          <a:p>
+            <a:pPr indent="0" marL="0">
+              <a:buNone/>
+            </a:pPr>
+            <a:endParaRPr lang="en-US" sz="1100" dirty="0"/>
+          </a:p>
+          <a:p>
+            <a:pPr indent="0" marL="0">
+              <a:buNone/>
+            </a:pPr>
+            <a:r>
+              <a:rPr lang="en-US" sz="1100" dirty="0">
+                <a:solidFill>
+                  <a:srgbClr val="1C2833"/>
+                </a:solidFill>
+              </a:rPr>
+              <a:t>• выделение имен собственных и их связей в тексте;</a:t>
+            </a:r>
+            <a:endParaRPr lang="en-US" sz="1100" dirty="0"/>
+          </a:p>
+          <a:p>
+            <a:pPr indent="0" marL="0">
+              <a:buNone/>
+            </a:pPr>
+            <a:endParaRPr lang="en-US" sz="1100" dirty="0"/>
+          </a:p>
+          <a:p>
+            <a:pPr indent="0" marL="0">
+              <a:buNone/>
+            </a:pPr>
+            <a:r>
+              <a:rPr lang="en-US" sz="1100" dirty="0">
+                <a:solidFill>
+                  <a:srgbClr val="1C2833"/>
+                </a:solidFill>
+              </a:rPr>
+              <a:t>• подсчет метрик сложности и тональности;</a:t>
+            </a:r>
+            <a:endParaRPr lang="en-US" sz="1100" dirty="0"/>
+          </a:p>
+          <a:p>
+            <a:pPr indent="0" marL="0">
+              <a:buNone/>
+            </a:pPr>
+            <a:endParaRPr lang="en-US" sz="1100" dirty="0"/>
+          </a:p>
+          <a:p>
+            <a:pPr indent="0" marL="0">
+              <a:buNone/>
+            </a:pPr>
+            <a:r>
+              <a:rPr lang="en-US" sz="1100" dirty="0">
+                <a:solidFill>
+                  <a:srgbClr val="1C2833"/>
+                </a:solidFill>
+              </a:rPr>
+              <a:t>• вывод данных в таблицы JSON и CSV.</a:t>
+            </a:r>
+            <a:endParaRPr lang="en-US" sz="1100" dirty="0"/>
+          </a:p>
+        </p:txBody>
+      </p:sp>
+    </p:spTree>
+  </p:cSld>
+  <p:clrMapOvr>
+    <a:masterClrMapping/>
+  </p:clrMapOvr>
+</p:sld>
+</file>
+
+<file path=ppt/slides/slide6.xml><?xml version="1.0" encoding="utf-8"?>
+<p:sld xmlns:a="http://schemas.openxmlformats.org/drawingml/2006/main" xmlns:r="http://schemas.openxmlformats.org/officeDocument/2006/relationships" xmlns:p="http://schemas.openxmlformats.org/presentationml/2006/main">
+  <p:cSld name="Slide 6">
+    <p:spTree>
+      <p:nvGrpSpPr>
+        <p:cNvPr id="1" name=""/>
+        <p:cNvGrpSpPr/>
+        <p:nvPr/>
+      </p:nvGrpSpPr>
+      <p:grpSpPr>
+        <a:xfrm>
+          <a:off x="0" y="0"/>
+          <a:ext cx="0" cy="0"/>
+          <a:chOff x="0" y="0"/>
+          <a:chExt cx="0" cy="0"/>
+        </a:xfrm>
+      </p:grpSpPr>
+      <p:sp>
+        <p:nvSpPr>
+          <p:cNvPr id="2" name="Text 0"/>
+          <p:cNvSpPr/>
+          <p:nvPr/>
+        </p:nvSpPr>
+        <p:spPr>
+          <a:xfrm>
+            <a:off x="502920" y="320040"/>
+            <a:ext cx="7772400" cy="411480"/>
+          </a:xfrm>
+          <a:prstGeom prst="rect">
+            <a:avLst/>
+          </a:prstGeom>
+          <a:noFill/>
+          <a:ln/>
+        </p:spPr>
+        <p:txBody>
+          <a:bodyPr wrap="square" rtlCol="0" anchor="ctr"/>
+          <a:lstStyle/>
+          <a:p>
+            <a:pPr indent="0" marL="0">
+              <a:buNone/>
+            </a:pPr>
+            <a:r>
+              <a:rPr lang="en-US" sz="2200" b="1" dirty="0">
+                <a:solidFill>
+                  <a:srgbClr val="1C2833"/>
+                </a:solidFill>
+              </a:rPr>
+              <a:t>Визуализация</a:t>
+            </a:r>
+            <a:endParaRPr lang="en-US" sz="2200" dirty="0"/>
+          </a:p>
+        </p:txBody>
+      </p:sp>
+      <p:sp>
+        <p:nvSpPr>
+          <p:cNvPr id="3" name="Text 1"/>
+          <p:cNvSpPr/>
+          <p:nvPr/>
+        </p:nvSpPr>
+        <p:spPr>
+          <a:xfrm>
+            <a:off x="502920" y="3657600"/>
+            <a:ext cx="3886200" cy="2514600"/>
+          </a:xfrm>
+          <a:prstGeom prst="rect">
+            <a:avLst/>
+          </a:prstGeom>
+          <a:noFill/>
+          <a:ln/>
+        </p:spPr>
+        <p:txBody>
+          <a:bodyPr wrap="square" rtlCol="0" anchor="ctr"/>
+          <a:lstStyle/>
+          <a:p>
+            <a:pPr indent="0" marL="0">
+              <a:buNone/>
+            </a:pPr>
+            <a:r>
+              <a:rPr lang="en-US" sz="1100" dirty="0">
+                <a:solidFill>
+                  <a:srgbClr val="1C2833"/>
+                </a:solidFill>
+              </a:rPr>
+              <a:t>• Визуализации сделаны на JavaScript без API и внешних серверов.</a:t>
+            </a:r>
+            <a:endParaRPr lang="en-US" sz="1100" dirty="0"/>
+          </a:p>
+          <a:p>
+            <a:pPr indent="0" marL="0">
+              <a:buNone/>
+            </a:pPr>
+            <a:endParaRPr lang="en-US" sz="1100" dirty="0"/>
+          </a:p>
+          <a:p>
+            <a:pPr indent="0" marL="0">
+              <a:buNone/>
+            </a:pPr>
+            <a:r>
+              <a:rPr lang="en-US" sz="1100" dirty="0">
+                <a:solidFill>
+                  <a:srgbClr val="1C2833"/>
+                </a:solidFill>
+              </a:rPr>
+              <a:t>• Проект выложен в GitHub и запускается локально как статический сайт.</a:t>
+            </a:r>
+            <a:endParaRPr lang="en-US" sz="1100" dirty="0"/>
+          </a:p>
+        </p:txBody>
+      </p:sp>
+    </p:spTree>
+  </p:cSld>
+  <p:clrMapOvr>
+    <a:masterClrMapping/>
+  </p:clrMapOvr>
+</p:sld>
+</file>
+
+<file path=ppt/slides/slide7.xml><?xml version="1.0" encoding="utf-8"?>
+<p:sld xmlns:a="http://schemas.openxmlformats.org/drawingml/2006/main" xmlns:r="http://schemas.openxmlformats.org/officeDocument/2006/relationships" xmlns:p="http://schemas.openxmlformats.org/presentationml/2006/main">
+  <p:cSld name="Slide 7">
+    <p:spTree>
+      <p:nvGrpSpPr>
+        <p:cNvPr id="1" name=""/>
+        <p:cNvGrpSpPr/>
+        <p:nvPr/>
+      </p:nvGrpSpPr>
+      <p:grpSpPr>
+        <a:xfrm>
+          <a:off x="0" y="0"/>
+          <a:ext cx="0" cy="0"/>
+          <a:chOff x="0" y="0"/>
+          <a:chExt cx="0" cy="0"/>
+        </a:xfrm>
+      </p:grpSpPr>
+      <p:sp>
+        <p:nvSpPr>
+          <p:cNvPr id="2" name="Text 0"/>
+          <p:cNvSpPr/>
+          <p:nvPr/>
+        </p:nvSpPr>
+        <p:spPr>
+          <a:xfrm>
+            <a:off x="502920" y="320040"/>
+            <a:ext cx="7772400" cy="411480"/>
+          </a:xfrm>
+          <a:prstGeom prst="rect">
+            <a:avLst/>
+          </a:prstGeom>
+          <a:noFill/>
+          <a:ln/>
+        </p:spPr>
+        <p:txBody>
+          <a:bodyPr wrap="square" rtlCol="0" anchor="ctr"/>
+          <a:lstStyle/>
+          <a:p>
+            <a:pPr indent="0" marL="0">
+              <a:buNone/>
+            </a:pPr>
+            <a:r>
+              <a:rPr lang="en-US" sz="2200" b="1" dirty="0">
+                <a:solidFill>
+                  <a:srgbClr val="1C2833"/>
+                </a:solidFill>
+              </a:rPr>
+              <a:t>Реализация кода при помощи агента.</a:t>
+            </a:r>
+            <a:endParaRPr lang="en-US" sz="2200" dirty="0"/>
+          </a:p>
+        </p:txBody>
+      </p:sp>
+      <p:sp>
+        <p:nvSpPr>
+          <p:cNvPr id="3" name="Text 1"/>
+          <p:cNvSpPr/>
+          <p:nvPr/>
+        </p:nvSpPr>
+        <p:spPr>
+          <a:xfrm>
+            <a:off x="502920" y="3657600"/>
+            <a:ext cx="3886200" cy="2514600"/>
+          </a:xfrm>
+          <a:prstGeom prst="rect">
+            <a:avLst/>
+          </a:prstGeom>
+          <a:noFill/>
+          <a:ln/>
+        </p:spPr>
+        <p:txBody>
+          <a:bodyPr wrap="square" rtlCol="0" anchor="ctr"/>
+          <a:lstStyle/>
+          <a:p>
+            <a:pPr indent="0" marL="0">
+              <a:buNone/>
+            </a:pPr>
+            <a:r>
+              <a:rPr lang="en-US" sz="1100" dirty="0">
+                <a:solidFill>
+                  <a:srgbClr val="1C2833"/>
+                </a:solidFill>
+              </a:rPr>
+              <a:t>В разработке я использовала агента PI.</a:t>
+            </a:r>
+            <a:endParaRPr lang="en-US" sz="1100" dirty="0"/>
+          </a:p>
+          <a:p>
+            <a:pPr indent="0" marL="0">
+              <a:buNone/>
+            </a:pPr>
+            <a:endParaRPr lang="en-US" sz="1100" dirty="0"/>
+          </a:p>
+          <a:p>
+            <a:pPr indent="0" marL="0">
+              <a:buNone/>
+            </a:pPr>
+            <a:r>
+              <a:rPr lang="en-US" sz="1100" dirty="0">
+                <a:solidFill>
+                  <a:srgbClr val="1C2833"/>
+                </a:solidFill>
+              </a:rPr>
+              <a:t>• Ему нужна максимально подробная спецификация.</a:t>
+            </a:r>
+            <a:endParaRPr lang="en-US" sz="1100" dirty="0"/>
+          </a:p>
+          <a:p>
+            <a:pPr indent="0" marL="0">
+              <a:buNone/>
+            </a:pPr>
+            <a:endParaRPr lang="en-US" sz="1100" dirty="0"/>
+          </a:p>
+          <a:p>
+            <a:pPr indent="0" marL="0">
+              <a:buNone/>
+            </a:pPr>
+            <a:r>
+              <a:rPr lang="en-US" sz="1100" dirty="0">
+                <a:solidFill>
+                  <a:srgbClr val="1C2833"/>
+                </a:solidFill>
+              </a:rPr>
+              <a:t>• Он быстро пишет большой объем кода.</a:t>
+            </a:r>
+            <a:endParaRPr lang="en-US" sz="1100" dirty="0"/>
+          </a:p>
+          <a:p>
+            <a:pPr indent="0" marL="0">
+              <a:buNone/>
+            </a:pPr>
+            <a:endParaRPr lang="en-US" sz="1100" dirty="0"/>
+          </a:p>
+          <a:p>
+            <a:pPr indent="0" marL="0">
+              <a:buNone/>
+            </a:pPr>
+            <a:r>
+              <a:rPr lang="en-US" sz="1100" dirty="0">
+                <a:solidFill>
+                  <a:srgbClr val="1C2833"/>
+                </a:solidFill>
+              </a:rPr>
+              <a:t>• Его нужно внимательно читать, чтобы не накапливать когнитивный долг.</a:t>
+            </a:r>
+            <a:endParaRPr lang="en-US" sz="1100" dirty="0"/>
+          </a:p>
+          <a:p>
+            <a:pPr indent="0" marL="0">
+              <a:buNone/>
+            </a:pPr>
+            <a:endParaRPr lang="en-US" sz="1100" dirty="0"/>
+          </a:p>
+          <a:p>
+            <a:pPr indent="0" marL="0">
+              <a:buNone/>
+            </a:pPr>
+            <a:r>
+              <a:rPr lang="en-US" sz="1100" dirty="0">
+                <a:solidFill>
+                  <a:srgbClr val="1C2833"/>
+                </a:solidFill>
+              </a:rPr>
+              <a:t>• Он склонен усложнять структуру репозитория.</a:t>
+            </a:r>
+            <a:endParaRPr lang="en-US" sz="1100" dirty="0"/>
+          </a:p>
+          <a:p>
+            <a:pPr indent="0" marL="0">
+              <a:buNone/>
+            </a:pPr>
+            <a:endParaRPr lang="en-US" sz="1100" dirty="0"/>
+          </a:p>
+          <a:p>
+            <a:pPr indent="0" marL="0">
+              <a:buNone/>
+            </a:pPr>
+            <a:r>
+              <a:rPr lang="en-US" sz="1100" dirty="0">
+                <a:solidFill>
+                  <a:srgbClr val="1C2833"/>
+                </a:solidFill>
+              </a:rPr>
+              <a:t>• После генерации нужен рефакторинг.</a:t>
+            </a:r>
+            <a:endParaRPr lang="en-US" sz="1100" dirty="0"/>
+          </a:p>
+        </p:txBody>
+      </p:sp>
+    </p:spTree>
+  </p:cSld>
+  <p:clrMapOvr>
+    <a:masterClrMapping/>
+  </p:clrMapOvr>
+</p:sld>
+</file>
+
+<file path=ppt/slides/slide8.xml><?xml version="1.0" encoding="utf-8"?>
+<p:sld xmlns:a="http://schemas.openxmlformats.org/drawingml/2006/main" xmlns:r="http://schemas.openxmlformats.org/officeDocument/2006/relationships" xmlns:p="http://schemas.openxmlformats.org/presentationml/2006/main">
+  <p:cSld name="Slide 8">
+    <p:bg>
+      <p:bgPr>
+        <a:solidFill>
+          <a:srgbClr val="F6F8FC"/>
+        </a:solidFill>
+      </p:bgPr>
+    </p:bg>
+    <p:spTree>
+      <p:nvGrpSpPr>
+        <p:cNvPr id="1" name=""/>
+        <p:cNvGrpSpPr/>
+        <p:nvPr/>
+      </p:nvGrpSpPr>
+      <p:grpSpPr>
+        <a:xfrm>
+          <a:off x="0" y="0"/>
+          <a:ext cx="0" cy="0"/>
+          <a:chOff x="0" y="0"/>
+          <a:chExt cx="0" cy="0"/>
+        </a:xfrm>
+      </p:grpSpPr>
+      <p:sp>
+        <p:nvSpPr>
+          <p:cNvPr id="2" name="Text 0"/>
+          <p:cNvSpPr/>
+          <p:nvPr/>
+        </p:nvSpPr>
+        <p:spPr>
+          <a:xfrm>
+            <a:off x="914400" y="1371600"/>
+            <a:ext cx="6949440" cy="548640"/>
+          </a:xfrm>
+          <a:prstGeom prst="rect">
+            <a:avLst/>
+          </a:prstGeom>
+          <a:noFill/>
+          <a:ln/>
+        </p:spPr>
+        <p:txBody>
+          <a:bodyPr wrap="square" rtlCol="0" anchor="ctr"/>
+          <a:lstStyle/>
+          <a:p>
+            <a:pPr algn="ctr" indent="0" marL="0">
+              <a:buNone/>
+            </a:pPr>
+            <a:r>
+              <a:rPr lang="en-US" sz="2600" b="1" dirty="0">
+                <a:solidFill>
+                  <a:srgbClr val="0F2742"/>
+                </a:solidFill>
+              </a:rPr>
+              <a:t>Спасибо за внимание.</a:t>
+            </a:r>
+            <a:endParaRPr lang="en-US" sz="2600" dirty="0"/>
+          </a:p>
+        </p:txBody>
+      </p:sp>
+      <p:sp>
+        <p:nvSpPr>
+          <p:cNvPr id="3" name="Text 1"/>
+          <p:cNvSpPr/>
+          <p:nvPr/>
+        </p:nvSpPr>
+        <p:spPr>
+          <a:xfrm>
+            <a:off x="914400" y="2057400"/>
+            <a:ext cx="6949440" cy="640080"/>
+          </a:xfrm>
+          <a:prstGeom prst="rect">
+            <a:avLst/>
+          </a:prstGeom>
+          <a:noFill/>
+          <a:ln/>
+        </p:spPr>
+        <p:txBody>
+          <a:bodyPr wrap="square" rtlCol="0" anchor="ctr"/>
+          <a:lstStyle/>
+          <a:p>
+            <a:pPr algn="ctr" indent="0" marL="0">
+              <a:buNone/>
+            </a:pPr>
+            <a:r>
+              <a:rPr lang="en-US" sz="1200" dirty="0">
+                <a:solidFill>
+                  <a:srgbClr val="52606D"/>
+                </a:solidFill>
+              </a:rPr>
+              <a:t>Дополнительные материалы, визуализации и код доступны в репозитории.</a:t>
+            </a:r>
+            <a:endParaRPr lang="en-US" sz="1200" dirty="0"/>
+          </a:p>
+        </p:txBody>
+      </p:sp>
+    </p:spTree>
+  </p:cSld>
+  <p:clrMapOvr>
+    <a:masterClrMapping/>
+  </p:clrMapOvr>
+</p:sld>
+</file>
+
+<file path=ppt/slides/slide9.xml><?xml version="1.0" encoding="utf-8"?>
+<p:sld xmlns:a="http://schemas.openxmlformats.org/drawingml/2006/main" xmlns:r="http://schemas.openxmlformats.org/officeDocument/2006/relationships" xmlns:p="http://schemas.openxmlformats.org/presentationml/2006/main">
+  <p:cSld name="Slide 9">
+    <p:spTree>
+      <p:nvGrpSpPr>
+        <p:cNvPr id="1" name=""/>
+        <p:cNvGrpSpPr/>
+        <p:nvPr/>
+      </p:nvGrpSpPr>
+      <p:grpSpPr>
+        <a:xfrm>
+          <a:off x="0" y="0"/>
+          <a:ext cx="0" cy="0"/>
+          <a:chOff x="0" y="0"/>
+          <a:chExt cx="0" cy="0"/>
+        </a:xfrm>
+      </p:grpSpPr>
+      <p:sp>
+        <p:nvSpPr>
+          <p:cNvPr id="2" name="Text 0"/>
+          <p:cNvSpPr/>
+          <p:nvPr/>
+        </p:nvSpPr>
+        <p:spPr>
+          <a:xfrm>
+            <a:off x="502920" y="320040"/>
+            <a:ext cx="7772400" cy="411480"/>
+          </a:xfrm>
+          <a:prstGeom prst="rect">
+            <a:avLst/>
+          </a:prstGeom>
+          <a:noFill/>
+          <a:ln/>
+        </p:spPr>
+        <p:txBody>
+          <a:bodyPr wrap="square" rtlCol="0" anchor="ctr"/>
+          <a:lstStyle/>
+          <a:p>
+            <a:pPr indent="0" marL="0">
+              <a:buNone/>
+            </a:pPr>
+            <a:r>
+              <a:rPr lang="en-US" sz="2200" b="1" dirty="0">
+                <a:solidFill>
+                  <a:srgbClr val="1C2833"/>
+                </a:solidFill>
+              </a:rPr>
+              <a:t>Частотное ядро (frequency core)</a:t>
+            </a:r>
+            <a:endParaRPr lang="en-US" sz="2200" dirty="0"/>
+          </a:p>
+        </p:txBody>
+      </p:sp>
+      <p:pic>
+        <p:nvPicPr>
+          <p:cNvPr id="3" name="Image 0" descr="/home/az/Code/bukivedenie/site/presentation/--01.png">    </p:cNvPr>
+          <p:cNvPicPr>
+            <a:picLocks noChangeAspect="1"/>
+          </p:cNvPicPr>
+          <p:nvPr/>
+        </p:nvPicPr>
+        <p:blipFill>
+          <a:blip r:embed="rId1"/>
+          <a:stretch>
+            <a:fillRect/>
+          </a:stretch>
+        </p:blipFill>
+        <p:spPr>
+          <a:xfrm>
+            <a:off x="502920" y="868680"/>
+            <a:ext cx="8138160" cy="4251960"/>
+          </a:xfrm>
+          <a:prstGeom prst="rect">
+            <a:avLst/>
+          </a:prstGeom>
+        </p:spPr>
+      </p:pic>
+      <p:sp>
+        <p:nvSpPr>
+          <p:cNvPr id="4" name="Text 1"/>
+          <p:cNvSpPr/>
+          <p:nvPr/>
+        </p:nvSpPr>
+        <p:spPr>
+          <a:xfrm>
+            <a:off x="502920" y="5257800"/>
+            <a:ext cx="8138160" cy="502920"/>
+          </a:xfrm>
+          <a:prstGeom prst="rect">
+            <a:avLst/>
+          </a:prstGeom>
+          <a:noFill/>
+          <a:ln/>
+        </p:spPr>
+        <p:txBody>
+          <a:bodyPr wrap="square" rtlCol="0" anchor="ctr"/>
+          <a:lstStyle/>
+          <a:p>
+            <a:pPr indent="0" marL="0">
+              <a:buNone/>
+            </a:pPr>
+            <a:r>
+              <a:rPr lang="en-US" sz="1100" dirty="0">
+                <a:solidFill>
+                  <a:srgbClr val="566573"/>
+                </a:solidFill>
+              </a:rPr>
+              <a:t>График показывает, как распределяются частоты токенов после очистки и удаления стоп-слов. Он помогает быстро увидеть ядро лексики произведения.</a:t>
+            </a:r>
+            <a:endParaRPr lang="en-US" sz="1100" dirty="0"/>
+          </a:p>
+        </p:txBody>
+      </p:sp>
+    </p:spTree>
+  </p:cSld>
+  <p:clrMapOvr>
+    <a:masterClrMapping/>
+  </p:clrMapOvr>
+</p:sld>
+</file>
+
 <file path=ppt/theme/theme1.xml><?xml version="1.0" encoding="utf-8"?>
 <a:theme xmlns:a="http://schemas.openxmlformats.org/drawingml/2006/main" name="Office Theme">
   <a:themeElements>

--- a/site/preza.pptx
+++ b/site/preza.pptx
@@ -4218,13 +4218,6 @@
 <file path=ppt/slides/slide2.xml><?xml version="1.0" encoding="utf-8"?>
 <p:sld xmlns:a="http://schemas.openxmlformats.org/drawingml/2006/main" xmlns:r="http://schemas.openxmlformats.org/officeDocument/2006/relationships" xmlns:p="http://schemas.openxmlformats.org/presentationml/2006/main">
   <p:cSld name="Slide 2">
-    <p:bg>
-      <p:bgPr>
-        <a:solidFill>
-          <a:srgbClr val="0B3D91"/>
-        </a:solidFill>
-      </p:bgPr>
-    </p:bg>
     <p:spTree>
       <p:nvGrpSpPr>
         <p:cNvPr id="1" name=""/>
@@ -4247,8 +4240,8 @@
         </p:nvSpPr>
         <p:spPr>
           <a:xfrm>
-            <a:off x="548640" y="1051560"/>
-            <a:ext cx="8138160" cy="1097280"/>
+            <a:off x="502920" y="320040"/>
+            <a:ext cx="3657600" cy="457200"/>
           </a:xfrm>
           <a:prstGeom prst="rect">
             <a:avLst/>
@@ -4260,21 +4253,46 @@
           <a:bodyPr wrap="square" rtlCol="0" anchor="ctr"/>
           <a:lstStyle/>
           <a:p>
-            <a:pPr algn="ctr" indent="0" marL="0">
-              <a:buNone/>
-            </a:pPr>
-            <a:r>
-              <a:rPr lang="en-US" sz="2800" b="1" dirty="0">
-                <a:solidFill>
-                  <a:srgbClr val="FFFFFF"/>
-                </a:solidFill>
-                <a:latin typeface="Aptos" pitchFamily="34" charset="0"/>
-                <a:ea typeface="Aptos" pitchFamily="34" charset="-122"/>
-                <a:cs typeface="Aptos" pitchFamily="34" charset="-120"/>
-              </a:rPr>
-              <a:t>Визуализация и исследование данныхпри анализе классической литературына примере романа  “Война и мир”</a:t>
-            </a:r>
-            <a:endParaRPr lang="en-US" sz="2800" dirty="0"/>
+            <a:pPr indent="0" marL="0">
+              <a:buNone/>
+            </a:pPr>
+            <a:r>
+              <a:rPr lang="en-US" sz="2400" b="1" dirty="0">
+                <a:solidFill>
+                  <a:srgbClr val="17324D"/>
+                </a:solidFill>
+              </a:rPr>
+              <a:t>Визуализация и исследование данных</a:t>
+            </a:r>
+            <a:endParaRPr lang="en-US" sz="2400" dirty="0"/>
+          </a:p>
+          <a:p>
+            <a:pPr indent="0" marL="0">
+              <a:buNone/>
+            </a:pPr>
+            <a:r>
+              <a:rPr lang="en-US" sz="2400" b="1" dirty="0">
+                <a:solidFill>
+                  <a:srgbClr val="17324D"/>
+                </a:solidFill>
+              </a:rPr>
+              <a:t>при анализе классической литературы</a:t>
+            </a:r>
+            <a:endParaRPr lang="en-US" sz="2400" dirty="0"/>
+          </a:p>
+          <a:p>
+            <a:pPr indent="0" marL="0">
+              <a:buNone/>
+            </a:pPr>
+            <a:r>
+              <a:rPr lang="en-US" sz="2400" b="1" dirty="0">
+                <a:solidFill>
+                  <a:srgbClr val="17324D"/>
+                </a:solidFill>
+              </a:rPr>
+              <a:t>на примере романа “Война и мир”</a:t>
+            </a:r>
+            <a:endParaRPr lang="en-US" sz="2400" dirty="0"/>
           </a:p>
         </p:txBody>
       </p:sp>
@@ -4286,8 +4304,8 @@
         </p:nvSpPr>
         <p:spPr>
           <a:xfrm>
-            <a:off x="914400" y="2377440"/>
-            <a:ext cx="7315200" cy="640080"/>
+            <a:off x="502920" y="868680"/>
+            <a:ext cx="3657600" cy="640080"/>
           </a:xfrm>
           <a:prstGeom prst="rect">
             <a:avLst/>
@@ -4299,21 +4317,129 @@
           <a:bodyPr wrap="square" rtlCol="0" anchor="ctr"/>
           <a:lstStyle/>
           <a:p>
-            <a:pPr algn="ctr" indent="0" marL="0">
-              <a:buNone/>
-            </a:pPr>
-            <a:r>
-              <a:rPr lang="en-US" sz="1100" dirty="0">
-                <a:solidFill>
-                  <a:srgbClr val="DDE7FF"/>
-                </a:solidFill>
-              </a:rPr>
-              <a:t>Министерство образования Иркутской областиМинистерство по молодежной политике Иркутской областиСибирское отделение Российской академии наукРегиональная конференция проектно-исследовательских работ«Наука. Технологии. Интеллект»Для учащихся 8-11 классовобщеобразовательных учреждений Иркутской области</a:t>
-            </a:r>
-            <a:endParaRPr lang="en-US" sz="1100" dirty="0"/>
-          </a:p>
-        </p:txBody>
-      </p:sp>
+            <a:pPr indent="0" marL="0">
+              <a:buNone/>
+            </a:pPr>
+            <a:r>
+              <a:rPr lang="en-US" sz="1150" dirty="0">
+                <a:solidFill>
+                  <a:srgbClr val="52606D"/>
+                </a:solidFill>
+              </a:rPr>
+              <a:t>Министерство образования Иркутской области</a:t>
+            </a:r>
+            <a:endParaRPr lang="en-US" sz="1150" dirty="0"/>
+          </a:p>
+          <a:p>
+            <a:pPr indent="0" marL="0">
+              <a:buNone/>
+            </a:pPr>
+            <a:r>
+              <a:rPr lang="en-US" sz="1150" dirty="0">
+                <a:solidFill>
+                  <a:srgbClr val="52606D"/>
+                </a:solidFill>
+              </a:rPr>
+              <a:t>Министерство по молодежной политике Иркутской области</a:t>
+            </a:r>
+            <a:endParaRPr lang="en-US" sz="1150" dirty="0"/>
+          </a:p>
+          <a:p>
+            <a:pPr indent="0" marL="0">
+              <a:buNone/>
+            </a:pPr>
+            <a:r>
+              <a:rPr lang="en-US" sz="1150" dirty="0">
+                <a:solidFill>
+                  <a:srgbClr val="52606D"/>
+                </a:solidFill>
+              </a:rPr>
+              <a:t>Сибирское отделение Российской академии наук</a:t>
+            </a:r>
+            <a:endParaRPr lang="en-US" sz="1150" dirty="0"/>
+          </a:p>
+          <a:p>
+            <a:pPr indent="0" marL="0">
+              <a:buNone/>
+            </a:pPr>
+            <a:r>
+              <a:rPr lang="en-US" sz="1150" dirty="0">
+                <a:solidFill>
+                  <a:srgbClr val="52606D"/>
+                </a:solidFill>
+              </a:rPr>
+              <a:t>Региональная конференция проектно-исследовательских работ</a:t>
+            </a:r>
+            <a:endParaRPr lang="en-US" sz="1150" dirty="0"/>
+          </a:p>
+          <a:p>
+            <a:pPr indent="0" marL="0">
+              <a:buNone/>
+            </a:pPr>
+            <a:r>
+              <a:rPr lang="en-US" sz="1150" dirty="0">
+                <a:solidFill>
+                  <a:srgbClr val="52606D"/>
+                </a:solidFill>
+              </a:rPr>
+              <a:t>«Наука. Технологии. Интеллект»</a:t>
+            </a:r>
+            <a:endParaRPr lang="en-US" sz="1150" dirty="0"/>
+          </a:p>
+          <a:p>
+            <a:pPr indent="0" marL="0">
+              <a:buNone/>
+            </a:pPr>
+            <a:r>
+              <a:rPr lang="en-US" sz="1150" dirty="0">
+                <a:solidFill>
+                  <a:srgbClr val="52606D"/>
+                </a:solidFill>
+              </a:rPr>
+              <a:t>Для учащихся 8-11 классов</a:t>
+            </a:r>
+            <a:endParaRPr lang="en-US" sz="1150" dirty="0"/>
+          </a:p>
+          <a:p>
+            <a:pPr indent="0" marL="0">
+              <a:buNone/>
+            </a:pPr>
+            <a:r>
+              <a:rPr lang="en-US" sz="1150" dirty="0">
+                <a:solidFill>
+                  <a:srgbClr val="52606D"/>
+                </a:solidFill>
+              </a:rPr>
+              <a:t>общеобразовательных учреждений Иркутской области</a:t>
+            </a:r>
+            <a:endParaRPr lang="en-US" sz="1150" dirty="0"/>
+          </a:p>
+        </p:txBody>
+      </p:sp>
+      <p:pic>
+        <p:nvPicPr>
+          <p:cNvPr id="4" name="Image 0" descr="/home/az/Code/bukivedenie/site/presentation/slide-02-intro.png">    </p:cNvPr>
+          <p:cNvPicPr>
+            <a:picLocks noChangeAspect="1"/>
+          </p:cNvPicPr>
+          <p:nvPr/>
+        </p:nvPicPr>
+        <p:blipFill>
+          <a:blip r:embed="rId1"/>
+          <a:stretch>
+            <a:fillRect/>
+          </a:stretch>
+        </p:blipFill>
+        <p:spPr>
+          <a:xfrm>
+            <a:off x="4343400" y="502920"/>
+            <a:ext cx="3840480" cy="2651760"/>
+          </a:xfrm>
+          <a:prstGeom prst="rect">
+            <a:avLst/>
+          </a:prstGeom>
+        </p:spPr>
+      </p:pic>
     </p:spTree>
   </p:cSld>
   <p:clrMapOvr>
@@ -4711,7 +4837,7 @@
         <p:spPr>
           <a:xfrm>
             <a:off x="502920" y="320040"/>
-            <a:ext cx="7772400" cy="411480"/>
+            <a:ext cx="3657600" cy="457200"/>
           </a:xfrm>
           <a:prstGeom prst="rect">
             <a:avLst/>
@@ -4727,14 +4853,14 @@
               <a:buNone/>
             </a:pPr>
             <a:r>
-              <a:rPr lang="en-US" sz="2200" b="1" dirty="0">
-                <a:solidFill>
-                  <a:srgbClr val="1C2833"/>
+              <a:rPr lang="en-US" sz="2400" b="1" dirty="0">
+                <a:solidFill>
+                  <a:srgbClr val="17324D"/>
                 </a:solidFill>
               </a:rPr>
               <a:t>Реализация и выводы</a:t>
             </a:r>
-            <a:endParaRPr lang="en-US" sz="2200" dirty="0"/>
+            <a:endParaRPr lang="en-US" sz="2400" dirty="0"/>
           </a:p>
         </p:txBody>
       </p:sp>
@@ -4746,8 +4872,8 @@
         </p:nvSpPr>
         <p:spPr>
           <a:xfrm>
-            <a:off x="502920" y="3657600"/>
-            <a:ext cx="3886200" cy="2514600"/>
+            <a:off x="502920" y="1554480"/>
+            <a:ext cx="3657600" cy="3200400"/>
           </a:xfrm>
           <a:prstGeom prst="rect">
             <a:avLst/>
@@ -4765,7 +4891,7 @@
             <a:r>
               <a:rPr lang="en-US" sz="1100" dirty="0">
                 <a:solidFill>
-                  <a:srgbClr val="1C2833"/>
+                  <a:srgbClr val="17324D"/>
                 </a:solidFill>
               </a:rPr>
               <a:t>Проект показывает полный конвейер: от текста до визуализаций и статической витрины. Все артефакты хранятся в outputs/&amp;lt;book_id&amp;gt;/ и экспортируются в site/public/data/.</a:t>
@@ -4785,7 +4911,7 @@
             <a:r>
               <a:rPr lang="en-US" sz="1100" dirty="0">
                 <a:solidFill>
-                  <a:srgbClr val="1C2833"/>
+                  <a:srgbClr val="17324D"/>
                 </a:solidFill>
               </a:rPr>
               <a:t>Следующие шаги — улучшение выделения именованных сущностей, проверка персонажей, сравнение изданий и масштабирование на корпус.</a:t>
@@ -4805,13 +4931,6 @@
 <file path=ppt/slides/slide24.xml><?xml version="1.0" encoding="utf-8"?>
 <p:sld xmlns:a="http://schemas.openxmlformats.org/drawingml/2006/main" xmlns:r="http://schemas.openxmlformats.org/officeDocument/2006/relationships" xmlns:p="http://schemas.openxmlformats.org/presentationml/2006/main">
   <p:cSld name="Slide 24">
-    <p:bg>
-      <p:bgPr>
-        <a:solidFill>
-          <a:srgbClr val="F6F8FC"/>
-        </a:solidFill>
-      </p:bgPr>
-    </p:bg>
     <p:spTree>
       <p:nvGrpSpPr>
         <p:cNvPr id="1" name=""/>
@@ -4834,8 +4953,8 @@
         </p:nvSpPr>
         <p:spPr>
           <a:xfrm>
-            <a:off x="914400" y="1371600"/>
-            <a:ext cx="6949440" cy="548640"/>
+            <a:off x="502920" y="320040"/>
+            <a:ext cx="3657600" cy="457200"/>
           </a:xfrm>
           <a:prstGeom prst="rect">
             <a:avLst/>
@@ -4847,18 +4966,18 @@
           <a:bodyPr wrap="square" rtlCol="0" anchor="ctr"/>
           <a:lstStyle/>
           <a:p>
-            <a:pPr algn="ctr" indent="0" marL="0">
-              <a:buNone/>
-            </a:pPr>
-            <a:r>
-              <a:rPr lang="en-US" sz="2600" b="1" dirty="0">
-                <a:solidFill>
-                  <a:srgbClr val="0F2742"/>
+            <a:pPr indent="0" marL="0">
+              <a:buNone/>
+            </a:pPr>
+            <a:r>
+              <a:rPr lang="en-US" sz="2400" b="1" dirty="0">
+                <a:solidFill>
+                  <a:srgbClr val="17324D"/>
                 </a:solidFill>
               </a:rPr>
               <a:t>Спасибо за внимание</a:t>
             </a:r>
-            <a:endParaRPr lang="en-US" sz="2600" dirty="0"/>
+            <a:endParaRPr lang="en-US" sz="2400" dirty="0"/>
           </a:p>
         </p:txBody>
       </p:sp>
@@ -4870,8 +4989,8 @@
         </p:nvSpPr>
         <p:spPr>
           <a:xfrm>
-            <a:off x="914400" y="2057400"/>
-            <a:ext cx="6949440" cy="640080"/>
+            <a:off x="502920" y="868680"/>
+            <a:ext cx="3657600" cy="640080"/>
           </a:xfrm>
           <a:prstGeom prst="rect">
             <a:avLst/>
@@ -4883,18 +5002,18 @@
           <a:bodyPr wrap="square" rtlCol="0" anchor="ctr"/>
           <a:lstStyle/>
           <a:p>
-            <a:pPr algn="ctr" indent="0" marL="0">
-              <a:buNone/>
-            </a:pPr>
-            <a:r>
-              <a:rPr lang="en-US" sz="1200" dirty="0">
+            <a:pPr indent="0" marL="0">
+              <a:buNone/>
+            </a:pPr>
+            <a:r>
+              <a:rPr lang="en-US" sz="1150" dirty="0">
                 <a:solidFill>
                   <a:srgbClr val="52606D"/>
                 </a:solidFill>
               </a:rPr>
               <a:t>Вопросы, замечания и дополнительные материалы доступны в репозитории.</a:t>
             </a:r>
-            <a:endParaRPr lang="en-US" sz="1200" dirty="0"/>
+            <a:endParaRPr lang="en-US" sz="1150" dirty="0"/>
           </a:p>
         </p:txBody>
       </p:sp>
@@ -4932,7 +5051,7 @@
         <p:spPr>
           <a:xfrm>
             <a:off x="502920" y="320040"/>
-            <a:ext cx="7772400" cy="411480"/>
+            <a:ext cx="3657600" cy="457200"/>
           </a:xfrm>
           <a:prstGeom prst="rect">
             <a:avLst/>
@@ -4948,14 +5067,14 @@
               <a:buNone/>
             </a:pPr>
             <a:r>
-              <a:rPr lang="en-US" sz="2200" b="1" dirty="0">
-                <a:solidFill>
-                  <a:srgbClr val="1C2833"/>
+              <a:rPr lang="en-US" sz="2400" b="1" dirty="0">
+                <a:solidFill>
+                  <a:srgbClr val="17324D"/>
                 </a:solidFill>
               </a:rPr>
               <a:t>Введение</a:t>
             </a:r>
-            <a:endParaRPr lang="en-US" sz="2200" dirty="0"/>
+            <a:endParaRPr lang="en-US" sz="2400" dirty="0"/>
           </a:p>
         </p:txBody>
       </p:sp>
@@ -4967,8 +5086,8 @@
         </p:nvSpPr>
         <p:spPr>
           <a:xfrm>
-            <a:off x="502920" y="3657600"/>
-            <a:ext cx="3886200" cy="2514600"/>
+            <a:off x="502920" y="1554480"/>
+            <a:ext cx="3657600" cy="3200400"/>
           </a:xfrm>
           <a:prstGeom prst="rect">
             <a:avLst/>
@@ -4986,7 +5105,7 @@
             <a:r>
               <a:rPr lang="en-US" sz="1100" dirty="0">
                 <a:solidFill>
-                  <a:srgbClr val="1C2833"/>
+                  <a:srgbClr val="17324D"/>
                 </a:solidFill>
               </a:rPr>
               <a:t>Цель: создать открытый и воспроизводимый способ анализа текста и построения визуализаций для крупного литературного произведения.</a:t>
@@ -5006,7 +5125,7 @@
             <a:r>
               <a:rPr lang="en-US" sz="1100" dirty="0">
                 <a:solidFill>
-                  <a:srgbClr val="1C2833"/>
+                  <a:srgbClr val="17324D"/>
                 </a:solidFill>
               </a:rPr>
               <a:t>Задачи:</a:t>
@@ -5026,7 +5145,7 @@
             <a:r>
               <a:rPr lang="en-US" sz="1100" dirty="0">
                 <a:solidFill>
-                  <a:srgbClr val="1C2833"/>
+                  <a:srgbClr val="17324D"/>
                 </a:solidFill>
               </a:rPr>
               <a:t>• разработать понятный формат визуализаций;</a:t>
@@ -5046,7 +5165,7 @@
             <a:r>
               <a:rPr lang="en-US" sz="1100" dirty="0">
                 <a:solidFill>
-                  <a:srgbClr val="1C2833"/>
+                  <a:srgbClr val="17324D"/>
                 </a:solidFill>
               </a:rPr>
               <a:t>• автоматизировать сбор и подготовку данных из текста;</a:t>
@@ -5066,7 +5185,7 @@
             <a:r>
               <a:rPr lang="en-US" sz="1100" dirty="0">
                 <a:solidFill>
-                  <a:srgbClr val="1C2833"/>
+                  <a:srgbClr val="17324D"/>
                 </a:solidFill>
               </a:rPr>
               <a:t>• построить наглядные визуализации;</a:t>
@@ -5086,7 +5205,7 @@
             <a:r>
               <a:rPr lang="en-US" sz="1100" dirty="0">
                 <a:solidFill>
-                  <a:srgbClr val="1C2833"/>
+                  <a:srgbClr val="17324D"/>
                 </a:solidFill>
               </a:rPr>
               <a:t>• опубликовать результат в открытом доступе.</a:t>
@@ -5129,7 +5248,7 @@
         <p:spPr>
           <a:xfrm>
             <a:off x="502920" y="320040"/>
-            <a:ext cx="7772400" cy="411480"/>
+            <a:ext cx="3657600" cy="457200"/>
           </a:xfrm>
           <a:prstGeom prst="rect">
             <a:avLst/>
@@ -5145,14 +5264,14 @@
               <a:buNone/>
             </a:pPr>
             <a:r>
-              <a:rPr lang="en-US" sz="2200" b="1" dirty="0">
-                <a:solidFill>
-                  <a:srgbClr val="1C2833"/>
+              <a:rPr lang="en-US" sz="2400" b="1" dirty="0">
+                <a:solidFill>
+                  <a:srgbClr val="17324D"/>
                 </a:solidFill>
               </a:rPr>
               <a:t>Система разработки на телефоне</a:t>
             </a:r>
-            <a:endParaRPr lang="en-US" sz="2200" dirty="0"/>
+            <a:endParaRPr lang="en-US" sz="2400" dirty="0"/>
           </a:p>
         </p:txBody>
       </p:sp>
@@ -5164,8 +5283,8 @@
         </p:nvSpPr>
         <p:spPr>
           <a:xfrm>
-            <a:off x="502920" y="3657600"/>
-            <a:ext cx="3886200" cy="2514600"/>
+            <a:off x="502920" y="1554480"/>
+            <a:ext cx="3657600" cy="3200400"/>
           </a:xfrm>
           <a:prstGeom prst="rect">
             <a:avLst/>
@@ -5183,7 +5302,7 @@
             <a:r>
               <a:rPr lang="en-US" sz="1100" dirty="0">
                 <a:solidFill>
-                  <a:srgbClr val="1C2833"/>
+                  <a:srgbClr val="17324D"/>
                 </a:solidFill>
               </a:rPr>
               <a:t>Инструменты:</a:t>
@@ -5203,7 +5322,7 @@
             <a:r>
               <a:rPr lang="en-US" sz="1100" dirty="0">
                 <a:solidFill>
-                  <a:srgbClr val="1C2833"/>
+                  <a:srgbClr val="17324D"/>
                 </a:solidFill>
               </a:rPr>
               <a:t>• Markor — черновики и заметки.</a:t>
@@ -5223,7 +5342,7 @@
             <a:r>
               <a:rPr lang="en-US" sz="1100" dirty="0">
                 <a:solidFill>
-                  <a:srgbClr val="1C2833"/>
+                  <a:srgbClr val="17324D"/>
                 </a:solidFill>
               </a:rPr>
               <a:t>• Termux — рабочая среда на Android.</a:t>
@@ -5243,7 +5362,7 @@
             <a:r>
               <a:rPr lang="en-US" sz="1100" dirty="0">
                 <a:solidFill>
-                  <a:srgbClr val="1C2833"/>
+                  <a:srgbClr val="17324D"/>
                 </a:solidFill>
               </a:rPr>
               <a:t>• GitHub — хранение и публикация проекта.</a:t>
@@ -5263,7 +5382,7 @@
             <a:r>
               <a:rPr lang="en-US" sz="1100" dirty="0">
                 <a:solidFill>
-                  <a:srgbClr val="1C2833"/>
+                  <a:srgbClr val="17324D"/>
                 </a:solidFill>
               </a:rPr>
               <a:t>• PI — помощник при написании кода.</a:t>
@@ -5283,7 +5402,7 @@
             <a:r>
               <a:rPr lang="en-US" sz="1100" dirty="0">
                 <a:solidFill>
-                  <a:srgbClr val="1C2833"/>
+                  <a:srgbClr val="17324D"/>
                 </a:solidFill>
               </a:rPr>
               <a:t>• Python — обработка текста и данных.</a:t>
@@ -5303,7 +5422,7 @@
             <a:r>
               <a:rPr lang="en-US" sz="1100" dirty="0">
                 <a:solidFill>
-                  <a:srgbClr val="1C2833"/>
+                  <a:srgbClr val="17324D"/>
                 </a:solidFill>
               </a:rPr>
               <a:t>• JS — веб-витрина визуализаций.</a:t>
@@ -5346,7 +5465,7 @@
         <p:spPr>
           <a:xfrm>
             <a:off x="502920" y="320040"/>
-            <a:ext cx="7772400" cy="411480"/>
+            <a:ext cx="3657600" cy="457200"/>
           </a:xfrm>
           <a:prstGeom prst="rect">
             <a:avLst/>
@@ -5362,14 +5481,14 @@
               <a:buNone/>
             </a:pPr>
             <a:r>
-              <a:rPr lang="en-US" sz="2200" b="1" dirty="0">
-                <a:solidFill>
-                  <a:srgbClr val="1C2833"/>
+              <a:rPr lang="en-US" sz="2400" b="1" dirty="0">
+                <a:solidFill>
+                  <a:srgbClr val="17324D"/>
                 </a:solidFill>
               </a:rPr>
               <a:t>Сбор данных</a:t>
             </a:r>
-            <a:endParaRPr lang="en-US" sz="2200" dirty="0"/>
+            <a:endParaRPr lang="en-US" sz="2400" dirty="0"/>
           </a:p>
         </p:txBody>
       </p:sp>
@@ -5381,8 +5500,8 @@
         </p:nvSpPr>
         <p:spPr>
           <a:xfrm>
-            <a:off x="502920" y="3657600"/>
-            <a:ext cx="3886200" cy="2514600"/>
+            <a:off x="502920" y="1554480"/>
+            <a:ext cx="3657600" cy="3200400"/>
           </a:xfrm>
           <a:prstGeom prst="rect">
             <a:avLst/>
@@ -5400,7 +5519,7 @@
             <a:r>
               <a:rPr lang="en-US" sz="1100" dirty="0">
                 <a:solidFill>
-                  <a:srgbClr val="1C2833"/>
+                  <a:srgbClr val="17324D"/>
                 </a:solidFill>
               </a:rPr>
               <a:t>Пайплайн:</a:t>
@@ -5420,7 +5539,7 @@
             <a:r>
               <a:rPr lang="en-US" sz="1100" dirty="0">
                 <a:solidFill>
-                  <a:srgbClr val="1C2833"/>
+                  <a:srgbClr val="17324D"/>
                 </a:solidFill>
               </a:rPr>
               <a:t>• нормализация текста (UTF-8, единые кавычки и тире);</a:t>
@@ -5440,7 +5559,7 @@
             <a:r>
               <a:rPr lang="en-US" sz="1100" dirty="0">
                 <a:solidFill>
-                  <a:srgbClr val="1C2833"/>
+                  <a:srgbClr val="17324D"/>
                 </a:solidFill>
               </a:rPr>
               <a:t>• разбиение на токены;</a:t>
@@ -5460,7 +5579,7 @@
             <a:r>
               <a:rPr lang="en-US" sz="1100" dirty="0">
                 <a:solidFill>
-                  <a:srgbClr val="1C2833"/>
+                  <a:srgbClr val="17324D"/>
                 </a:solidFill>
               </a:rPr>
               <a:t>• разбиение на предложения, абзацы, главы и диалоги;</a:t>
@@ -5480,7 +5599,7 @@
             <a:r>
               <a:rPr lang="en-US" sz="1100" dirty="0">
                 <a:solidFill>
-                  <a:srgbClr val="1C2833"/>
+                  <a:srgbClr val="17324D"/>
                 </a:solidFill>
               </a:rPr>
               <a:t>• лемматизация слов;</a:t>
@@ -5500,7 +5619,7 @@
             <a:r>
               <a:rPr lang="en-US" sz="1100" dirty="0">
                 <a:solidFill>
-                  <a:srgbClr val="1C2833"/>
+                  <a:srgbClr val="17324D"/>
                 </a:solidFill>
               </a:rPr>
               <a:t>• выделение имен собственных и их связей в тексте;</a:t>
@@ -5520,7 +5639,7 @@
             <a:r>
               <a:rPr lang="en-US" sz="1100" dirty="0">
                 <a:solidFill>
-                  <a:srgbClr val="1C2833"/>
+                  <a:srgbClr val="17324D"/>
                 </a:solidFill>
               </a:rPr>
               <a:t>• подсчет метрик сложности и тональности;</a:t>
@@ -5540,7 +5659,7 @@
             <a:r>
               <a:rPr lang="en-US" sz="1100" dirty="0">
                 <a:solidFill>
-                  <a:srgbClr val="1C2833"/>
+                  <a:srgbClr val="17324D"/>
                 </a:solidFill>
               </a:rPr>
               <a:t>• вывод данных в таблицы JSON и CSV.</a:t>
@@ -5583,7 +5702,7 @@
         <p:spPr>
           <a:xfrm>
             <a:off x="502920" y="320040"/>
-            <a:ext cx="7772400" cy="411480"/>
+            <a:ext cx="3657600" cy="457200"/>
           </a:xfrm>
           <a:prstGeom prst="rect">
             <a:avLst/>
@@ -5599,14 +5718,14 @@
               <a:buNone/>
             </a:pPr>
             <a:r>
-              <a:rPr lang="en-US" sz="2200" b="1" dirty="0">
-                <a:solidFill>
-                  <a:srgbClr val="1C2833"/>
+              <a:rPr lang="en-US" sz="2400" b="1" dirty="0">
+                <a:solidFill>
+                  <a:srgbClr val="17324D"/>
                 </a:solidFill>
               </a:rPr>
               <a:t>Визуализация</a:t>
             </a:r>
-            <a:endParaRPr lang="en-US" sz="2200" dirty="0"/>
+            <a:endParaRPr lang="en-US" sz="2400" dirty="0"/>
           </a:p>
         </p:txBody>
       </p:sp>
@@ -5618,8 +5737,8 @@
         </p:nvSpPr>
         <p:spPr>
           <a:xfrm>
-            <a:off x="502920" y="3657600"/>
-            <a:ext cx="3886200" cy="2514600"/>
+            <a:off x="502920" y="1554480"/>
+            <a:ext cx="3657600" cy="3200400"/>
           </a:xfrm>
           <a:prstGeom prst="rect">
             <a:avLst/>
@@ -5637,7 +5756,7 @@
             <a:r>
               <a:rPr lang="en-US" sz="1100" dirty="0">
                 <a:solidFill>
-                  <a:srgbClr val="1C2833"/>
+                  <a:srgbClr val="17324D"/>
                 </a:solidFill>
               </a:rPr>
               <a:t>• Визуализации сделаны на JavaScript без API и внешних серверов.</a:t>
@@ -5657,7 +5776,7 @@
             <a:r>
               <a:rPr lang="en-US" sz="1100" dirty="0">
                 <a:solidFill>
-                  <a:srgbClr val="1C2833"/>
+                  <a:srgbClr val="17324D"/>
                 </a:solidFill>
               </a:rPr>
               <a:t>• Проект выложен в GitHub и запускается локально как статический сайт.</a:t>
@@ -5700,7 +5819,7 @@
         <p:spPr>
           <a:xfrm>
             <a:off x="502920" y="320040"/>
-            <a:ext cx="7772400" cy="411480"/>
+            <a:ext cx="3657600" cy="457200"/>
           </a:xfrm>
           <a:prstGeom prst="rect">
             <a:avLst/>
@@ -5716,14 +5835,14 @@
               <a:buNone/>
             </a:pPr>
             <a:r>
-              <a:rPr lang="en-US" sz="2200" b="1" dirty="0">
-                <a:solidFill>
-                  <a:srgbClr val="1C2833"/>
+              <a:rPr lang="en-US" sz="2400" b="1" dirty="0">
+                <a:solidFill>
+                  <a:srgbClr val="17324D"/>
                 </a:solidFill>
               </a:rPr>
               <a:t>Реализация кода при помощи агента.</a:t>
             </a:r>
-            <a:endParaRPr lang="en-US" sz="2200" dirty="0"/>
+            <a:endParaRPr lang="en-US" sz="2400" dirty="0"/>
           </a:p>
         </p:txBody>
       </p:sp>
@@ -5735,8 +5854,8 @@
         </p:nvSpPr>
         <p:spPr>
           <a:xfrm>
-            <a:off x="502920" y="3657600"/>
-            <a:ext cx="3886200" cy="2514600"/>
+            <a:off x="502920" y="1554480"/>
+            <a:ext cx="3657600" cy="3200400"/>
           </a:xfrm>
           <a:prstGeom prst="rect">
             <a:avLst/>
@@ -5754,7 +5873,7 @@
             <a:r>
               <a:rPr lang="en-US" sz="1100" dirty="0">
                 <a:solidFill>
-                  <a:srgbClr val="1C2833"/>
+                  <a:srgbClr val="17324D"/>
                 </a:solidFill>
               </a:rPr>
               <a:t>В разработке я использовала агента PI.</a:t>
@@ -5774,7 +5893,7 @@
             <a:r>
               <a:rPr lang="en-US" sz="1100" dirty="0">
                 <a:solidFill>
-                  <a:srgbClr val="1C2833"/>
+                  <a:srgbClr val="17324D"/>
                 </a:solidFill>
               </a:rPr>
               <a:t>• Ему нужна максимально подробная спецификация.</a:t>
@@ -5794,7 +5913,7 @@
             <a:r>
               <a:rPr lang="en-US" sz="1100" dirty="0">
                 <a:solidFill>
-                  <a:srgbClr val="1C2833"/>
+                  <a:srgbClr val="17324D"/>
                 </a:solidFill>
               </a:rPr>
               <a:t>• Он быстро пишет большой объем кода.</a:t>
@@ -5814,7 +5933,7 @@
             <a:r>
               <a:rPr lang="en-US" sz="1100" dirty="0">
                 <a:solidFill>
-                  <a:srgbClr val="1C2833"/>
+                  <a:srgbClr val="17324D"/>
                 </a:solidFill>
               </a:rPr>
               <a:t>• Его нужно внимательно читать, чтобы не накапливать когнитивный долг.</a:t>
@@ -5834,7 +5953,7 @@
             <a:r>
               <a:rPr lang="en-US" sz="1100" dirty="0">
                 <a:solidFill>
-                  <a:srgbClr val="1C2833"/>
+                  <a:srgbClr val="17324D"/>
                 </a:solidFill>
               </a:rPr>
               <a:t>• Он склонен усложнять структуру репозитория.</a:t>
@@ -5854,7 +5973,7 @@
             <a:r>
               <a:rPr lang="en-US" sz="1100" dirty="0">
                 <a:solidFill>
-                  <a:srgbClr val="1C2833"/>
+                  <a:srgbClr val="17324D"/>
                 </a:solidFill>
               </a:rPr>
               <a:t>• После генерации нужен рефакторинг.</a:t>
@@ -5874,13 +5993,6 @@
 <file path=ppt/slides/slide8.xml><?xml version="1.0" encoding="utf-8"?>
 <p:sld xmlns:a="http://schemas.openxmlformats.org/drawingml/2006/main" xmlns:r="http://schemas.openxmlformats.org/officeDocument/2006/relationships" xmlns:p="http://schemas.openxmlformats.org/presentationml/2006/main">
   <p:cSld name="Slide 8">
-    <p:bg>
-      <p:bgPr>
-        <a:solidFill>
-          <a:srgbClr val="F6F8FC"/>
-        </a:solidFill>
-      </p:bgPr>
-    </p:bg>
     <p:spTree>
       <p:nvGrpSpPr>
         <p:cNvPr id="1" name=""/>
@@ -5903,8 +6015,8 @@
         </p:nvSpPr>
         <p:spPr>
           <a:xfrm>
-            <a:off x="914400" y="1371600"/>
-            <a:ext cx="6949440" cy="548640"/>
+            <a:off x="502920" y="320040"/>
+            <a:ext cx="3657600" cy="457200"/>
           </a:xfrm>
           <a:prstGeom prst="rect">
             <a:avLst/>
@@ -5916,18 +6028,18 @@
           <a:bodyPr wrap="square" rtlCol="0" anchor="ctr"/>
           <a:lstStyle/>
           <a:p>
-            <a:pPr algn="ctr" indent="0" marL="0">
-              <a:buNone/>
-            </a:pPr>
-            <a:r>
-              <a:rPr lang="en-US" sz="2600" b="1" dirty="0">
-                <a:solidFill>
-                  <a:srgbClr val="0F2742"/>
+            <a:pPr indent="0" marL="0">
+              <a:buNone/>
+            </a:pPr>
+            <a:r>
+              <a:rPr lang="en-US" sz="2400" b="1" dirty="0">
+                <a:solidFill>
+                  <a:srgbClr val="17324D"/>
                 </a:solidFill>
               </a:rPr>
               <a:t>Спасибо за внимание.</a:t>
             </a:r>
-            <a:endParaRPr lang="en-US" sz="2600" dirty="0"/>
+            <a:endParaRPr lang="en-US" sz="2400" dirty="0"/>
           </a:p>
         </p:txBody>
       </p:sp>
@@ -5939,8 +6051,8 @@
         </p:nvSpPr>
         <p:spPr>
           <a:xfrm>
-            <a:off x="914400" y="2057400"/>
-            <a:ext cx="6949440" cy="640080"/>
+            <a:off x="502920" y="868680"/>
+            <a:ext cx="3657600" cy="640080"/>
           </a:xfrm>
           <a:prstGeom prst="rect">
             <a:avLst/>
@@ -5952,18 +6064,18 @@
           <a:bodyPr wrap="square" rtlCol="0" anchor="ctr"/>
           <a:lstStyle/>
           <a:p>
-            <a:pPr algn="ctr" indent="0" marL="0">
-              <a:buNone/>
-            </a:pPr>
-            <a:r>
-              <a:rPr lang="en-US" sz="1200" dirty="0">
+            <a:pPr indent="0" marL="0">
+              <a:buNone/>
+            </a:pPr>
+            <a:r>
+              <a:rPr lang="en-US" sz="1150" dirty="0">
                 <a:solidFill>
                   <a:srgbClr val="52606D"/>
                 </a:solidFill>
               </a:rPr>
               <a:t>Дополнительные материалы, визуализации и код доступны в репозитории.</a:t>
             </a:r>
-            <a:endParaRPr lang="en-US" sz="1200" dirty="0"/>
+            <a:endParaRPr lang="en-US" sz="1150" dirty="0"/>
           </a:p>
         </p:txBody>
       </p:sp>
